--- a/presentation/TASTI_SatDashboard-決賽簡報.pptx
+++ b/presentation/TASTI_SatDashboard-決賽簡報.pptx
@@ -112,24 +112,24 @@
   <p:extLst>
     <p:ext uri="{521415D9-36F7-43E2-AB2F-B90AF26B5E84}">
       <p14:sectionLst xmlns:p14="http://schemas.microsoft.com/office/powerpoint/2010/main">
-        <p14:section name="開場" id="{fbdae2e5-bc5c-f318-0149-4ef21d0e667e}">
+        <p14:section name="開場" id="{3f5096d1-6bee-6b12-8b3f-cc3258ae7e16}">
           <p14:sldIdLst>
             <p14:sldId id="256"/>
           </p14:sldIdLst>
         </p14:section>
-        <p14:section name="問題與方法" id="{9799581d-4673-1da2-d796-3c4e3bf2fcab}">
+        <p14:section name="問題與方法" id="{19af9d17-ec7f-8994-7ea7-00495ee6a29a}">
           <p14:sldIdLst>
             <p14:sldId id="257"/>
             <p14:sldId id="258"/>
           </p14:sldIdLst>
         </p14:section>
-        <p14:section name="成果與驗證" id="{b28da743-6496-c6f2-05b7-c0a8b12fa01e}">
+        <p14:section name="成果與驗證" id="{9b563ea4-ea1b-0285-e91a-410005b857b8}">
           <p14:sldIdLst>
             <p14:sldId id="259"/>
             <p14:sldId id="260"/>
           </p14:sldIdLst>
         </p14:section>
-        <p14:section name="落地" id="{74d85097-df9d-3649-62a8-1468db033f2c}">
+        <p14:section name="落地" id="{5340f6f6-1557-1d98-cb5c-8851e28fa9e2}">
           <p14:sldIdLst>
             <p14:sldId id="261"/>
           </p14:sldIdLst>
@@ -1834,7 +1834,7 @@
           <a:p>
             <a:r>
               <a:rPr lang="en-US" dirty="0"/>
-              <a:t>我們不只做系統，也量了它準不準。影像目視與官方圖層的有無裸露一致率只有 69%；舊版近期變化訊號約四分之一屬實。我們參考水保署電子報改用紅邊指標。在高雄全區，零星的下降經盲判只有 5/26 屬實；但在大事件後，花蓮有 75%、太魯閣有 43% 的崩塌坡面被抓到，沒有事件的坡面誤報約 2%。左邊這張圖是太魯閣：崩塌占坡面不到 5% 時只抓到 7%，超過四成時抓到 93%。所以紅邊指標適合大事件後快速找出植被大片消失的坡面，自動訊號只用來排出先看誰，最後一定由人確認。（約 55 秒）</a:t>
+              <a:t>我們不只做系統，也量了它準不準。影像目視與官方圖層的有無裸露一致率只有 69%；舊版近期變化訊號約四分之一屬實。我們參考水保署電子報改用紅邊指標。在高雄全區，零星的下降經分層盲判只有約 25% 屬實，信賴區間 5% 到 45%；但在大事件後，花蓮有 75%、太魯閣有 43% 的崩塌坡面被抓到，沒有事件的坡面誤報約 2%。左邊這張圖是太魯閣：崩塌占坡面不到 5% 時只抓到 7%，超過四成時抓到 93%。所以紅邊指標適合大事件後快速找出植被大片消失的坡面，自動訊號只用來排出先看誰，最後一定由人確認。（約 55 秒）</a:t>
             </a:r>
             <a:endParaRPr lang="en-US" dirty="0"/>
           </a:p>
@@ -5308,7 +5308,7 @@
                   <a:schemeClr val="accent4"/>
                 </a:solidFill>
               </a:rPr>
-              <a:t>人工盲測 n=29</a:t>
+              <a:t>人工盲測 n=29；95% CI 51–83%</a:t>
             </a:r>
             <a:endParaRPr lang="en-US" sz="1100" dirty="0"/>
           </a:p>
@@ -5443,7 +5443,7 @@
                   <a:schemeClr val="accent4"/>
                 </a:solidFill>
               </a:rPr>
-              <a:t>24 個分層坡面</a:t>
+              <a:t>分層驗證 S1 層 n=4；95% CI 5–70%</a:t>
             </a:r>
             <a:endParaRPr lang="en-US" sz="1100" dirty="0"/>
           </a:p>
@@ -5506,7 +5506,7 @@
                   <a:schemeClr val="accent2"/>
                 </a:solidFill>
               </a:rPr>
-              <a:t>5/26</a:t>
+              <a:t>約 25%</a:t>
             </a:r>
             <a:endParaRPr lang="en-US" sz="2800" dirty="0"/>
           </a:p>
@@ -5578,7 +5578,7 @@
                   <a:schemeClr val="accent4"/>
                 </a:solidFill>
               </a:rPr>
-              <a:t>32 個坡面分層盲判</a:t>
+              <a:t>分層加權（5/26）；95% CI 5–45%</a:t>
             </a:r>
             <a:endParaRPr lang="en-US" sz="1100" dirty="0"/>
           </a:p>
@@ -5713,7 +5713,7 @@
                   <a:schemeClr val="accent4"/>
                 </a:solidFill>
               </a:rPr>
-              <a:t>事件目錄對照，崩塌占坡面兩成以上才可靠</a:t>
+              <a:t>95% CI 66–83%・38–48%；誤報 1.9%・2.0%</a:t>
             </a:r>
             <a:endParaRPr lang="en-US" sz="1100" dirty="0"/>
           </a:p>

--- a/presentation/TASTI_SatDashboard-決賽簡報.pptx
+++ b/presentation/TASTI_SatDashboard-決賽簡報.pptx
@@ -11,9 +11,11 @@
     <p:sldId id="259" r:id="rId5"/>
     <p:sldId id="260" r:id="rId6"/>
     <p:sldId id="261" r:id="rId7"/>
+    <p:sldId id="262" r:id="rId8"/>
+    <p:sldId id="263" r:id="rId9"/>
   </p:sldIdLst>
   <p:notesMasterIdLst>
-    <p:notesMasterId r:id="rId8"/>
+    <p:notesMasterId r:id="rId10"/>
   </p:notesMasterIdLst>
   <p:sldSz cx="12192000" cy="6858000"/>
   <p:notesSz cx="6858000" cy="12192000"/>
@@ -112,26 +114,32 @@
   <p:extLst>
     <p:ext uri="{521415D9-36F7-43E2-AB2F-B90AF26B5E84}">
       <p14:sectionLst xmlns:p14="http://schemas.microsoft.com/office/powerpoint/2010/main">
-        <p14:section name="開場" id="{3f5096d1-6bee-6b12-8b3f-cc3258ae7e16}">
+        <p14:section name="開場" id="{3b007b5c-3dc5-8d03-bf21-32d7d37d0834}">
           <p14:sldIdLst>
             <p14:sldId id="256"/>
           </p14:sldIdLst>
         </p14:section>
-        <p14:section name="問題與方法" id="{19af9d17-ec7f-8994-7ea7-00495ee6a29a}">
+        <p14:section name="問題與方法" id="{6a8ca646-5483-ddc6-1ebd-e0ca97124c67}">
           <p14:sldIdLst>
             <p14:sldId id="257"/>
             <p14:sldId id="258"/>
           </p14:sldIdLst>
         </p14:section>
-        <p14:section name="成果與驗證" id="{9b563ea4-ea1b-0285-e91a-410005b857b8}">
+        <p14:section name="成果與驗證" id="{16ed2de3-4792-cccb-29ff-5dbb7088d0fc}">
           <p14:sldIdLst>
             <p14:sldId id="259"/>
             <p14:sldId id="260"/>
           </p14:sldIdLst>
         </p14:section>
-        <p14:section name="落地" id="{5340f6f6-1557-1d98-cb5c-8851e28fa9e2}">
+        <p14:section name="落地" id="{65173dfe-13bf-67d3-8a1c-42b30702e95e}">
           <p14:sldIdLst>
             <p14:sldId id="261"/>
+          </p14:sldIdLst>
+        </p14:section>
+        <p14:section name="備用" id="{a7aa1d1a-fa10-ee07-bebe-103f6fe6690a}">
+          <p14:sldIdLst>
+            <p14:sldId id="262"/>
+            <p14:sldId id="263"/>
           </p14:sldIdLst>
         </p14:section>
       </p14:sectionLst>
@@ -1946,6 +1954,182 @@
             <a:fld id="{F7021451-1387-4CA6-816F-3879F97B5CBC}" type="slidenum">
               <a:rPr lang="en-US"/>
               <a:t>6</a:t>
+            </a:fld>
+            <a:endParaRPr lang="en-US"/>
+          </a:p>
+        </p:txBody>
+      </p:sp>
+    </p:spTree>
+    <p:extLst>
+      <p:ext uri="{BB962C8B-B14F-4D97-AF65-F5344CB8AC3E}">
+        <p14:creationId xmlns:p14="http://schemas.microsoft.com/office/powerpoint/2010/main" val="1024086991"/>
+      </p:ext>
+    </p:extLst>
+  </p:cSld>
+  <p:clrMapOvr>
+    <a:masterClrMapping/>
+  </p:clrMapOvr>
+</p:notes>
+</file>
+
+<file path=ppt/notesSlides/notesSlide7.xml><?xml version="1.0" encoding="utf-8"?>
+<p:notes xmlns:a="http://schemas.openxmlformats.org/drawingml/2006/main" xmlns:r="http://schemas.openxmlformats.org/officeDocument/2006/relationships" xmlns:p="http://schemas.openxmlformats.org/presentationml/2006/main">
+  <p:cSld>
+    <p:spTree>
+      <p:nvGrpSpPr>
+        <p:cNvPr id="1" name=""/>
+        <p:cNvGrpSpPr/>
+        <p:nvPr/>
+      </p:nvGrpSpPr>
+      <p:grpSpPr>
+        <a:xfrm>
+          <a:off x="0" y="0"/>
+          <a:ext cx="0" cy="0"/>
+          <a:chOff x="0" y="0"/>
+          <a:chExt cx="0" cy="0"/>
+        </a:xfrm>
+      </p:grpSpPr>
+      <p:sp>
+        <p:nvSpPr>
+          <p:cNvPr id="2" name="Slide Image Placeholder 1"/>
+          <p:cNvSpPr>
+            <a:spLocks noGrp="1" noRot="1" noChangeAspect="1"/>
+          </p:cNvSpPr>
+          <p:nvPr>
+            <p:ph type="sldImg"/>
+          </p:nvPr>
+        </p:nvSpPr>
+        <p:spPr/>
+      </p:sp>
+      <p:sp>
+        <p:nvSpPr>
+          <p:cNvPr id="3" name="Notes Placeholder 2"/>
+          <p:cNvSpPr>
+            <a:spLocks noGrp="1"/>
+          </p:cNvSpPr>
+          <p:nvPr>
+            <p:ph type="body" idx="1"/>
+          </p:nvPr>
+        </p:nvSpPr>
+        <p:spPr/>
+        <p:txBody>
+          <a:bodyPr/>
+          <a:lstStyle/>
+          <a:p>
+            <a:r>
+              <a:rPr lang="en-US" dirty="0"/>
+              <a:t>（備用，評審問到系統藍圖或下一步時再翻。）專家提出的崩塌智慧防災平台有六個模組。我們目前做到的是平時篩查：坡地底圖、多源監測和 AI 輔助判釋都有一部分，其中道路與建物暴露是用 OpenStreetMap 疊合，回答坡面崩了會碰到什麼，但不改候選層級。地質目前只拿到影像圖磚，五萬分之一的斷層、位態、順向坡要取得向量後才能分析。降雨觸發、下游災害鏈和應變工作流還沒做，這是從平時篩查走向事件反應的下一步。</a:t>
+            </a:r>
+            <a:endParaRPr lang="en-US" dirty="0"/>
+          </a:p>
+        </p:txBody>
+      </p:sp>
+      <p:sp>
+        <p:nvSpPr>
+          <p:cNvPr id="4" name="Slide Number Placeholder 3"/>
+          <p:cNvSpPr>
+            <a:spLocks noGrp="1"/>
+          </p:cNvSpPr>
+          <p:nvPr>
+            <p:ph type="sldNum" sz="quarter" idx="10"/>
+          </p:nvPr>
+        </p:nvSpPr>
+        <p:spPr/>
+        <p:txBody>
+          <a:bodyPr/>
+          <a:lstStyle/>
+          <a:p>
+            <a:fld id="{F7021451-1387-4CA6-816F-3879F97B5CBC}" type="slidenum">
+              <a:rPr lang="en-US"/>
+              <a:t>7</a:t>
+            </a:fld>
+            <a:endParaRPr lang="en-US"/>
+          </a:p>
+        </p:txBody>
+      </p:sp>
+    </p:spTree>
+    <p:extLst>
+      <p:ext uri="{BB962C8B-B14F-4D97-AF65-F5344CB8AC3E}">
+        <p14:creationId xmlns:p14="http://schemas.microsoft.com/office/powerpoint/2010/main" val="1024086991"/>
+      </p:ext>
+    </p:extLst>
+  </p:cSld>
+  <p:clrMapOvr>
+    <a:masterClrMapping/>
+  </p:clrMapOvr>
+</p:notes>
+</file>
+
+<file path=ppt/notesSlides/notesSlide8.xml><?xml version="1.0" encoding="utf-8"?>
+<p:notes xmlns:a="http://schemas.openxmlformats.org/drawingml/2006/main" xmlns:r="http://schemas.openxmlformats.org/officeDocument/2006/relationships" xmlns:p="http://schemas.openxmlformats.org/presentationml/2006/main">
+  <p:cSld>
+    <p:spTree>
+      <p:nvGrpSpPr>
+        <p:cNvPr id="1" name=""/>
+        <p:cNvGrpSpPr/>
+        <p:nvPr/>
+      </p:nvGrpSpPr>
+      <p:grpSpPr>
+        <a:xfrm>
+          <a:off x="0" y="0"/>
+          <a:ext cx="0" cy="0"/>
+          <a:chOff x="0" y="0"/>
+          <a:chExt cx="0" cy="0"/>
+        </a:xfrm>
+      </p:grpSpPr>
+      <p:sp>
+        <p:nvSpPr>
+          <p:cNvPr id="2" name="Slide Image Placeholder 1"/>
+          <p:cNvSpPr>
+            <a:spLocks noGrp="1" noRot="1" noChangeAspect="1"/>
+          </p:cNvSpPr>
+          <p:nvPr>
+            <p:ph type="sldImg"/>
+          </p:nvPr>
+        </p:nvSpPr>
+        <p:spPr/>
+      </p:sp>
+      <p:sp>
+        <p:nvSpPr>
+          <p:cNvPr id="3" name="Notes Placeholder 2"/>
+          <p:cNvSpPr>
+            <a:spLocks noGrp="1"/>
+          </p:cNvSpPr>
+          <p:nvPr>
+            <p:ph type="body" idx="1"/>
+          </p:nvPr>
+        </p:nvSpPr>
+        <p:spPr/>
+        <p:txBody>
+          <a:bodyPr/>
+          <a:lstStyle/>
+          <a:p>
+            <a:r>
+              <a:rPr lang="en-US" dirty="0"/>
+              <a:t>（備用，評審問到地質時再翻。）我們用 BigGIS 引用的公開地層圖，疊上 2021 到 2024 年的年度崩塌圖層，以坡度 15 度以上的有效坡面當分母，算每個地層的崩塌密度。全區約 5.3%；始新世的西村層，也就是板岩，8.1%，是平均的 1.5 倍；上新世的錦水頁岩只有 1.7%。紅邊下降的比例在幾個主要地層都約 2%，差異不大。限制是這份地層圖比例尺小，沒有斷層和位態，只能做描述性統計；斷層距離和順向坡要取得五萬分之一的向量才能分析。</a:t>
+            </a:r>
+            <a:endParaRPr lang="en-US" dirty="0"/>
+          </a:p>
+        </p:txBody>
+      </p:sp>
+      <p:sp>
+        <p:nvSpPr>
+          <p:cNvPr id="4" name="Slide Number Placeholder 3"/>
+          <p:cNvSpPr>
+            <a:spLocks noGrp="1"/>
+          </p:cNvSpPr>
+          <p:nvPr>
+            <p:ph type="sldNum" sz="quarter" idx="10"/>
+          </p:nvPr>
+        </p:nvSpPr>
+        <p:spPr/>
+        <p:txBody>
+          <a:bodyPr/>
+          <a:lstStyle/>
+          <a:p>
+            <a:fld id="{F7021451-1387-4CA6-816F-3879F97B5CBC}" type="slidenum">
+              <a:rPr lang="en-US"/>
+              <a:t>8</a:t>
             </a:fld>
             <a:endParaRPr lang="en-US"/>
           </a:p>
@@ -6301,6 +6485,7008 @@
             <a:fld id="{F7021451-1387-4CA6-816F-3879F97B5CBC}" type="slidenum">
               <a:rPr b="0" lang="en-US"/>
               <a:t>6</a:t>
+            </a:fld>
+            <a:endParaRPr lang="en-US"/>
+          </a:p>
+        </p:txBody>
+      </p:sp>
+    </p:spTree>
+  </p:cSld>
+  <p:clrMapOvr>
+    <a:masterClrMapping/>
+  </p:clrMapOvr>
+</p:sld>
+</file>
+
+<file path=ppt/slides/slide7.xml><?xml version="1.0" encoding="utf-8"?>
+<p:sld xmlns:a="http://schemas.openxmlformats.org/drawingml/2006/main" xmlns:r="http://schemas.openxmlformats.org/officeDocument/2006/relationships" xmlns:p="http://schemas.openxmlformats.org/presentationml/2006/main">
+  <p:cSld name="Slide 7">
+    <p:spTree>
+      <p:nvGrpSpPr>
+        <p:cNvPr id="1" name=""/>
+        <p:cNvGrpSpPr/>
+        <p:nvPr/>
+      </p:nvGrpSpPr>
+      <p:grpSpPr>
+        <a:xfrm>
+          <a:off x="0" y="0"/>
+          <a:ext cx="0" cy="0"/>
+          <a:chOff x="0" y="0"/>
+          <a:chExt cx="0" cy="0"/>
+        </a:xfrm>
+      </p:grpSpPr>
+      <p:sp>
+        <p:nvSpPr>
+          <p:cNvPr id="2" name="Text 0"/>
+          <p:cNvSpPr/>
+          <p:nvPr>
+            <p:ph idx="100" type="title" hasCustomPrompt="1"/>
+          </p:nvPr>
+        </p:nvSpPr>
+        <p:spPr>
+          <a:xfrm>
+            <a:off x="548640" y="320040"/>
+            <a:ext cx="11064240" cy="777240"/>
+          </a:xfrm>
+          <a:prstGeom prst="rect">
+            <a:avLst/>
+          </a:prstGeom>
+          <a:noFill/>
+          <a:ln/>
+        </p:spPr>
+        <p:txBody>
+          <a:bodyPr wrap="square" lIns="0" tIns="0" rIns="0" bIns="0" rtlCol="0" anchor="ctr"/>
+          <a:lstStyle/>
+          <a:p>
+            <a:pPr indent="0" marL="0">
+              <a:buNone/>
+            </a:pPr>
+            <a:r>
+              <a:rPr lang="en-US" sz="3200" b="1" dirty="0">
+                <a:solidFill>
+                  <a:schemeClr val="tx2"/>
+                </a:solidFill>
+              </a:rPr>
+              <a:t>備用｜對照崩塌智慧防災構想：現在在哪、下一步</a:t>
+            </a:r>
+            <a:endParaRPr lang="en-US" sz="3200" dirty="0"/>
+          </a:p>
+        </p:txBody>
+      </p:sp>
+      <p:sp>
+        <p:nvSpPr>
+          <p:cNvPr id="3" name="mod0"/>
+          <p:cNvSpPr/>
+          <p:nvPr/>
+        </p:nvSpPr>
+        <p:spPr>
+          <a:xfrm>
+            <a:off x="548640" y="1234440"/>
+            <a:ext cx="3566160" cy="2148840"/>
+          </a:xfrm>
+          <a:prstGeom prst="roundRect">
+            <a:avLst>
+              <a:gd name="adj" fmla="val 4255"/>
+            </a:avLst>
+          </a:prstGeom>
+          <a:solidFill>
+            <a:schemeClr val="bg2"/>
+          </a:solidFill>
+          <a:ln w="12700">
+            <a:solidFill>
+              <a:schemeClr val="bg2"/>
+            </a:solidFill>
+            <a:prstDash val="solid"/>
+          </a:ln>
+        </p:spPr>
+      </p:sp>
+      <p:sp>
+        <p:nvSpPr>
+          <p:cNvPr id="4" name="modH0"/>
+          <p:cNvSpPr txBox="1"/>
+          <p:nvPr/>
+        </p:nvSpPr>
+        <p:spPr>
+          <a:xfrm>
+            <a:off x="731520" y="1344168"/>
+            <a:ext cx="2468880" cy="411480"/>
+          </a:xfrm>
+          <a:prstGeom prst="rect">
+            <a:avLst/>
+          </a:prstGeom>
+          <a:noFill/>
+          <a:ln/>
+        </p:spPr>
+        <p:txBody>
+          <a:bodyPr wrap="square" lIns="0" tIns="0" rIns="0" bIns="0" rtlCol="0" anchor="ctr"/>
+          <a:lstStyle/>
+          <a:p>
+            <a:pPr indent="0" marL="0">
+              <a:buNone/>
+            </a:pPr>
+            <a:r>
+              <a:rPr lang="en-US" sz="1600" b="1" dirty="0">
+                <a:solidFill>
+                  <a:schemeClr val="tx1"/>
+                </a:solidFill>
+              </a:rPr>
+              <a:t>一、坡地風險底圖</a:t>
+            </a:r>
+            <a:endParaRPr lang="en-US" sz="1600" dirty="0"/>
+          </a:p>
+        </p:txBody>
+      </p:sp>
+      <p:sp>
+        <p:nvSpPr>
+          <p:cNvPr id="5" name="modP0"/>
+          <p:cNvSpPr/>
+          <p:nvPr/>
+        </p:nvSpPr>
+        <p:spPr>
+          <a:xfrm>
+            <a:off x="3246120" y="1389888"/>
+            <a:ext cx="685800" cy="329184"/>
+          </a:xfrm>
+          <a:prstGeom prst="roundRect">
+            <a:avLst>
+              <a:gd name="adj" fmla="val 50000"/>
+            </a:avLst>
+          </a:prstGeom>
+          <a:solidFill>
+            <a:schemeClr val="accent1"/>
+          </a:solidFill>
+          <a:ln w="12700">
+            <a:solidFill>
+              <a:schemeClr val="accent1"/>
+            </a:solidFill>
+            <a:prstDash val="solid"/>
+          </a:ln>
+        </p:spPr>
+      </p:sp>
+      <p:sp>
+        <p:nvSpPr>
+          <p:cNvPr id="6" name="modPT0"/>
+          <p:cNvSpPr txBox="1"/>
+          <p:nvPr/>
+        </p:nvSpPr>
+        <p:spPr>
+          <a:xfrm>
+            <a:off x="3246120" y="1389888"/>
+            <a:ext cx="685800" cy="329184"/>
+          </a:xfrm>
+          <a:prstGeom prst="rect">
+            <a:avLst/>
+          </a:prstGeom>
+          <a:noFill/>
+          <a:ln/>
+        </p:spPr>
+        <p:txBody>
+          <a:bodyPr wrap="square" lIns="0" tIns="0" rIns="0" bIns="0" rtlCol="0" anchor="ctr"/>
+          <a:lstStyle/>
+          <a:p>
+            <a:pPr algn="ctr" indent="0" marL="0">
+              <a:buNone/>
+            </a:pPr>
+            <a:r>
+              <a:rPr lang="en-US" sz="1200" b="1" dirty="0">
+                <a:solidFill>
+                  <a:schemeClr val="bg1"/>
+                </a:solidFill>
+              </a:rPr>
+              <a:t>部分</a:t>
+            </a:r>
+            <a:endParaRPr lang="en-US" sz="1200" dirty="0"/>
+          </a:p>
+        </p:txBody>
+      </p:sp>
+      <p:sp>
+        <p:nvSpPr>
+          <p:cNvPr id="7" name="modT0"/>
+          <p:cNvSpPr txBox="1"/>
+          <p:nvPr/>
+        </p:nvSpPr>
+        <p:spPr>
+          <a:xfrm>
+            <a:off x="731520" y="1828800"/>
+            <a:ext cx="3200400" cy="1463040"/>
+          </a:xfrm>
+          <a:prstGeom prst="rect">
+            <a:avLst/>
+          </a:prstGeom>
+          <a:noFill/>
+          <a:ln/>
+        </p:spPr>
+        <p:txBody>
+          <a:bodyPr wrap="square" lIns="0" tIns="0" rIns="0" bIns="0" rtlCol="0" anchor="t"/>
+          <a:lstStyle/>
+          <a:p>
+            <a:pPr indent="0" marL="0">
+              <a:spcAft>
+                <a:spcPts val="400"/>
+              </a:spcAft>
+              <a:buNone/>
+            </a:pPr>
+            <a:r>
+              <a:rPr lang="en-US" sz="1400" b="1" dirty="0">
+                <a:solidFill>
+                  <a:schemeClr val="tx2"/>
+                </a:solidFill>
+              </a:rPr>
+              <a:t>已有　</a:t>
+            </a:r>
+            <a:pPr indent="0" marL="0">
+              <a:spcAft>
+                <a:spcPts val="400"/>
+              </a:spcAft>
+              <a:buNone/>
+            </a:pPr>
+            <a:r>
+              <a:rPr lang="en-US" sz="1400" dirty="0">
+                <a:solidFill>
+                  <a:schemeClr val="tx1"/>
+                </a:solidFill>
+              </a:rPr>
+              <a:t>20 m DEM、≥15° 有效坡面、事件目錄、四年崩塌圖層；新增 OSM 道路與建物暴露（坡面外推 100 m）</a:t>
+            </a:r>
+            <a:endParaRPr lang="en-US" sz="1400" dirty="0"/>
+          </a:p>
+          <a:p>
+            <a:pPr indent="0" marL="0">
+              <a:spcAft>
+                <a:spcPts val="400"/>
+              </a:spcAft>
+              <a:buNone/>
+            </a:pPr>
+            <a:r>
+              <a:rPr lang="en-US" sz="1400" b="1" dirty="0">
+                <a:solidFill>
+                  <a:schemeClr val="accent4"/>
+                </a:solidFill>
+              </a:rPr>
+              <a:t>缺口　</a:t>
+            </a:r>
+            <a:pPr indent="0" marL="0">
+              <a:spcAft>
+                <a:spcPts val="400"/>
+              </a:spcAft>
+              <a:buNone/>
+            </a:pPr>
+            <a:r>
+              <a:rPr lang="en-US" sz="1400" dirty="0">
+                <a:solidFill>
+                  <a:schemeClr val="accent4"/>
+                </a:solidFill>
+              </a:rPr>
+              <a:t>五萬分之一斷層、位態、順向坡尚缺向量（小比例尺地層見下頁）</a:t>
+            </a:r>
+            <a:endParaRPr lang="en-US" sz="1400" dirty="0"/>
+          </a:p>
+        </p:txBody>
+      </p:sp>
+      <p:sp>
+        <p:nvSpPr>
+          <p:cNvPr id="8" name="mod1"/>
+          <p:cNvSpPr/>
+          <p:nvPr/>
+        </p:nvSpPr>
+        <p:spPr>
+          <a:xfrm>
+            <a:off x="4297680" y="1234440"/>
+            <a:ext cx="3566160" cy="2148840"/>
+          </a:xfrm>
+          <a:prstGeom prst="roundRect">
+            <a:avLst>
+              <a:gd name="adj" fmla="val 4255"/>
+            </a:avLst>
+          </a:prstGeom>
+          <a:solidFill>
+            <a:schemeClr val="bg2"/>
+          </a:solidFill>
+          <a:ln w="12700">
+            <a:solidFill>
+              <a:schemeClr val="bg2"/>
+            </a:solidFill>
+            <a:prstDash val="solid"/>
+          </a:ln>
+        </p:spPr>
+      </p:sp>
+      <p:sp>
+        <p:nvSpPr>
+          <p:cNvPr id="9" name="modH1"/>
+          <p:cNvSpPr txBox="1"/>
+          <p:nvPr/>
+        </p:nvSpPr>
+        <p:spPr>
+          <a:xfrm>
+            <a:off x="4480560" y="1344168"/>
+            <a:ext cx="2468880" cy="411480"/>
+          </a:xfrm>
+          <a:prstGeom prst="rect">
+            <a:avLst/>
+          </a:prstGeom>
+          <a:noFill/>
+          <a:ln/>
+        </p:spPr>
+        <p:txBody>
+          <a:bodyPr wrap="square" lIns="0" tIns="0" rIns="0" bIns="0" rtlCol="0" anchor="ctr"/>
+          <a:lstStyle/>
+          <a:p>
+            <a:pPr indent="0" marL="0">
+              <a:buNone/>
+            </a:pPr>
+            <a:r>
+              <a:rPr lang="en-US" sz="1600" b="1" dirty="0">
+                <a:solidFill>
+                  <a:schemeClr val="tx1"/>
+                </a:solidFill>
+              </a:rPr>
+              <a:t>二、降雨觸發與前期含水</a:t>
+            </a:r>
+            <a:endParaRPr lang="en-US" sz="1600" dirty="0"/>
+          </a:p>
+        </p:txBody>
+      </p:sp>
+      <p:sp>
+        <p:nvSpPr>
+          <p:cNvPr id="10" name="modP1"/>
+          <p:cNvSpPr/>
+          <p:nvPr/>
+        </p:nvSpPr>
+        <p:spPr>
+          <a:xfrm>
+            <a:off x="6995160" y="1389888"/>
+            <a:ext cx="685800" cy="329184"/>
+          </a:xfrm>
+          <a:prstGeom prst="roundRect">
+            <a:avLst>
+              <a:gd name="adj" fmla="val 50000"/>
+            </a:avLst>
+          </a:prstGeom>
+          <a:solidFill>
+            <a:schemeClr val="accent4"/>
+          </a:solidFill>
+          <a:ln w="12700">
+            <a:solidFill>
+              <a:schemeClr val="accent4"/>
+            </a:solidFill>
+            <a:prstDash val="solid"/>
+          </a:ln>
+        </p:spPr>
+      </p:sp>
+      <p:sp>
+        <p:nvSpPr>
+          <p:cNvPr id="11" name="modPT1"/>
+          <p:cNvSpPr txBox="1"/>
+          <p:nvPr/>
+        </p:nvSpPr>
+        <p:spPr>
+          <a:xfrm>
+            <a:off x="6995160" y="1389888"/>
+            <a:ext cx="685800" cy="329184"/>
+          </a:xfrm>
+          <a:prstGeom prst="rect">
+            <a:avLst/>
+          </a:prstGeom>
+          <a:noFill/>
+          <a:ln/>
+        </p:spPr>
+        <p:txBody>
+          <a:bodyPr wrap="square" lIns="0" tIns="0" rIns="0" bIns="0" rtlCol="0" anchor="ctr"/>
+          <a:lstStyle/>
+          <a:p>
+            <a:pPr algn="ctr" indent="0" marL="0">
+              <a:buNone/>
+            </a:pPr>
+            <a:r>
+              <a:rPr lang="en-US" sz="1200" b="1" dirty="0">
+                <a:solidFill>
+                  <a:schemeClr val="bg1"/>
+                </a:solidFill>
+              </a:rPr>
+              <a:t>未做</a:t>
+            </a:r>
+            <a:endParaRPr lang="en-US" sz="1200" dirty="0"/>
+          </a:p>
+        </p:txBody>
+      </p:sp>
+      <p:sp>
+        <p:nvSpPr>
+          <p:cNvPr id="12" name="modT1"/>
+          <p:cNvSpPr txBox="1"/>
+          <p:nvPr/>
+        </p:nvSpPr>
+        <p:spPr>
+          <a:xfrm>
+            <a:off x="4480560" y="1828800"/>
+            <a:ext cx="3200400" cy="1463040"/>
+          </a:xfrm>
+          <a:prstGeom prst="rect">
+            <a:avLst/>
+          </a:prstGeom>
+          <a:noFill/>
+          <a:ln/>
+        </p:spPr>
+        <p:txBody>
+          <a:bodyPr wrap="square" lIns="0" tIns="0" rIns="0" bIns="0" rtlCol="0" anchor="t"/>
+          <a:lstStyle/>
+          <a:p>
+            <a:pPr indent="0" marL="0">
+              <a:spcAft>
+                <a:spcPts val="400"/>
+              </a:spcAft>
+              <a:buNone/>
+            </a:pPr>
+            <a:r>
+              <a:rPr lang="en-US" sz="1400" b="1" dirty="0">
+                <a:solidFill>
+                  <a:schemeClr val="tx2"/>
+                </a:solidFill>
+              </a:rPr>
+              <a:t>已有　</a:t>
+            </a:r>
+            <a:pPr indent="0" marL="0">
+              <a:spcAft>
+                <a:spcPts val="400"/>
+              </a:spcAft>
+              <a:buNone/>
+            </a:pPr>
+            <a:r>
+              <a:rPr lang="en-US" sz="1400" dirty="0">
+                <a:solidFill>
+                  <a:schemeClr val="tx1"/>
+                </a:solidFill>
+              </a:rPr>
+              <a:t>—</a:t>
+            </a:r>
+            <a:endParaRPr lang="en-US" sz="1400" dirty="0"/>
+          </a:p>
+          <a:p>
+            <a:pPr indent="0" marL="0">
+              <a:spcAft>
+                <a:spcPts val="400"/>
+              </a:spcAft>
+              <a:buNone/>
+            </a:pPr>
+            <a:r>
+              <a:rPr lang="en-US" sz="1400" b="1" dirty="0">
+                <a:solidFill>
+                  <a:schemeClr val="accent4"/>
+                </a:solidFill>
+              </a:rPr>
+              <a:t>缺口　</a:t>
+            </a:r>
+            <a:pPr indent="0" marL="0">
+              <a:spcAft>
+                <a:spcPts val="400"/>
+              </a:spcAft>
+              <a:buNone/>
+            </a:pPr>
+            <a:r>
+              <a:rPr lang="en-US" sz="1400" dirty="0">
+                <a:solidFill>
+                  <a:schemeClr val="accent4"/>
+                </a:solidFill>
+              </a:rPr>
+              <a:t>雨量 I-D 曲線、前期累積雨量、土壤含水</a:t>
+            </a:r>
+            <a:endParaRPr lang="en-US" sz="1400" dirty="0"/>
+          </a:p>
+        </p:txBody>
+      </p:sp>
+      <p:sp>
+        <p:nvSpPr>
+          <p:cNvPr id="13" name="mod2"/>
+          <p:cNvSpPr/>
+          <p:nvPr/>
+        </p:nvSpPr>
+        <p:spPr>
+          <a:xfrm>
+            <a:off x="8046720" y="1234440"/>
+            <a:ext cx="3566160" cy="2148840"/>
+          </a:xfrm>
+          <a:prstGeom prst="roundRect">
+            <a:avLst>
+              <a:gd name="adj" fmla="val 4255"/>
+            </a:avLst>
+          </a:prstGeom>
+          <a:solidFill>
+            <a:schemeClr val="bg2"/>
+          </a:solidFill>
+          <a:ln w="12700">
+            <a:solidFill>
+              <a:schemeClr val="bg2"/>
+            </a:solidFill>
+            <a:prstDash val="solid"/>
+          </a:ln>
+        </p:spPr>
+      </p:sp>
+      <p:sp>
+        <p:nvSpPr>
+          <p:cNvPr id="14" name="modH2"/>
+          <p:cNvSpPr txBox="1"/>
+          <p:nvPr/>
+        </p:nvSpPr>
+        <p:spPr>
+          <a:xfrm>
+            <a:off x="8229600" y="1344168"/>
+            <a:ext cx="2468880" cy="411480"/>
+          </a:xfrm>
+          <a:prstGeom prst="rect">
+            <a:avLst/>
+          </a:prstGeom>
+          <a:noFill/>
+          <a:ln/>
+        </p:spPr>
+        <p:txBody>
+          <a:bodyPr wrap="square" lIns="0" tIns="0" rIns="0" bIns="0" rtlCol="0" anchor="ctr"/>
+          <a:lstStyle/>
+          <a:p>
+            <a:pPr indent="0" marL="0">
+              <a:buNone/>
+            </a:pPr>
+            <a:r>
+              <a:rPr lang="en-US" sz="1600" b="1" dirty="0">
+                <a:solidFill>
+                  <a:schemeClr val="tx1"/>
+                </a:solidFill>
+              </a:rPr>
+              <a:t>三、多源監測與異常偵測</a:t>
+            </a:r>
+            <a:endParaRPr lang="en-US" sz="1600" dirty="0"/>
+          </a:p>
+        </p:txBody>
+      </p:sp>
+      <p:sp>
+        <p:nvSpPr>
+          <p:cNvPr id="15" name="modP2"/>
+          <p:cNvSpPr/>
+          <p:nvPr/>
+        </p:nvSpPr>
+        <p:spPr>
+          <a:xfrm>
+            <a:off x="10744200" y="1389888"/>
+            <a:ext cx="685800" cy="329184"/>
+          </a:xfrm>
+          <a:prstGeom prst="roundRect">
+            <a:avLst>
+              <a:gd name="adj" fmla="val 50000"/>
+            </a:avLst>
+          </a:prstGeom>
+          <a:solidFill>
+            <a:schemeClr val="accent1"/>
+          </a:solidFill>
+          <a:ln w="12700">
+            <a:solidFill>
+              <a:schemeClr val="accent1"/>
+            </a:solidFill>
+            <a:prstDash val="solid"/>
+          </a:ln>
+        </p:spPr>
+      </p:sp>
+      <p:sp>
+        <p:nvSpPr>
+          <p:cNvPr id="16" name="modPT2"/>
+          <p:cNvSpPr txBox="1"/>
+          <p:nvPr/>
+        </p:nvSpPr>
+        <p:spPr>
+          <a:xfrm>
+            <a:off x="10744200" y="1389888"/>
+            <a:ext cx="685800" cy="329184"/>
+          </a:xfrm>
+          <a:prstGeom prst="rect">
+            <a:avLst/>
+          </a:prstGeom>
+          <a:noFill/>
+          <a:ln/>
+        </p:spPr>
+        <p:txBody>
+          <a:bodyPr wrap="square" lIns="0" tIns="0" rIns="0" bIns="0" rtlCol="0" anchor="ctr"/>
+          <a:lstStyle/>
+          <a:p>
+            <a:pPr algn="ctr" indent="0" marL="0">
+              <a:buNone/>
+            </a:pPr>
+            <a:r>
+              <a:rPr lang="en-US" sz="1200" b="1" dirty="0">
+                <a:solidFill>
+                  <a:schemeClr val="bg1"/>
+                </a:solidFill>
+              </a:rPr>
+              <a:t>部分</a:t>
+            </a:r>
+            <a:endParaRPr lang="en-US" sz="1200" dirty="0"/>
+          </a:p>
+        </p:txBody>
+      </p:sp>
+      <p:sp>
+        <p:nvSpPr>
+          <p:cNvPr id="17" name="modT2"/>
+          <p:cNvSpPr txBox="1"/>
+          <p:nvPr/>
+        </p:nvSpPr>
+        <p:spPr>
+          <a:xfrm>
+            <a:off x="8229600" y="1828800"/>
+            <a:ext cx="3200400" cy="1463040"/>
+          </a:xfrm>
+          <a:prstGeom prst="rect">
+            <a:avLst/>
+          </a:prstGeom>
+          <a:noFill/>
+          <a:ln/>
+        </p:spPr>
+        <p:txBody>
+          <a:bodyPr wrap="square" lIns="0" tIns="0" rIns="0" bIns="0" rtlCol="0" anchor="t"/>
+          <a:lstStyle/>
+          <a:p>
+            <a:pPr indent="0" marL="0">
+              <a:spcAft>
+                <a:spcPts val="400"/>
+              </a:spcAft>
+              <a:buNone/>
+            </a:pPr>
+            <a:r>
+              <a:rPr lang="en-US" sz="1400" b="1" dirty="0">
+                <a:solidFill>
+                  <a:schemeClr val="tx2"/>
+                </a:solidFill>
+              </a:rPr>
+              <a:t>已有　</a:t>
+            </a:r>
+            <a:pPr indent="0" marL="0">
+              <a:spcAft>
+                <a:spcPts val="400"/>
+              </a:spcAft>
+              <a:buNone/>
+            </a:pPr>
+            <a:r>
+              <a:rPr lang="en-US" sz="1400" dirty="0">
+                <a:solidFill>
+                  <a:schemeClr val="tx1"/>
+                </a:solidFill>
+              </a:rPr>
+              <a:t>Sentinel-2 紅邊時間序列、Sentinel-1、現地照片、Wayback 人工查證</a:t>
+            </a:r>
+            <a:endParaRPr lang="en-US" sz="1400" dirty="0"/>
+          </a:p>
+          <a:p>
+            <a:pPr indent="0" marL="0">
+              <a:spcAft>
+                <a:spcPts val="400"/>
+              </a:spcAft>
+              <a:buNone/>
+            </a:pPr>
+            <a:r>
+              <a:rPr lang="en-US" sz="1400" b="1" dirty="0">
+                <a:solidFill>
+                  <a:schemeClr val="accent4"/>
+                </a:solidFill>
+              </a:rPr>
+              <a:t>缺口　</a:t>
+            </a:r>
+            <a:pPr indent="0" marL="0">
+              <a:spcAft>
+                <a:spcPts val="400"/>
+              </a:spcAft>
+              <a:buNone/>
+            </a:pPr>
+            <a:r>
+              <a:rPr lang="en-US" sz="1400" dirty="0">
+                <a:solidFill>
+                  <a:schemeClr val="accent4"/>
+                </a:solidFill>
+              </a:rPr>
+              <a:t>InSAR、微地動、水位；UAV 依輔導建議暫停</a:t>
+            </a:r>
+            <a:endParaRPr lang="en-US" sz="1400" dirty="0"/>
+          </a:p>
+        </p:txBody>
+      </p:sp>
+      <p:sp>
+        <p:nvSpPr>
+          <p:cNvPr id="18" name="mod3"/>
+          <p:cNvSpPr/>
+          <p:nvPr/>
+        </p:nvSpPr>
+        <p:spPr>
+          <a:xfrm>
+            <a:off x="548640" y="3520440"/>
+            <a:ext cx="3566160" cy="2148840"/>
+          </a:xfrm>
+          <a:prstGeom prst="roundRect">
+            <a:avLst>
+              <a:gd name="adj" fmla="val 4255"/>
+            </a:avLst>
+          </a:prstGeom>
+          <a:solidFill>
+            <a:schemeClr val="bg2"/>
+          </a:solidFill>
+          <a:ln w="12700">
+            <a:solidFill>
+              <a:schemeClr val="bg2"/>
+            </a:solidFill>
+            <a:prstDash val="solid"/>
+          </a:ln>
+        </p:spPr>
+      </p:sp>
+      <p:sp>
+        <p:nvSpPr>
+          <p:cNvPr id="19" name="modH3"/>
+          <p:cNvSpPr txBox="1"/>
+          <p:nvPr/>
+        </p:nvSpPr>
+        <p:spPr>
+          <a:xfrm>
+            <a:off x="731520" y="3630168"/>
+            <a:ext cx="2468880" cy="411480"/>
+          </a:xfrm>
+          <a:prstGeom prst="rect">
+            <a:avLst/>
+          </a:prstGeom>
+          <a:noFill/>
+          <a:ln/>
+        </p:spPr>
+        <p:txBody>
+          <a:bodyPr wrap="square" lIns="0" tIns="0" rIns="0" bIns="0" rtlCol="0" anchor="ctr"/>
+          <a:lstStyle/>
+          <a:p>
+            <a:pPr indent="0" marL="0">
+              <a:buNone/>
+            </a:pPr>
+            <a:r>
+              <a:rPr lang="en-US" sz="1600" b="1" dirty="0">
+                <a:solidFill>
+                  <a:schemeClr val="tx1"/>
+                </a:solidFill>
+              </a:rPr>
+              <a:t>四、AI 輔助判釋</a:t>
+            </a:r>
+            <a:endParaRPr lang="en-US" sz="1600" dirty="0"/>
+          </a:p>
+        </p:txBody>
+      </p:sp>
+      <p:sp>
+        <p:nvSpPr>
+          <p:cNvPr id="20" name="modP3"/>
+          <p:cNvSpPr/>
+          <p:nvPr/>
+        </p:nvSpPr>
+        <p:spPr>
+          <a:xfrm>
+            <a:off x="3246120" y="3675888"/>
+            <a:ext cx="685800" cy="329184"/>
+          </a:xfrm>
+          <a:prstGeom prst="roundRect">
+            <a:avLst>
+              <a:gd name="adj" fmla="val 50000"/>
+            </a:avLst>
+          </a:prstGeom>
+          <a:solidFill>
+            <a:schemeClr val="accent1"/>
+          </a:solidFill>
+          <a:ln w="12700">
+            <a:solidFill>
+              <a:schemeClr val="accent1"/>
+            </a:solidFill>
+            <a:prstDash val="solid"/>
+          </a:ln>
+        </p:spPr>
+      </p:sp>
+      <p:sp>
+        <p:nvSpPr>
+          <p:cNvPr id="21" name="modPT3"/>
+          <p:cNvSpPr txBox="1"/>
+          <p:nvPr/>
+        </p:nvSpPr>
+        <p:spPr>
+          <a:xfrm>
+            <a:off x="3246120" y="3675888"/>
+            <a:ext cx="685800" cy="329184"/>
+          </a:xfrm>
+          <a:prstGeom prst="rect">
+            <a:avLst/>
+          </a:prstGeom>
+          <a:noFill/>
+          <a:ln/>
+        </p:spPr>
+        <p:txBody>
+          <a:bodyPr wrap="square" lIns="0" tIns="0" rIns="0" bIns="0" rtlCol="0" anchor="ctr"/>
+          <a:lstStyle/>
+          <a:p>
+            <a:pPr algn="ctr" indent="0" marL="0">
+              <a:buNone/>
+            </a:pPr>
+            <a:r>
+              <a:rPr lang="en-US" sz="1200" b="1" dirty="0">
+                <a:solidFill>
+                  <a:schemeClr val="bg1"/>
+                </a:solidFill>
+              </a:rPr>
+              <a:t>部分</a:t>
+            </a:r>
+            <a:endParaRPr lang="en-US" sz="1200" dirty="0"/>
+          </a:p>
+        </p:txBody>
+      </p:sp>
+      <p:sp>
+        <p:nvSpPr>
+          <p:cNvPr id="22" name="modT3"/>
+          <p:cNvSpPr txBox="1"/>
+          <p:nvPr/>
+        </p:nvSpPr>
+        <p:spPr>
+          <a:xfrm>
+            <a:off x="731520" y="4114800"/>
+            <a:ext cx="3200400" cy="1463040"/>
+          </a:xfrm>
+          <a:prstGeom prst="rect">
+            <a:avLst/>
+          </a:prstGeom>
+          <a:noFill/>
+          <a:ln/>
+        </p:spPr>
+        <p:txBody>
+          <a:bodyPr wrap="square" lIns="0" tIns="0" rIns="0" bIns="0" rtlCol="0" anchor="t"/>
+          <a:lstStyle/>
+          <a:p>
+            <a:pPr indent="0" marL="0">
+              <a:spcAft>
+                <a:spcPts val="400"/>
+              </a:spcAft>
+              <a:buNone/>
+            </a:pPr>
+            <a:r>
+              <a:rPr lang="en-US" sz="1400" b="1" dirty="0">
+                <a:solidFill>
+                  <a:schemeClr val="tx2"/>
+                </a:solidFill>
+              </a:rPr>
+              <a:t>已有　</a:t>
+            </a:r>
+            <a:pPr indent="0" marL="0">
+              <a:spcAft>
+                <a:spcPts val="400"/>
+              </a:spcAft>
+              <a:buNone/>
+            </a:pPr>
+            <a:r>
+              <a:rPr lang="en-US" sz="1400" dirty="0">
+                <a:solidFill>
+                  <a:schemeClr val="tx1"/>
+                </a:solidFill>
+              </a:rPr>
+              <a:t>三級候選、坡面證據頁、每項訊號的準確度與 95% 信賴區間</a:t>
+            </a:r>
+            <a:endParaRPr lang="en-US" sz="1400" dirty="0"/>
+          </a:p>
+          <a:p>
+            <a:pPr indent="0" marL="0">
+              <a:spcAft>
+                <a:spcPts val="400"/>
+              </a:spcAft>
+              <a:buNone/>
+            </a:pPr>
+            <a:r>
+              <a:rPr lang="en-US" sz="1400" b="1" dirty="0">
+                <a:solidFill>
+                  <a:schemeClr val="accent4"/>
+                </a:solidFill>
+              </a:rPr>
+              <a:t>缺口　</a:t>
+            </a:r>
+            <a:pPr indent="0" marL="0">
+              <a:spcAft>
+                <a:spcPts val="400"/>
+              </a:spcAft>
+              <a:buNone/>
+            </a:pPr>
+            <a:r>
+              <a:rPr lang="en-US" sz="1400" dirty="0">
+                <a:solidFill>
+                  <a:schemeClr val="accent4"/>
+                </a:solidFill>
+              </a:rPr>
+              <a:t>自動產生研判摘要與待確認事項</a:t>
+            </a:r>
+            <a:endParaRPr lang="en-US" sz="1400" dirty="0"/>
+          </a:p>
+        </p:txBody>
+      </p:sp>
+      <p:sp>
+        <p:nvSpPr>
+          <p:cNvPr id="23" name="mod4"/>
+          <p:cNvSpPr/>
+          <p:nvPr/>
+        </p:nvSpPr>
+        <p:spPr>
+          <a:xfrm>
+            <a:off x="4297680" y="3520440"/>
+            <a:ext cx="3566160" cy="2148840"/>
+          </a:xfrm>
+          <a:prstGeom prst="roundRect">
+            <a:avLst>
+              <a:gd name="adj" fmla="val 4255"/>
+            </a:avLst>
+          </a:prstGeom>
+          <a:solidFill>
+            <a:schemeClr val="bg2"/>
+          </a:solidFill>
+          <a:ln w="12700">
+            <a:solidFill>
+              <a:schemeClr val="bg2"/>
+            </a:solidFill>
+            <a:prstDash val="solid"/>
+          </a:ln>
+        </p:spPr>
+      </p:sp>
+      <p:sp>
+        <p:nvSpPr>
+          <p:cNvPr id="24" name="modH4"/>
+          <p:cNvSpPr txBox="1"/>
+          <p:nvPr/>
+        </p:nvSpPr>
+        <p:spPr>
+          <a:xfrm>
+            <a:off x="4480560" y="3630168"/>
+            <a:ext cx="2468880" cy="411480"/>
+          </a:xfrm>
+          <a:prstGeom prst="rect">
+            <a:avLst/>
+          </a:prstGeom>
+          <a:noFill/>
+          <a:ln/>
+        </p:spPr>
+        <p:txBody>
+          <a:bodyPr wrap="square" lIns="0" tIns="0" rIns="0" bIns="0" rtlCol="0" anchor="ctr"/>
+          <a:lstStyle/>
+          <a:p>
+            <a:pPr indent="0" marL="0">
+              <a:buNone/>
+            </a:pPr>
+            <a:r>
+              <a:rPr lang="en-US" sz="1600" b="1" dirty="0">
+                <a:solidFill>
+                  <a:schemeClr val="tx1"/>
+                </a:solidFill>
+              </a:rPr>
+              <a:t>五、下游影響與災害鏈</a:t>
+            </a:r>
+            <a:endParaRPr lang="en-US" sz="1600" dirty="0"/>
+          </a:p>
+        </p:txBody>
+      </p:sp>
+      <p:sp>
+        <p:nvSpPr>
+          <p:cNvPr id="25" name="modP4"/>
+          <p:cNvSpPr/>
+          <p:nvPr/>
+        </p:nvSpPr>
+        <p:spPr>
+          <a:xfrm>
+            <a:off x="6995160" y="3675888"/>
+            <a:ext cx="685800" cy="329184"/>
+          </a:xfrm>
+          <a:prstGeom prst="roundRect">
+            <a:avLst>
+              <a:gd name="adj" fmla="val 50000"/>
+            </a:avLst>
+          </a:prstGeom>
+          <a:solidFill>
+            <a:schemeClr val="accent4"/>
+          </a:solidFill>
+          <a:ln w="12700">
+            <a:solidFill>
+              <a:schemeClr val="accent4"/>
+            </a:solidFill>
+            <a:prstDash val="solid"/>
+          </a:ln>
+        </p:spPr>
+      </p:sp>
+      <p:sp>
+        <p:nvSpPr>
+          <p:cNvPr id="26" name="modPT4"/>
+          <p:cNvSpPr txBox="1"/>
+          <p:nvPr/>
+        </p:nvSpPr>
+        <p:spPr>
+          <a:xfrm>
+            <a:off x="6995160" y="3675888"/>
+            <a:ext cx="685800" cy="329184"/>
+          </a:xfrm>
+          <a:prstGeom prst="rect">
+            <a:avLst/>
+          </a:prstGeom>
+          <a:noFill/>
+          <a:ln/>
+        </p:spPr>
+        <p:txBody>
+          <a:bodyPr wrap="square" lIns="0" tIns="0" rIns="0" bIns="0" rtlCol="0" anchor="ctr"/>
+          <a:lstStyle/>
+          <a:p>
+            <a:pPr algn="ctr" indent="0" marL="0">
+              <a:buNone/>
+            </a:pPr>
+            <a:r>
+              <a:rPr lang="en-US" sz="1200" b="1" dirty="0">
+                <a:solidFill>
+                  <a:schemeClr val="bg1"/>
+                </a:solidFill>
+              </a:rPr>
+              <a:t>未做</a:t>
+            </a:r>
+            <a:endParaRPr lang="en-US" sz="1200" dirty="0"/>
+          </a:p>
+        </p:txBody>
+      </p:sp>
+      <p:sp>
+        <p:nvSpPr>
+          <p:cNvPr id="27" name="modT4"/>
+          <p:cNvSpPr txBox="1"/>
+          <p:nvPr/>
+        </p:nvSpPr>
+        <p:spPr>
+          <a:xfrm>
+            <a:off x="4480560" y="4114800"/>
+            <a:ext cx="3200400" cy="1463040"/>
+          </a:xfrm>
+          <a:prstGeom prst="rect">
+            <a:avLst/>
+          </a:prstGeom>
+          <a:noFill/>
+          <a:ln/>
+        </p:spPr>
+        <p:txBody>
+          <a:bodyPr wrap="square" lIns="0" tIns="0" rIns="0" bIns="0" rtlCol="0" anchor="t"/>
+          <a:lstStyle/>
+          <a:p>
+            <a:pPr indent="0" marL="0">
+              <a:spcAft>
+                <a:spcPts val="400"/>
+              </a:spcAft>
+              <a:buNone/>
+            </a:pPr>
+            <a:r>
+              <a:rPr lang="en-US" sz="1400" b="1" dirty="0">
+                <a:solidFill>
+                  <a:schemeClr val="tx2"/>
+                </a:solidFill>
+              </a:rPr>
+              <a:t>已有　</a:t>
+            </a:r>
+            <a:pPr indent="0" marL="0">
+              <a:spcAft>
+                <a:spcPts val="400"/>
+              </a:spcAft>
+              <a:buNone/>
+            </a:pPr>
+            <a:r>
+              <a:rPr lang="en-US" sz="1400" dirty="0">
+                <a:solidFill>
+                  <a:schemeClr val="tx1"/>
+                </a:solidFill>
+              </a:rPr>
+              <a:t>花蓮堰塞湖只做到崩塌偵測</a:t>
+            </a:r>
+            <a:endParaRPr lang="en-US" sz="1400" dirty="0"/>
+          </a:p>
+          <a:p>
+            <a:pPr indent="0" marL="0">
+              <a:spcAft>
+                <a:spcPts val="400"/>
+              </a:spcAft>
+              <a:buNone/>
+            </a:pPr>
+            <a:r>
+              <a:rPr lang="en-US" sz="1400" b="1" dirty="0">
+                <a:solidFill>
+                  <a:schemeClr val="accent4"/>
+                </a:solidFill>
+              </a:rPr>
+              <a:t>缺口　</a:t>
+            </a:r>
+            <a:pPr indent="0" marL="0">
+              <a:spcAft>
+                <a:spcPts val="400"/>
+              </a:spcAft>
+              <a:buNone/>
+            </a:pPr>
+            <a:r>
+              <a:rPr lang="en-US" sz="1400" dirty="0">
+                <a:solidFill>
+                  <a:schemeClr val="accent4"/>
+                </a:solidFill>
+              </a:rPr>
+              <a:t>崩塌 → 土砂 → 河道 → 堰塞 → 下游的串接</a:t>
+            </a:r>
+            <a:endParaRPr lang="en-US" sz="1400" dirty="0"/>
+          </a:p>
+        </p:txBody>
+      </p:sp>
+      <p:sp>
+        <p:nvSpPr>
+          <p:cNvPr id="28" name="mod5"/>
+          <p:cNvSpPr/>
+          <p:nvPr/>
+        </p:nvSpPr>
+        <p:spPr>
+          <a:xfrm>
+            <a:off x="8046720" y="3520440"/>
+            <a:ext cx="3566160" cy="2148840"/>
+          </a:xfrm>
+          <a:prstGeom prst="roundRect">
+            <a:avLst>
+              <a:gd name="adj" fmla="val 4255"/>
+            </a:avLst>
+          </a:prstGeom>
+          <a:solidFill>
+            <a:schemeClr val="bg2"/>
+          </a:solidFill>
+          <a:ln w="12700">
+            <a:solidFill>
+              <a:schemeClr val="bg2"/>
+            </a:solidFill>
+            <a:prstDash val="solid"/>
+          </a:ln>
+        </p:spPr>
+      </p:sp>
+      <p:sp>
+        <p:nvSpPr>
+          <p:cNvPr id="29" name="modH5"/>
+          <p:cNvSpPr txBox="1"/>
+          <p:nvPr/>
+        </p:nvSpPr>
+        <p:spPr>
+          <a:xfrm>
+            <a:off x="8229600" y="3630168"/>
+            <a:ext cx="2468880" cy="411480"/>
+          </a:xfrm>
+          <a:prstGeom prst="rect">
+            <a:avLst/>
+          </a:prstGeom>
+          <a:noFill/>
+          <a:ln/>
+        </p:spPr>
+        <p:txBody>
+          <a:bodyPr wrap="square" lIns="0" tIns="0" rIns="0" bIns="0" rtlCol="0" anchor="ctr"/>
+          <a:lstStyle/>
+          <a:p>
+            <a:pPr indent="0" marL="0">
+              <a:buNone/>
+            </a:pPr>
+            <a:r>
+              <a:rPr lang="en-US" sz="1600" b="1" dirty="0">
+                <a:solidFill>
+                  <a:schemeClr val="tx1"/>
+                </a:solidFill>
+              </a:rPr>
+              <a:t>六、應變工作流</a:t>
+            </a:r>
+            <a:endParaRPr lang="en-US" sz="1600" dirty="0"/>
+          </a:p>
+        </p:txBody>
+      </p:sp>
+      <p:sp>
+        <p:nvSpPr>
+          <p:cNvPr id="30" name="modP5"/>
+          <p:cNvSpPr/>
+          <p:nvPr/>
+        </p:nvSpPr>
+        <p:spPr>
+          <a:xfrm>
+            <a:off x="10744200" y="3675888"/>
+            <a:ext cx="685800" cy="329184"/>
+          </a:xfrm>
+          <a:prstGeom prst="roundRect">
+            <a:avLst>
+              <a:gd name="adj" fmla="val 50000"/>
+            </a:avLst>
+          </a:prstGeom>
+          <a:solidFill>
+            <a:schemeClr val="accent1"/>
+          </a:solidFill>
+          <a:ln w="12700">
+            <a:solidFill>
+              <a:schemeClr val="accent1"/>
+            </a:solidFill>
+            <a:prstDash val="solid"/>
+          </a:ln>
+        </p:spPr>
+      </p:sp>
+      <p:sp>
+        <p:nvSpPr>
+          <p:cNvPr id="31" name="modPT5"/>
+          <p:cNvSpPr txBox="1"/>
+          <p:nvPr/>
+        </p:nvSpPr>
+        <p:spPr>
+          <a:xfrm>
+            <a:off x="10744200" y="3675888"/>
+            <a:ext cx="685800" cy="329184"/>
+          </a:xfrm>
+          <a:prstGeom prst="rect">
+            <a:avLst/>
+          </a:prstGeom>
+          <a:noFill/>
+          <a:ln/>
+        </p:spPr>
+        <p:txBody>
+          <a:bodyPr wrap="square" lIns="0" tIns="0" rIns="0" bIns="0" rtlCol="0" anchor="ctr"/>
+          <a:lstStyle/>
+          <a:p>
+            <a:pPr algn="ctr" indent="0" marL="0">
+              <a:buNone/>
+            </a:pPr>
+            <a:r>
+              <a:rPr lang="en-US" sz="1200" b="1" dirty="0">
+                <a:solidFill>
+                  <a:schemeClr val="bg1"/>
+                </a:solidFill>
+              </a:rPr>
+              <a:t>部分</a:t>
+            </a:r>
+            <a:endParaRPr lang="en-US" sz="1200" dirty="0"/>
+          </a:p>
+        </p:txBody>
+      </p:sp>
+      <p:sp>
+        <p:nvSpPr>
+          <p:cNvPr id="32" name="modT5"/>
+          <p:cNvSpPr txBox="1"/>
+          <p:nvPr/>
+        </p:nvSpPr>
+        <p:spPr>
+          <a:xfrm>
+            <a:off x="8229600" y="4114800"/>
+            <a:ext cx="3200400" cy="1463040"/>
+          </a:xfrm>
+          <a:prstGeom prst="rect">
+            <a:avLst/>
+          </a:prstGeom>
+          <a:noFill/>
+          <a:ln/>
+        </p:spPr>
+        <p:txBody>
+          <a:bodyPr wrap="square" lIns="0" tIns="0" rIns="0" bIns="0" rtlCol="0" anchor="t"/>
+          <a:lstStyle/>
+          <a:p>
+            <a:pPr indent="0" marL="0">
+              <a:spcAft>
+                <a:spcPts val="400"/>
+              </a:spcAft>
+              <a:buNone/>
+            </a:pPr>
+            <a:r>
+              <a:rPr lang="en-US" sz="1400" b="1" dirty="0">
+                <a:solidFill>
+                  <a:schemeClr val="tx2"/>
+                </a:solidFill>
+              </a:rPr>
+              <a:t>已有　</a:t>
+            </a:r>
+            <a:pPr indent="0" marL="0">
+              <a:spcAft>
+                <a:spcPts val="400"/>
+              </a:spcAft>
+              <a:buNone/>
+            </a:pPr>
+            <a:r>
+              <a:rPr lang="en-US" sz="1400" dirty="0">
+                <a:solidFill>
+                  <a:schemeClr val="tx1"/>
+                </a:solidFill>
+              </a:rPr>
+              <a:t>實務人員測試頁：判斷要不要現勘</a:t>
+            </a:r>
+            <a:endParaRPr lang="en-US" sz="1400" dirty="0"/>
+          </a:p>
+          <a:p>
+            <a:pPr indent="0" marL="0">
+              <a:spcAft>
+                <a:spcPts val="400"/>
+              </a:spcAft>
+              <a:buNone/>
+            </a:pPr>
+            <a:r>
+              <a:rPr lang="en-US" sz="1400" b="1" dirty="0">
+                <a:solidFill>
+                  <a:schemeClr val="accent4"/>
+                </a:solidFill>
+              </a:rPr>
+              <a:t>缺口　</a:t>
+            </a:r>
+            <a:pPr indent="0" marL="0">
+              <a:spcAft>
+                <a:spcPts val="400"/>
+              </a:spcAft>
+              <a:buNone/>
+            </a:pPr>
+            <a:r>
+              <a:rPr lang="en-US" sz="1400" dirty="0">
+                <a:solidFill>
+                  <a:schemeClr val="accent4"/>
+                </a:solidFill>
+              </a:rPr>
+              <a:t>事件建立、任務派發、決策紀錄</a:t>
+            </a:r>
+            <a:endParaRPr lang="en-US" sz="1400" dirty="0"/>
+          </a:p>
+        </p:txBody>
+      </p:sp>
+      <p:sp>
+        <p:nvSpPr>
+          <p:cNvPr id="33" name="posBar"/>
+          <p:cNvSpPr/>
+          <p:nvPr/>
+        </p:nvSpPr>
+        <p:spPr>
+          <a:xfrm>
+            <a:off x="548640" y="5760720"/>
+            <a:ext cx="11064240" cy="548640"/>
+          </a:xfrm>
+          <a:prstGeom prst="roundRect">
+            <a:avLst>
+              <a:gd name="adj" fmla="val 16667"/>
+            </a:avLst>
+          </a:prstGeom>
+          <a:solidFill>
+            <a:schemeClr val="tx2"/>
+          </a:solidFill>
+          <a:ln w="12700">
+            <a:solidFill>
+              <a:schemeClr val="tx2"/>
+            </a:solidFill>
+            <a:prstDash val="solid"/>
+          </a:ln>
+        </p:spPr>
+      </p:sp>
+      <p:sp>
+        <p:nvSpPr>
+          <p:cNvPr id="34" name="posBarT"/>
+          <p:cNvSpPr txBox="1"/>
+          <p:nvPr/>
+        </p:nvSpPr>
+        <p:spPr>
+          <a:xfrm>
+            <a:off x="777240" y="5760720"/>
+            <a:ext cx="10607040" cy="548640"/>
+          </a:xfrm>
+          <a:prstGeom prst="rect">
+            <a:avLst/>
+          </a:prstGeom>
+          <a:noFill/>
+          <a:ln/>
+        </p:spPr>
+        <p:txBody>
+          <a:bodyPr wrap="square" lIns="0" tIns="0" rIns="0" bIns="0" rtlCol="0" anchor="ctr"/>
+          <a:lstStyle/>
+          <a:p>
+            <a:pPr indent="0" marL="0">
+              <a:buNone/>
+            </a:pPr>
+            <a:r>
+              <a:rPr lang="en-US" sz="1400" b="1" dirty="0">
+                <a:solidFill>
+                  <a:schemeClr val="accent5"/>
+                </a:solidFill>
+              </a:rPr>
+              <a:t>目前位置：</a:t>
+            </a:r>
+            <a:pPr indent="0" marL="0">
+              <a:buNone/>
+            </a:pPr>
+            <a:r>
+              <a:rPr lang="en-US" sz="1400" dirty="0">
+                <a:solidFill>
+                  <a:schemeClr val="bg1"/>
+                </a:solidFill>
+              </a:rPr>
+              <a:t>平時篩查（構想第一階段尾、第二階段開頭）　</a:t>
+            </a:r>
+            <a:pPr indent="0" marL="0">
+              <a:buNone/>
+            </a:pPr>
+            <a:r>
+              <a:rPr lang="en-US" sz="1400" b="1" dirty="0">
+                <a:solidFill>
+                  <a:schemeClr val="accent5"/>
+                </a:solidFill>
+              </a:rPr>
+              <a:t>下一步：</a:t>
+            </a:r>
+            <a:pPr indent="0" marL="0">
+              <a:buNone/>
+            </a:pPr>
+            <a:r>
+              <a:rPr lang="en-US" sz="1400" dirty="0">
+                <a:solidFill>
+                  <a:schemeClr val="bg1"/>
+                </a:solidFill>
+              </a:rPr>
+              <a:t>取得地質向量、串接降雨觸發與下游影響，走向事件反應</a:t>
+            </a:r>
+            <a:endParaRPr lang="en-US" sz="1400" dirty="0"/>
+          </a:p>
+        </p:txBody>
+      </p:sp>
+      <p:sp>
+        <p:nvSpPr>
+          <p:cNvPr id="25" name="Slide Number Placeholder 0"/>
+          <p:cNvSpPr>
+            <a:spLocks noGrp="1"/>
+          </p:cNvSpPr>
+          <p:nvPr>
+            <p:ph type="sldNum" sz="quarter" idx="4294967295"/>
+          </p:nvPr>
+        </p:nvSpPr>
+        <p:spPr>
+          <a:xfrm>
+            <a:off x="11155680" y="6400800"/>
+            <a:ext cx="457200" cy="274320"/>
+          </a:xfrm>
+          <a:prstGeom prst="rect">
+            <a:avLst/>
+          </a:prstGeom>
+          <a:extLst>
+            <a:ext uri="{C572A759-6A51-4108-AA02-DFA0A04FC94B}">
+              <ma14:wrappingTextBoxFlag xmlns:ma14="http://schemas.microsoft.com/office/mac/drawingml/2011/main" val="0"/>
+            </a:ext>
+          </a:extLst>
+        </p:spPr>
+        <p:txBody>
+          <a:bodyPr/>
+          <a:lstStyle>
+            <a:lvl1pPr>
+              <a:defRPr sz="1000">
+                <a:solidFill>
+                  <a:schemeClr val="accent4"/>
+                </a:solidFill>
+              </a:defRPr>
+            </a:lvl1pPr>
+          </a:lstStyle>
+          <a:p>
+            <a:pPr algn="r"/>
+            <a:fld id="{F7021451-1387-4CA6-816F-3879F97B5CBC}" type="slidenum">
+              <a:rPr b="0" lang="en-US"/>
+              <a:t>7</a:t>
+            </a:fld>
+            <a:endParaRPr lang="en-US"/>
+          </a:p>
+        </p:txBody>
+      </p:sp>
+    </p:spTree>
+  </p:cSld>
+  <p:clrMapOvr>
+    <a:masterClrMapping/>
+  </p:clrMapOvr>
+</p:sld>
+</file>
+
+<file path=ppt/slides/slide8.xml><?xml version="1.0" encoding="utf-8"?>
+<p:sld xmlns:a="http://schemas.openxmlformats.org/drawingml/2006/main" xmlns:r="http://schemas.openxmlformats.org/officeDocument/2006/relationships" xmlns:p="http://schemas.openxmlformats.org/presentationml/2006/main">
+  <p:cSld name="Slide 8">
+    <p:spTree>
+      <p:nvGrpSpPr>
+        <p:cNvPr id="1" name=""/>
+        <p:cNvGrpSpPr/>
+        <p:nvPr/>
+      </p:nvGrpSpPr>
+      <p:grpSpPr>
+        <a:xfrm>
+          <a:off x="0" y="0"/>
+          <a:ext cx="0" cy="0"/>
+          <a:chOff x="0" y="0"/>
+          <a:chExt cx="0" cy="0"/>
+        </a:xfrm>
+      </p:grpSpPr>
+      <p:sp>
+        <p:nvSpPr>
+          <p:cNvPr id="2" name="Text 0"/>
+          <p:cNvSpPr/>
+          <p:nvPr>
+            <p:ph idx="100" type="title" hasCustomPrompt="1"/>
+          </p:nvPr>
+        </p:nvSpPr>
+        <p:spPr>
+          <a:xfrm>
+            <a:off x="548640" y="320040"/>
+            <a:ext cx="11064240" cy="777240"/>
+          </a:xfrm>
+          <a:prstGeom prst="rect">
+            <a:avLst/>
+          </a:prstGeom>
+          <a:noFill/>
+          <a:ln/>
+        </p:spPr>
+        <p:txBody>
+          <a:bodyPr wrap="square" lIns="0" tIns="0" rIns="0" bIns="0" rtlCol="0" anchor="ctr"/>
+          <a:lstStyle/>
+          <a:p>
+            <a:pPr indent="0" marL="0">
+              <a:buNone/>
+            </a:pPr>
+            <a:r>
+              <a:rPr lang="en-US" sz="3200" b="1" dirty="0">
+                <a:solidFill>
+                  <a:schemeClr val="tx2"/>
+                </a:solidFill>
+              </a:rPr>
+              <a:t>備用｜地質：哪些地層比較容易崩（粗尺度）</a:t>
+            </a:r>
+            <a:endParaRPr lang="en-US" sz="3200" dirty="0"/>
+          </a:p>
+        </p:txBody>
+      </p:sp>
+      <p:graphicFrame>
+        <p:nvGraphicFramePr>
+          <p:cNvPr id="9" name="geoTable"/>
+          <p:cNvGraphicFramePr>
+            <a:graphicFrameLocks noGrp="1"/>
+          </p:cNvGraphicFramePr>
+          <p:nvPr>
+            <p:extLst>
+              <p:ext uri="{D42A27DB-BD31-4B8C-83A1-F6EECF244321}">
+                <p14:modId xmlns:p14="http://schemas.microsoft.com/office/powerpoint/2010/main" val="1579011935"/>
+              </p:ext>
+            </p:extLst>
+          </p:nvPr>
+        </p:nvGraphicFramePr>
+        <p:xfrm>
+          <a:off x="548640" y="1188720"/>
+          <a:ext cx="11064240" cy="914400"/>
+        </p:xfrm>
+        <a:graphic>
+          <a:graphicData uri="http://schemas.openxmlformats.org/drawingml/2006/table">
+            <a:tbl>
+              <a:tblPr/>
+              <a:tblGrid>
+                <a:gridCol w="3017520"/>
+                <a:gridCol w="1600200"/>
+                <a:gridCol w="1234440"/>
+                <a:gridCol w="1005840"/>
+                <a:gridCol w="1097280"/>
+                <a:gridCol w="914400"/>
+                <a:gridCol w="2194560"/>
+              </a:tblGrid>
+              <a:tr h="329184">
+                <a:tc>
+                  <a:txBody>
+                    <a:bodyPr/>
+                    <a:lstStyle/>
+                    <a:p>
+                      <a:pPr algn="l" indent="0" marL="0">
+                        <a:buNone/>
+                      </a:pPr>
+                      <a:r>
+                        <a:rPr lang="en-US" sz="1200" b="1" dirty="0">
+                          <a:solidFill>
+                            <a:srgbClr val="FFFFFF"/>
+                          </a:solidFill>
+                          <a:latin typeface="Microsoft JhengHei" pitchFamily="34" charset="0"/>
+                          <a:ea typeface="Microsoft JhengHei" pitchFamily="34" charset="-122"/>
+                          <a:cs typeface="Microsoft JhengHei" pitchFamily="34" charset="-120"/>
+                        </a:rPr>
+                        <a:t>地層</a:t>
+                      </a:r>
+                      <a:endParaRPr lang="en-US" sz="1200" dirty="0">
+                        <a:latin typeface="Microsoft JhengHei" charset="0"/>
+                        <a:ea typeface="Microsoft JhengHei" charset="0"/>
+                        <a:cs typeface="Microsoft JhengHei" charset="0"/>
+                      </a:endParaRPr>
+                    </a:p>
+                  </a:txBody>
+                  <a:tcPr marL="73152" marR="73152" marT="18288" marB="18288" anchor="ctr">
+                    <a:lnL w="6350" cap="flat" cmpd="sng" algn="ctr">
+                      <a:solidFill>
+                        <a:srgbClr val="DDE5DF"/>
+                      </a:solidFill>
+                      <a:prstDash val="solid"/>
+                      <a:round/>
+                      <a:headEnd type="none" w="med" len="med"/>
+                      <a:tailEnd type="none" w="med" len="med"/>
+                    </a:lnL>
+                    <a:lnR w="6350" cap="flat" cmpd="sng" algn="ctr">
+                      <a:solidFill>
+                        <a:srgbClr val="DDE5DF"/>
+                      </a:solidFill>
+                      <a:prstDash val="solid"/>
+                      <a:round/>
+                      <a:headEnd type="none" w="med" len="med"/>
+                      <a:tailEnd type="none" w="med" len="med"/>
+                    </a:lnR>
+                    <a:lnT w="6350" cap="flat" cmpd="sng" algn="ctr">
+                      <a:solidFill>
+                        <a:srgbClr val="DDE5DF"/>
+                      </a:solidFill>
+                      <a:prstDash val="solid"/>
+                      <a:round/>
+                      <a:headEnd type="none" w="med" len="med"/>
+                      <a:tailEnd type="none" w="med" len="med"/>
+                    </a:lnT>
+                    <a:lnB w="6350" cap="flat" cmpd="sng" algn="ctr">
+                      <a:solidFill>
+                        <a:srgbClr val="DDE5DF"/>
+                      </a:solidFill>
+                      <a:prstDash val="solid"/>
+                      <a:round/>
+                      <a:headEnd type="none" w="med" len="med"/>
+                      <a:tailEnd type="none" w="med" len="med"/>
+                    </a:lnB>
+                    <a:solidFill>
+                      <a:srgbClr val="2C5F2D"/>
+                    </a:solidFill>
+                  </a:tcPr>
+                </a:tc>
+                <a:tc>
+                  <a:txBody>
+                    <a:bodyPr/>
+                    <a:lstStyle/>
+                    <a:p>
+                      <a:pPr algn="l" indent="0" marL="0">
+                        <a:buNone/>
+                      </a:pPr>
+                      <a:r>
+                        <a:rPr lang="en-US" sz="1200" b="1" dirty="0">
+                          <a:solidFill>
+                            <a:srgbClr val="FFFFFF"/>
+                          </a:solidFill>
+                          <a:latin typeface="Microsoft JhengHei" pitchFamily="34" charset="0"/>
+                          <a:ea typeface="Microsoft JhengHei" pitchFamily="34" charset="-122"/>
+                          <a:cs typeface="Microsoft JhengHei" pitchFamily="34" charset="-120"/>
+                        </a:rPr>
+                        <a:t>年代</a:t>
+                      </a:r>
+                      <a:endParaRPr lang="en-US" sz="1200" dirty="0">
+                        <a:latin typeface="Microsoft JhengHei" charset="0"/>
+                        <a:ea typeface="Microsoft JhengHei" charset="0"/>
+                        <a:cs typeface="Microsoft JhengHei" charset="0"/>
+                      </a:endParaRPr>
+                    </a:p>
+                  </a:txBody>
+                  <a:tcPr marL="73152" marR="73152" marT="18288" marB="18288" anchor="ctr">
+                    <a:lnL w="6350" cap="flat" cmpd="sng" algn="ctr">
+                      <a:solidFill>
+                        <a:srgbClr val="DDE5DF"/>
+                      </a:solidFill>
+                      <a:prstDash val="solid"/>
+                      <a:round/>
+                      <a:headEnd type="none" w="med" len="med"/>
+                      <a:tailEnd type="none" w="med" len="med"/>
+                    </a:lnL>
+                    <a:lnR w="6350" cap="flat" cmpd="sng" algn="ctr">
+                      <a:solidFill>
+                        <a:srgbClr val="DDE5DF"/>
+                      </a:solidFill>
+                      <a:prstDash val="solid"/>
+                      <a:round/>
+                      <a:headEnd type="none" w="med" len="med"/>
+                      <a:tailEnd type="none" w="med" len="med"/>
+                    </a:lnR>
+                    <a:lnT w="6350" cap="flat" cmpd="sng" algn="ctr">
+                      <a:solidFill>
+                        <a:srgbClr val="DDE5DF"/>
+                      </a:solidFill>
+                      <a:prstDash val="solid"/>
+                      <a:round/>
+                      <a:headEnd type="none" w="med" len="med"/>
+                      <a:tailEnd type="none" w="med" len="med"/>
+                    </a:lnT>
+                    <a:lnB w="6350" cap="flat" cmpd="sng" algn="ctr">
+                      <a:solidFill>
+                        <a:srgbClr val="DDE5DF"/>
+                      </a:solidFill>
+                      <a:prstDash val="solid"/>
+                      <a:round/>
+                      <a:headEnd type="none" w="med" len="med"/>
+                      <a:tailEnd type="none" w="med" len="med"/>
+                    </a:lnB>
+                    <a:solidFill>
+                      <a:srgbClr val="2C5F2D"/>
+                    </a:solidFill>
+                  </a:tcPr>
+                </a:tc>
+                <a:tc>
+                  <a:txBody>
+                    <a:bodyPr/>
+                    <a:lstStyle/>
+                    <a:p>
+                      <a:pPr algn="l" indent="0" marL="0">
+                        <a:buNone/>
+                      </a:pPr>
+                      <a:r>
+                        <a:rPr lang="en-US" sz="1200" b="1" dirty="0">
+                          <a:solidFill>
+                            <a:srgbClr val="FFFFFF"/>
+                          </a:solidFill>
+                          <a:latin typeface="Microsoft JhengHei" pitchFamily="34" charset="0"/>
+                          <a:ea typeface="Microsoft JhengHei" pitchFamily="34" charset="-122"/>
+                          <a:cs typeface="Microsoft JhengHei" pitchFamily="34" charset="-120"/>
+                        </a:rPr>
+                        <a:t>有效坡面 km²</a:t>
+                      </a:r>
+                      <a:endParaRPr lang="en-US" sz="1200" dirty="0">
+                        <a:latin typeface="Microsoft JhengHei" charset="0"/>
+                        <a:ea typeface="Microsoft JhengHei" charset="0"/>
+                        <a:cs typeface="Microsoft JhengHei" charset="0"/>
+                      </a:endParaRPr>
+                    </a:p>
+                  </a:txBody>
+                  <a:tcPr marL="73152" marR="73152" marT="18288" marB="18288" anchor="ctr">
+                    <a:lnL w="6350" cap="flat" cmpd="sng" algn="ctr">
+                      <a:solidFill>
+                        <a:srgbClr val="DDE5DF"/>
+                      </a:solidFill>
+                      <a:prstDash val="solid"/>
+                      <a:round/>
+                      <a:headEnd type="none" w="med" len="med"/>
+                      <a:tailEnd type="none" w="med" len="med"/>
+                    </a:lnL>
+                    <a:lnR w="6350" cap="flat" cmpd="sng" algn="ctr">
+                      <a:solidFill>
+                        <a:srgbClr val="DDE5DF"/>
+                      </a:solidFill>
+                      <a:prstDash val="solid"/>
+                      <a:round/>
+                      <a:headEnd type="none" w="med" len="med"/>
+                      <a:tailEnd type="none" w="med" len="med"/>
+                    </a:lnR>
+                    <a:lnT w="6350" cap="flat" cmpd="sng" algn="ctr">
+                      <a:solidFill>
+                        <a:srgbClr val="DDE5DF"/>
+                      </a:solidFill>
+                      <a:prstDash val="solid"/>
+                      <a:round/>
+                      <a:headEnd type="none" w="med" len="med"/>
+                      <a:tailEnd type="none" w="med" len="med"/>
+                    </a:lnT>
+                    <a:lnB w="6350" cap="flat" cmpd="sng" algn="ctr">
+                      <a:solidFill>
+                        <a:srgbClr val="DDE5DF"/>
+                      </a:solidFill>
+                      <a:prstDash val="solid"/>
+                      <a:round/>
+                      <a:headEnd type="none" w="med" len="med"/>
+                      <a:tailEnd type="none" w="med" len="med"/>
+                    </a:lnB>
+                    <a:solidFill>
+                      <a:srgbClr val="2C5F2D"/>
+                    </a:solidFill>
+                  </a:tcPr>
+                </a:tc>
+                <a:tc>
+                  <a:txBody>
+                    <a:bodyPr/>
+                    <a:lstStyle/>
+                    <a:p>
+                      <a:pPr algn="l" indent="0" marL="0">
+                        <a:buNone/>
+                      </a:pPr>
+                      <a:r>
+                        <a:rPr lang="en-US" sz="1200" b="1" dirty="0">
+                          <a:solidFill>
+                            <a:srgbClr val="FFFFFF"/>
+                          </a:solidFill>
+                          <a:latin typeface="Microsoft JhengHei" pitchFamily="34" charset="0"/>
+                          <a:ea typeface="Microsoft JhengHei" pitchFamily="34" charset="-122"/>
+                          <a:cs typeface="Microsoft JhengHei" pitchFamily="34" charset="-120"/>
+                        </a:rPr>
+                        <a:t>崩塌 ha</a:t>
+                      </a:r>
+                      <a:endParaRPr lang="en-US" sz="1200" dirty="0">
+                        <a:latin typeface="Microsoft JhengHei" charset="0"/>
+                        <a:ea typeface="Microsoft JhengHei" charset="0"/>
+                        <a:cs typeface="Microsoft JhengHei" charset="0"/>
+                      </a:endParaRPr>
+                    </a:p>
+                  </a:txBody>
+                  <a:tcPr marL="73152" marR="73152" marT="18288" marB="18288" anchor="ctr">
+                    <a:lnL w="6350" cap="flat" cmpd="sng" algn="ctr">
+                      <a:solidFill>
+                        <a:srgbClr val="DDE5DF"/>
+                      </a:solidFill>
+                      <a:prstDash val="solid"/>
+                      <a:round/>
+                      <a:headEnd type="none" w="med" len="med"/>
+                      <a:tailEnd type="none" w="med" len="med"/>
+                    </a:lnL>
+                    <a:lnR w="6350" cap="flat" cmpd="sng" algn="ctr">
+                      <a:solidFill>
+                        <a:srgbClr val="DDE5DF"/>
+                      </a:solidFill>
+                      <a:prstDash val="solid"/>
+                      <a:round/>
+                      <a:headEnd type="none" w="med" len="med"/>
+                      <a:tailEnd type="none" w="med" len="med"/>
+                    </a:lnR>
+                    <a:lnT w="6350" cap="flat" cmpd="sng" algn="ctr">
+                      <a:solidFill>
+                        <a:srgbClr val="DDE5DF"/>
+                      </a:solidFill>
+                      <a:prstDash val="solid"/>
+                      <a:round/>
+                      <a:headEnd type="none" w="med" len="med"/>
+                      <a:tailEnd type="none" w="med" len="med"/>
+                    </a:lnT>
+                    <a:lnB w="6350" cap="flat" cmpd="sng" algn="ctr">
+                      <a:solidFill>
+                        <a:srgbClr val="DDE5DF"/>
+                      </a:solidFill>
+                      <a:prstDash val="solid"/>
+                      <a:round/>
+                      <a:headEnd type="none" w="med" len="med"/>
+                      <a:tailEnd type="none" w="med" len="med"/>
+                    </a:lnB>
+                    <a:solidFill>
+                      <a:srgbClr val="2C5F2D"/>
+                    </a:solidFill>
+                  </a:tcPr>
+                </a:tc>
+                <a:tc>
+                  <a:txBody>
+                    <a:bodyPr/>
+                    <a:lstStyle/>
+                    <a:p>
+                      <a:pPr algn="l" indent="0" marL="0">
+                        <a:buNone/>
+                      </a:pPr>
+                      <a:r>
+                        <a:rPr lang="en-US" sz="1200" b="1" dirty="0">
+                          <a:solidFill>
+                            <a:srgbClr val="FFFFFF"/>
+                          </a:solidFill>
+                          <a:latin typeface="Microsoft JhengHei" pitchFamily="34" charset="0"/>
+                          <a:ea typeface="Microsoft JhengHei" pitchFamily="34" charset="-122"/>
+                          <a:cs typeface="Microsoft JhengHei" pitchFamily="34" charset="-120"/>
+                        </a:rPr>
+                        <a:t>崩塌密度</a:t>
+                      </a:r>
+                      <a:endParaRPr lang="en-US" sz="1200" dirty="0">
+                        <a:latin typeface="Microsoft JhengHei" charset="0"/>
+                        <a:ea typeface="Microsoft JhengHei" charset="0"/>
+                        <a:cs typeface="Microsoft JhengHei" charset="0"/>
+                      </a:endParaRPr>
+                    </a:p>
+                  </a:txBody>
+                  <a:tcPr marL="73152" marR="73152" marT="18288" marB="18288" anchor="ctr">
+                    <a:lnL w="6350" cap="flat" cmpd="sng" algn="ctr">
+                      <a:solidFill>
+                        <a:srgbClr val="DDE5DF"/>
+                      </a:solidFill>
+                      <a:prstDash val="solid"/>
+                      <a:round/>
+                      <a:headEnd type="none" w="med" len="med"/>
+                      <a:tailEnd type="none" w="med" len="med"/>
+                    </a:lnL>
+                    <a:lnR w="6350" cap="flat" cmpd="sng" algn="ctr">
+                      <a:solidFill>
+                        <a:srgbClr val="DDE5DF"/>
+                      </a:solidFill>
+                      <a:prstDash val="solid"/>
+                      <a:round/>
+                      <a:headEnd type="none" w="med" len="med"/>
+                      <a:tailEnd type="none" w="med" len="med"/>
+                    </a:lnR>
+                    <a:lnT w="6350" cap="flat" cmpd="sng" algn="ctr">
+                      <a:solidFill>
+                        <a:srgbClr val="DDE5DF"/>
+                      </a:solidFill>
+                      <a:prstDash val="solid"/>
+                      <a:round/>
+                      <a:headEnd type="none" w="med" len="med"/>
+                      <a:tailEnd type="none" w="med" len="med"/>
+                    </a:lnT>
+                    <a:lnB w="6350" cap="flat" cmpd="sng" algn="ctr">
+                      <a:solidFill>
+                        <a:srgbClr val="DDE5DF"/>
+                      </a:solidFill>
+                      <a:prstDash val="solid"/>
+                      <a:round/>
+                      <a:headEnd type="none" w="med" len="med"/>
+                      <a:tailEnd type="none" w="med" len="med"/>
+                    </a:lnB>
+                    <a:solidFill>
+                      <a:srgbClr val="2C5F2D"/>
+                    </a:solidFill>
+                  </a:tcPr>
+                </a:tc>
+                <a:tc>
+                  <a:txBody>
+                    <a:bodyPr/>
+                    <a:lstStyle/>
+                    <a:p>
+                      <a:pPr algn="l" indent="0" marL="0">
+                        <a:buNone/>
+                      </a:pPr>
+                      <a:r>
+                        <a:rPr lang="en-US" sz="1200" b="1" dirty="0">
+                          <a:solidFill>
+                            <a:srgbClr val="FFFFFF"/>
+                          </a:solidFill>
+                          <a:latin typeface="Microsoft JhengHei" pitchFamily="34" charset="0"/>
+                          <a:ea typeface="Microsoft JhengHei" pitchFamily="34" charset="-122"/>
+                          <a:cs typeface="Microsoft JhengHei" pitchFamily="34" charset="-120"/>
+                        </a:rPr>
+                        <a:t>頻率比</a:t>
+                      </a:r>
+                      <a:endParaRPr lang="en-US" sz="1200" dirty="0">
+                        <a:latin typeface="Microsoft JhengHei" charset="0"/>
+                        <a:ea typeface="Microsoft JhengHei" charset="0"/>
+                        <a:cs typeface="Microsoft JhengHei" charset="0"/>
+                      </a:endParaRPr>
+                    </a:p>
+                  </a:txBody>
+                  <a:tcPr marL="73152" marR="73152" marT="18288" marB="18288" anchor="ctr">
+                    <a:lnL w="6350" cap="flat" cmpd="sng" algn="ctr">
+                      <a:solidFill>
+                        <a:srgbClr val="DDE5DF"/>
+                      </a:solidFill>
+                      <a:prstDash val="solid"/>
+                      <a:round/>
+                      <a:headEnd type="none" w="med" len="med"/>
+                      <a:tailEnd type="none" w="med" len="med"/>
+                    </a:lnL>
+                    <a:lnR w="6350" cap="flat" cmpd="sng" algn="ctr">
+                      <a:solidFill>
+                        <a:srgbClr val="DDE5DF"/>
+                      </a:solidFill>
+                      <a:prstDash val="solid"/>
+                      <a:round/>
+                      <a:headEnd type="none" w="med" len="med"/>
+                      <a:tailEnd type="none" w="med" len="med"/>
+                    </a:lnR>
+                    <a:lnT w="6350" cap="flat" cmpd="sng" algn="ctr">
+                      <a:solidFill>
+                        <a:srgbClr val="DDE5DF"/>
+                      </a:solidFill>
+                      <a:prstDash val="solid"/>
+                      <a:round/>
+                      <a:headEnd type="none" w="med" len="med"/>
+                      <a:tailEnd type="none" w="med" len="med"/>
+                    </a:lnT>
+                    <a:lnB w="6350" cap="flat" cmpd="sng" algn="ctr">
+                      <a:solidFill>
+                        <a:srgbClr val="DDE5DF"/>
+                      </a:solidFill>
+                      <a:prstDash val="solid"/>
+                      <a:round/>
+                      <a:headEnd type="none" w="med" len="med"/>
+                      <a:tailEnd type="none" w="med" len="med"/>
+                    </a:lnB>
+                    <a:solidFill>
+                      <a:srgbClr val="2C5F2D"/>
+                    </a:solidFill>
+                  </a:tcPr>
+                </a:tc>
+                <a:tc>
+                  <a:txBody>
+                    <a:bodyPr/>
+                    <a:lstStyle/>
+                    <a:p>
+                      <a:pPr algn="l" indent="0" marL="0">
+                        <a:buNone/>
+                      </a:pPr>
+                      <a:r>
+                        <a:rPr lang="en-US" sz="1200" b="1" dirty="0">
+                          <a:solidFill>
+                            <a:srgbClr val="FFFFFF"/>
+                          </a:solidFill>
+                          <a:latin typeface="Microsoft JhengHei" pitchFamily="34" charset="0"/>
+                          <a:ea typeface="Microsoft JhengHei" pitchFamily="34" charset="-122"/>
+                          <a:cs typeface="Microsoft JhengHei" pitchFamily="34" charset="-120"/>
+                        </a:rPr>
+                        <a:t>NDRE 下降坡面</a:t>
+                      </a:r>
+                      <a:endParaRPr lang="en-US" sz="1200" dirty="0">
+                        <a:latin typeface="Microsoft JhengHei" charset="0"/>
+                        <a:ea typeface="Microsoft JhengHei" charset="0"/>
+                        <a:cs typeface="Microsoft JhengHei" charset="0"/>
+                      </a:endParaRPr>
+                    </a:p>
+                  </a:txBody>
+                  <a:tcPr marL="73152" marR="73152" marT="18288" marB="18288" anchor="ctr">
+                    <a:lnL w="6350" cap="flat" cmpd="sng" algn="ctr">
+                      <a:solidFill>
+                        <a:srgbClr val="DDE5DF"/>
+                      </a:solidFill>
+                      <a:prstDash val="solid"/>
+                      <a:round/>
+                      <a:headEnd type="none" w="med" len="med"/>
+                      <a:tailEnd type="none" w="med" len="med"/>
+                    </a:lnL>
+                    <a:lnR w="6350" cap="flat" cmpd="sng" algn="ctr">
+                      <a:solidFill>
+                        <a:srgbClr val="DDE5DF"/>
+                      </a:solidFill>
+                      <a:prstDash val="solid"/>
+                      <a:round/>
+                      <a:headEnd type="none" w="med" len="med"/>
+                      <a:tailEnd type="none" w="med" len="med"/>
+                    </a:lnR>
+                    <a:lnT w="6350" cap="flat" cmpd="sng" algn="ctr">
+                      <a:solidFill>
+                        <a:srgbClr val="DDE5DF"/>
+                      </a:solidFill>
+                      <a:prstDash val="solid"/>
+                      <a:round/>
+                      <a:headEnd type="none" w="med" len="med"/>
+                      <a:tailEnd type="none" w="med" len="med"/>
+                    </a:lnT>
+                    <a:lnB w="6350" cap="flat" cmpd="sng" algn="ctr">
+                      <a:solidFill>
+                        <a:srgbClr val="DDE5DF"/>
+                      </a:solidFill>
+                      <a:prstDash val="solid"/>
+                      <a:round/>
+                      <a:headEnd type="none" w="med" len="med"/>
+                      <a:tailEnd type="none" w="med" len="med"/>
+                    </a:lnB>
+                    <a:solidFill>
+                      <a:srgbClr val="2C5F2D"/>
+                    </a:solidFill>
+                  </a:tcPr>
+                </a:tc>
+              </a:tr>
+              <a:tr h="329184">
+                <a:tc>
+                  <a:txBody>
+                    <a:bodyPr/>
+                    <a:lstStyle/>
+                    <a:p>
+                      <a:pPr algn="l" indent="0" marL="0">
+                        <a:buNone/>
+                      </a:pPr>
+                      <a:r>
+                        <a:rPr lang="en-US" sz="1200" dirty="0">
+                          <a:solidFill>
+                            <a:srgbClr val="1E2B22"/>
+                          </a:solidFill>
+                          <a:latin typeface="Microsoft JhengHei" pitchFamily="34" charset="0"/>
+                          <a:ea typeface="Microsoft JhengHei" pitchFamily="34" charset="-122"/>
+                          <a:cs typeface="Microsoft JhengHei" pitchFamily="34" charset="-120"/>
+                        </a:rPr>
+                        <a:t>三峽群及其相當地層（Ms）</a:t>
+                      </a:r>
+                      <a:endParaRPr lang="en-US" sz="1200" dirty="0">
+                        <a:latin typeface="Microsoft JhengHei" charset="0"/>
+                        <a:ea typeface="Microsoft JhengHei" charset="0"/>
+                        <a:cs typeface="Microsoft JhengHei" charset="0"/>
+                      </a:endParaRPr>
+                    </a:p>
+                  </a:txBody>
+                  <a:tcPr marL="73152" marR="73152" marT="18288" marB="18288" anchor="ctr">
+                    <a:lnL w="6350" cap="flat" cmpd="sng" algn="ctr">
+                      <a:solidFill>
+                        <a:srgbClr val="DDE5DF"/>
+                      </a:solidFill>
+                      <a:prstDash val="solid"/>
+                      <a:round/>
+                      <a:headEnd type="none" w="med" len="med"/>
+                      <a:tailEnd type="none" w="med" len="med"/>
+                    </a:lnL>
+                    <a:lnR w="6350" cap="flat" cmpd="sng" algn="ctr">
+                      <a:solidFill>
+                        <a:srgbClr val="DDE5DF"/>
+                      </a:solidFill>
+                      <a:prstDash val="solid"/>
+                      <a:round/>
+                      <a:headEnd type="none" w="med" len="med"/>
+                      <a:tailEnd type="none" w="med" len="med"/>
+                    </a:lnR>
+                    <a:lnT w="6350" cap="flat" cmpd="sng" algn="ctr">
+                      <a:solidFill>
+                        <a:srgbClr val="DDE5DF"/>
+                      </a:solidFill>
+                      <a:prstDash val="solid"/>
+                      <a:round/>
+                      <a:headEnd type="none" w="med" len="med"/>
+                      <a:tailEnd type="none" w="med" len="med"/>
+                    </a:lnT>
+                    <a:lnB w="6350" cap="flat" cmpd="sng" algn="ctr">
+                      <a:solidFill>
+                        <a:srgbClr val="DDE5DF"/>
+                      </a:solidFill>
+                      <a:prstDash val="solid"/>
+                      <a:round/>
+                      <a:headEnd type="none" w="med" len="med"/>
+                      <a:tailEnd type="none" w="med" len="med"/>
+                    </a:lnB>
+                    <a:solidFill>
+                      <a:srgbClr val="FFFFFF"/>
+                    </a:solidFill>
+                  </a:tcPr>
+                </a:tc>
+                <a:tc>
+                  <a:txBody>
+                    <a:bodyPr/>
+                    <a:lstStyle/>
+                    <a:p>
+                      <a:pPr algn="l" indent="0" marL="0">
+                        <a:buNone/>
+                      </a:pPr>
+                      <a:r>
+                        <a:rPr lang="en-US" sz="1200" dirty="0">
+                          <a:solidFill>
+                            <a:srgbClr val="1E2B22"/>
+                          </a:solidFill>
+                          <a:latin typeface="Microsoft JhengHei" pitchFamily="34" charset="0"/>
+                          <a:ea typeface="Microsoft JhengHei" pitchFamily="34" charset="-122"/>
+                          <a:cs typeface="Microsoft JhengHei" pitchFamily="34" charset="-120"/>
+                        </a:rPr>
+                        <a:t>中新世晚期</a:t>
+                      </a:r>
+                      <a:endParaRPr lang="en-US" sz="1200" dirty="0">
+                        <a:latin typeface="Microsoft JhengHei" charset="0"/>
+                        <a:ea typeface="Microsoft JhengHei" charset="0"/>
+                        <a:cs typeface="Microsoft JhengHei" charset="0"/>
+                      </a:endParaRPr>
+                    </a:p>
+                  </a:txBody>
+                  <a:tcPr marL="73152" marR="73152" marT="18288" marB="18288" anchor="ctr">
+                    <a:lnL w="6350" cap="flat" cmpd="sng" algn="ctr">
+                      <a:solidFill>
+                        <a:srgbClr val="DDE5DF"/>
+                      </a:solidFill>
+                      <a:prstDash val="solid"/>
+                      <a:round/>
+                      <a:headEnd type="none" w="med" len="med"/>
+                      <a:tailEnd type="none" w="med" len="med"/>
+                    </a:lnL>
+                    <a:lnR w="6350" cap="flat" cmpd="sng" algn="ctr">
+                      <a:solidFill>
+                        <a:srgbClr val="DDE5DF"/>
+                      </a:solidFill>
+                      <a:prstDash val="solid"/>
+                      <a:round/>
+                      <a:headEnd type="none" w="med" len="med"/>
+                      <a:tailEnd type="none" w="med" len="med"/>
+                    </a:lnR>
+                    <a:lnT w="6350" cap="flat" cmpd="sng" algn="ctr">
+                      <a:solidFill>
+                        <a:srgbClr val="DDE5DF"/>
+                      </a:solidFill>
+                      <a:prstDash val="solid"/>
+                      <a:round/>
+                      <a:headEnd type="none" w="med" len="med"/>
+                      <a:tailEnd type="none" w="med" len="med"/>
+                    </a:lnT>
+                    <a:lnB w="6350" cap="flat" cmpd="sng" algn="ctr">
+                      <a:solidFill>
+                        <a:srgbClr val="DDE5DF"/>
+                      </a:solidFill>
+                      <a:prstDash val="solid"/>
+                      <a:round/>
+                      <a:headEnd type="none" w="med" len="med"/>
+                      <a:tailEnd type="none" w="med" len="med"/>
+                    </a:lnB>
+                    <a:solidFill>
+                      <a:srgbClr val="FFFFFF"/>
+                    </a:solidFill>
+                  </a:tcPr>
+                </a:tc>
+                <a:tc>
+                  <a:txBody>
+                    <a:bodyPr/>
+                    <a:lstStyle/>
+                    <a:p>
+                      <a:pPr algn="l" indent="0" marL="0">
+                        <a:buNone/>
+                      </a:pPr>
+                      <a:r>
+                        <a:rPr lang="en-US" sz="1200" dirty="0">
+                          <a:solidFill>
+                            <a:srgbClr val="1E2B22"/>
+                          </a:solidFill>
+                          <a:latin typeface="Microsoft JhengHei" pitchFamily="34" charset="0"/>
+                          <a:ea typeface="Microsoft JhengHei" pitchFamily="34" charset="-122"/>
+                          <a:cs typeface="Microsoft JhengHei" pitchFamily="34" charset="-120"/>
+                        </a:rPr>
+                        <a:t>643.0</a:t>
+                      </a:r>
+                      <a:endParaRPr lang="en-US" sz="1200" dirty="0">
+                        <a:latin typeface="Microsoft JhengHei" charset="0"/>
+                        <a:ea typeface="Microsoft JhengHei" charset="0"/>
+                        <a:cs typeface="Microsoft JhengHei" charset="0"/>
+                      </a:endParaRPr>
+                    </a:p>
+                  </a:txBody>
+                  <a:tcPr marL="73152" marR="73152" marT="18288" marB="18288" anchor="ctr">
+                    <a:lnL w="6350" cap="flat" cmpd="sng" algn="ctr">
+                      <a:solidFill>
+                        <a:srgbClr val="DDE5DF"/>
+                      </a:solidFill>
+                      <a:prstDash val="solid"/>
+                      <a:round/>
+                      <a:headEnd type="none" w="med" len="med"/>
+                      <a:tailEnd type="none" w="med" len="med"/>
+                    </a:lnL>
+                    <a:lnR w="6350" cap="flat" cmpd="sng" algn="ctr">
+                      <a:solidFill>
+                        <a:srgbClr val="DDE5DF"/>
+                      </a:solidFill>
+                      <a:prstDash val="solid"/>
+                      <a:round/>
+                      <a:headEnd type="none" w="med" len="med"/>
+                      <a:tailEnd type="none" w="med" len="med"/>
+                    </a:lnR>
+                    <a:lnT w="6350" cap="flat" cmpd="sng" algn="ctr">
+                      <a:solidFill>
+                        <a:srgbClr val="DDE5DF"/>
+                      </a:solidFill>
+                      <a:prstDash val="solid"/>
+                      <a:round/>
+                      <a:headEnd type="none" w="med" len="med"/>
+                      <a:tailEnd type="none" w="med" len="med"/>
+                    </a:lnT>
+                    <a:lnB w="6350" cap="flat" cmpd="sng" algn="ctr">
+                      <a:solidFill>
+                        <a:srgbClr val="DDE5DF"/>
+                      </a:solidFill>
+                      <a:prstDash val="solid"/>
+                      <a:round/>
+                      <a:headEnd type="none" w="med" len="med"/>
+                      <a:tailEnd type="none" w="med" len="med"/>
+                    </a:lnB>
+                    <a:solidFill>
+                      <a:srgbClr val="FFFFFF"/>
+                    </a:solidFill>
+                  </a:tcPr>
+                </a:tc>
+                <a:tc>
+                  <a:txBody>
+                    <a:bodyPr/>
+                    <a:lstStyle/>
+                    <a:p>
+                      <a:pPr algn="l" indent="0" marL="0">
+                        <a:buNone/>
+                      </a:pPr>
+                      <a:r>
+                        <a:rPr lang="en-US" sz="1200" dirty="0">
+                          <a:solidFill>
+                            <a:srgbClr val="1E2B22"/>
+                          </a:solidFill>
+                          <a:latin typeface="Microsoft JhengHei" pitchFamily="34" charset="0"/>
+                          <a:ea typeface="Microsoft JhengHei" pitchFamily="34" charset="-122"/>
+                          <a:cs typeface="Microsoft JhengHei" pitchFamily="34" charset="-120"/>
+                        </a:rPr>
+                        <a:t>1,965</a:t>
+                      </a:r>
+                      <a:endParaRPr lang="en-US" sz="1200" dirty="0">
+                        <a:latin typeface="Microsoft JhengHei" charset="0"/>
+                        <a:ea typeface="Microsoft JhengHei" charset="0"/>
+                        <a:cs typeface="Microsoft JhengHei" charset="0"/>
+                      </a:endParaRPr>
+                    </a:p>
+                  </a:txBody>
+                  <a:tcPr marL="73152" marR="73152" marT="18288" marB="18288" anchor="ctr">
+                    <a:lnL w="6350" cap="flat" cmpd="sng" algn="ctr">
+                      <a:solidFill>
+                        <a:srgbClr val="DDE5DF"/>
+                      </a:solidFill>
+                      <a:prstDash val="solid"/>
+                      <a:round/>
+                      <a:headEnd type="none" w="med" len="med"/>
+                      <a:tailEnd type="none" w="med" len="med"/>
+                    </a:lnL>
+                    <a:lnR w="6350" cap="flat" cmpd="sng" algn="ctr">
+                      <a:solidFill>
+                        <a:srgbClr val="DDE5DF"/>
+                      </a:solidFill>
+                      <a:prstDash val="solid"/>
+                      <a:round/>
+                      <a:headEnd type="none" w="med" len="med"/>
+                      <a:tailEnd type="none" w="med" len="med"/>
+                    </a:lnR>
+                    <a:lnT w="6350" cap="flat" cmpd="sng" algn="ctr">
+                      <a:solidFill>
+                        <a:srgbClr val="DDE5DF"/>
+                      </a:solidFill>
+                      <a:prstDash val="solid"/>
+                      <a:round/>
+                      <a:headEnd type="none" w="med" len="med"/>
+                      <a:tailEnd type="none" w="med" len="med"/>
+                    </a:lnT>
+                    <a:lnB w="6350" cap="flat" cmpd="sng" algn="ctr">
+                      <a:solidFill>
+                        <a:srgbClr val="DDE5DF"/>
+                      </a:solidFill>
+                      <a:prstDash val="solid"/>
+                      <a:round/>
+                      <a:headEnd type="none" w="med" len="med"/>
+                      <a:tailEnd type="none" w="med" len="med"/>
+                    </a:lnB>
+                    <a:solidFill>
+                      <a:srgbClr val="FFFFFF"/>
+                    </a:solidFill>
+                  </a:tcPr>
+                </a:tc>
+                <a:tc>
+                  <a:txBody>
+                    <a:bodyPr/>
+                    <a:lstStyle/>
+                    <a:p>
+                      <a:pPr algn="l" indent="0" marL="0">
+                        <a:buNone/>
+                      </a:pPr>
+                      <a:r>
+                        <a:rPr lang="en-US" sz="1200" dirty="0">
+                          <a:solidFill>
+                            <a:srgbClr val="1E2B22"/>
+                          </a:solidFill>
+                          <a:latin typeface="Microsoft JhengHei" pitchFamily="34" charset="0"/>
+                          <a:ea typeface="Microsoft JhengHei" pitchFamily="34" charset="-122"/>
+                          <a:cs typeface="Microsoft JhengHei" pitchFamily="34" charset="-120"/>
+                        </a:rPr>
+                        <a:t>3.1%</a:t>
+                      </a:r>
+                      <a:endParaRPr lang="en-US" sz="1200" dirty="0">
+                        <a:latin typeface="Microsoft JhengHei" charset="0"/>
+                        <a:ea typeface="Microsoft JhengHei" charset="0"/>
+                        <a:cs typeface="Microsoft JhengHei" charset="0"/>
+                      </a:endParaRPr>
+                    </a:p>
+                  </a:txBody>
+                  <a:tcPr marL="73152" marR="73152" marT="18288" marB="18288" anchor="ctr">
+                    <a:lnL w="6350" cap="flat" cmpd="sng" algn="ctr">
+                      <a:solidFill>
+                        <a:srgbClr val="DDE5DF"/>
+                      </a:solidFill>
+                      <a:prstDash val="solid"/>
+                      <a:round/>
+                      <a:headEnd type="none" w="med" len="med"/>
+                      <a:tailEnd type="none" w="med" len="med"/>
+                    </a:lnL>
+                    <a:lnR w="6350" cap="flat" cmpd="sng" algn="ctr">
+                      <a:solidFill>
+                        <a:srgbClr val="DDE5DF"/>
+                      </a:solidFill>
+                      <a:prstDash val="solid"/>
+                      <a:round/>
+                      <a:headEnd type="none" w="med" len="med"/>
+                      <a:tailEnd type="none" w="med" len="med"/>
+                    </a:lnR>
+                    <a:lnT w="6350" cap="flat" cmpd="sng" algn="ctr">
+                      <a:solidFill>
+                        <a:srgbClr val="DDE5DF"/>
+                      </a:solidFill>
+                      <a:prstDash val="solid"/>
+                      <a:round/>
+                      <a:headEnd type="none" w="med" len="med"/>
+                      <a:tailEnd type="none" w="med" len="med"/>
+                    </a:lnT>
+                    <a:lnB w="6350" cap="flat" cmpd="sng" algn="ctr">
+                      <a:solidFill>
+                        <a:srgbClr val="DDE5DF"/>
+                      </a:solidFill>
+                      <a:prstDash val="solid"/>
+                      <a:round/>
+                      <a:headEnd type="none" w="med" len="med"/>
+                      <a:tailEnd type="none" w="med" len="med"/>
+                    </a:lnB>
+                    <a:solidFill>
+                      <a:srgbClr val="FFFFFF"/>
+                    </a:solidFill>
+                  </a:tcPr>
+                </a:tc>
+                <a:tc>
+                  <a:txBody>
+                    <a:bodyPr/>
+                    <a:lstStyle/>
+                    <a:p>
+                      <a:pPr algn="l" indent="0" marL="0">
+                        <a:buNone/>
+                      </a:pPr>
+                      <a:r>
+                        <a:rPr lang="en-US" sz="1200" dirty="0">
+                          <a:solidFill>
+                            <a:srgbClr val="5E6B63"/>
+                          </a:solidFill>
+                          <a:latin typeface="Microsoft JhengHei" pitchFamily="34" charset="0"/>
+                          <a:ea typeface="Microsoft JhengHei" pitchFamily="34" charset="-122"/>
+                          <a:cs typeface="Microsoft JhengHei" pitchFamily="34" charset="-120"/>
+                        </a:rPr>
+                        <a:t>0.57</a:t>
+                      </a:r>
+                      <a:endParaRPr lang="en-US" sz="1200" dirty="0">
+                        <a:latin typeface="Microsoft JhengHei" charset="0"/>
+                        <a:ea typeface="Microsoft JhengHei" charset="0"/>
+                        <a:cs typeface="Microsoft JhengHei" charset="0"/>
+                      </a:endParaRPr>
+                    </a:p>
+                  </a:txBody>
+                  <a:tcPr marL="73152" marR="73152" marT="18288" marB="18288" anchor="ctr">
+                    <a:lnL w="6350" cap="flat" cmpd="sng" algn="ctr">
+                      <a:solidFill>
+                        <a:srgbClr val="DDE5DF"/>
+                      </a:solidFill>
+                      <a:prstDash val="solid"/>
+                      <a:round/>
+                      <a:headEnd type="none" w="med" len="med"/>
+                      <a:tailEnd type="none" w="med" len="med"/>
+                    </a:lnL>
+                    <a:lnR w="6350" cap="flat" cmpd="sng" algn="ctr">
+                      <a:solidFill>
+                        <a:srgbClr val="DDE5DF"/>
+                      </a:solidFill>
+                      <a:prstDash val="solid"/>
+                      <a:round/>
+                      <a:headEnd type="none" w="med" len="med"/>
+                      <a:tailEnd type="none" w="med" len="med"/>
+                    </a:lnR>
+                    <a:lnT w="6350" cap="flat" cmpd="sng" algn="ctr">
+                      <a:solidFill>
+                        <a:srgbClr val="DDE5DF"/>
+                      </a:solidFill>
+                      <a:prstDash val="solid"/>
+                      <a:round/>
+                      <a:headEnd type="none" w="med" len="med"/>
+                      <a:tailEnd type="none" w="med" len="med"/>
+                    </a:lnT>
+                    <a:lnB w="6350" cap="flat" cmpd="sng" algn="ctr">
+                      <a:solidFill>
+                        <a:srgbClr val="DDE5DF"/>
+                      </a:solidFill>
+                      <a:prstDash val="solid"/>
+                      <a:round/>
+                      <a:headEnd type="none" w="med" len="med"/>
+                      <a:tailEnd type="none" w="med" len="med"/>
+                    </a:lnB>
+                    <a:solidFill>
+                      <a:srgbClr val="FFFFFF"/>
+                    </a:solidFill>
+                  </a:tcPr>
+                </a:tc>
+                <a:tc>
+                  <a:txBody>
+                    <a:bodyPr/>
+                    <a:lstStyle/>
+                    <a:p>
+                      <a:pPr algn="l" indent="0" marL="0">
+                        <a:buNone/>
+                      </a:pPr>
+                      <a:r>
+                        <a:rPr lang="en-US" sz="1200" dirty="0">
+                          <a:solidFill>
+                            <a:srgbClr val="1E2B22"/>
+                          </a:solidFill>
+                          <a:latin typeface="Microsoft JhengHei" pitchFamily="34" charset="0"/>
+                          <a:ea typeface="Microsoft JhengHei" pitchFamily="34" charset="-122"/>
+                          <a:cs typeface="Microsoft JhengHei" pitchFamily="34" charset="-120"/>
+                        </a:rPr>
+                        <a:t>2.0%（95/4,869）</a:t>
+                      </a:r>
+                      <a:endParaRPr lang="en-US" sz="1200" dirty="0">
+                        <a:latin typeface="Microsoft JhengHei" charset="0"/>
+                        <a:ea typeface="Microsoft JhengHei" charset="0"/>
+                        <a:cs typeface="Microsoft JhengHei" charset="0"/>
+                      </a:endParaRPr>
+                    </a:p>
+                  </a:txBody>
+                  <a:tcPr marL="73152" marR="73152" marT="18288" marB="18288" anchor="ctr">
+                    <a:lnL w="6350" cap="flat" cmpd="sng" algn="ctr">
+                      <a:solidFill>
+                        <a:srgbClr val="DDE5DF"/>
+                      </a:solidFill>
+                      <a:prstDash val="solid"/>
+                      <a:round/>
+                      <a:headEnd type="none" w="med" len="med"/>
+                      <a:tailEnd type="none" w="med" len="med"/>
+                    </a:lnL>
+                    <a:lnR w="6350" cap="flat" cmpd="sng" algn="ctr">
+                      <a:solidFill>
+                        <a:srgbClr val="DDE5DF"/>
+                      </a:solidFill>
+                      <a:prstDash val="solid"/>
+                      <a:round/>
+                      <a:headEnd type="none" w="med" len="med"/>
+                      <a:tailEnd type="none" w="med" len="med"/>
+                    </a:lnR>
+                    <a:lnT w="6350" cap="flat" cmpd="sng" algn="ctr">
+                      <a:solidFill>
+                        <a:srgbClr val="DDE5DF"/>
+                      </a:solidFill>
+                      <a:prstDash val="solid"/>
+                      <a:round/>
+                      <a:headEnd type="none" w="med" len="med"/>
+                      <a:tailEnd type="none" w="med" len="med"/>
+                    </a:lnT>
+                    <a:lnB w="6350" cap="flat" cmpd="sng" algn="ctr">
+                      <a:solidFill>
+                        <a:srgbClr val="DDE5DF"/>
+                      </a:solidFill>
+                      <a:prstDash val="solid"/>
+                      <a:round/>
+                      <a:headEnd type="none" w="med" len="med"/>
+                      <a:tailEnd type="none" w="med" len="med"/>
+                    </a:lnB>
+                    <a:solidFill>
+                      <a:srgbClr val="FFFFFF"/>
+                    </a:solidFill>
+                  </a:tcPr>
+                </a:tc>
+              </a:tr>
+              <a:tr h="329184">
+                <a:tc>
+                  <a:txBody>
+                    <a:bodyPr/>
+                    <a:lstStyle/>
+                    <a:p>
+                      <a:pPr algn="l" indent="0" marL="0">
+                        <a:buNone/>
+                      </a:pPr>
+                      <a:r>
+                        <a:rPr lang="en-US" sz="1200" b="1" dirty="0">
+                          <a:solidFill>
+                            <a:srgbClr val="1E2B22"/>
+                          </a:solidFill>
+                          <a:latin typeface="Microsoft JhengHei" pitchFamily="34" charset="0"/>
+                          <a:ea typeface="Microsoft JhengHei" pitchFamily="34" charset="-122"/>
+                          <a:cs typeface="Microsoft JhengHei" pitchFamily="34" charset="-120"/>
+                        </a:rPr>
+                        <a:t>西村層，新高層（Eh）</a:t>
+                      </a:r>
+                      <a:endParaRPr lang="en-US" sz="1200" dirty="0">
+                        <a:latin typeface="Microsoft JhengHei" charset="0"/>
+                        <a:ea typeface="Microsoft JhengHei" charset="0"/>
+                        <a:cs typeface="Microsoft JhengHei" charset="0"/>
+                      </a:endParaRPr>
+                    </a:p>
+                  </a:txBody>
+                  <a:tcPr marL="73152" marR="73152" marT="18288" marB="18288" anchor="ctr">
+                    <a:lnL w="6350" cap="flat" cmpd="sng" algn="ctr">
+                      <a:solidFill>
+                        <a:srgbClr val="DDE5DF"/>
+                      </a:solidFill>
+                      <a:prstDash val="solid"/>
+                      <a:round/>
+                      <a:headEnd type="none" w="med" len="med"/>
+                      <a:tailEnd type="none" w="med" len="med"/>
+                    </a:lnL>
+                    <a:lnR w="6350" cap="flat" cmpd="sng" algn="ctr">
+                      <a:solidFill>
+                        <a:srgbClr val="DDE5DF"/>
+                      </a:solidFill>
+                      <a:prstDash val="solid"/>
+                      <a:round/>
+                      <a:headEnd type="none" w="med" len="med"/>
+                      <a:tailEnd type="none" w="med" len="med"/>
+                    </a:lnR>
+                    <a:lnT w="6350" cap="flat" cmpd="sng" algn="ctr">
+                      <a:solidFill>
+                        <a:srgbClr val="DDE5DF"/>
+                      </a:solidFill>
+                      <a:prstDash val="solid"/>
+                      <a:round/>
+                      <a:headEnd type="none" w="med" len="med"/>
+                      <a:tailEnd type="none" w="med" len="med"/>
+                    </a:lnT>
+                    <a:lnB w="6350" cap="flat" cmpd="sng" algn="ctr">
+                      <a:solidFill>
+                        <a:srgbClr val="DDE5DF"/>
+                      </a:solidFill>
+                      <a:prstDash val="solid"/>
+                      <a:round/>
+                      <a:headEnd type="none" w="med" len="med"/>
+                      <a:tailEnd type="none" w="med" len="med"/>
+                    </a:lnB>
+                    <a:solidFill>
+                      <a:srgbClr val="FBE3D6"/>
+                    </a:solidFill>
+                  </a:tcPr>
+                </a:tc>
+                <a:tc>
+                  <a:txBody>
+                    <a:bodyPr/>
+                    <a:lstStyle/>
+                    <a:p>
+                      <a:pPr algn="l" indent="0" marL="0">
+                        <a:buNone/>
+                      </a:pPr>
+                      <a:r>
+                        <a:rPr lang="en-US" sz="1200" b="1" dirty="0">
+                          <a:solidFill>
+                            <a:srgbClr val="1E2B22"/>
+                          </a:solidFill>
+                          <a:latin typeface="Microsoft JhengHei" pitchFamily="34" charset="0"/>
+                          <a:ea typeface="Microsoft JhengHei" pitchFamily="34" charset="-122"/>
+                          <a:cs typeface="Microsoft JhengHei" pitchFamily="34" charset="-120"/>
+                        </a:rPr>
+                        <a:t>始新世</a:t>
+                      </a:r>
+                      <a:endParaRPr lang="en-US" sz="1200" dirty="0">
+                        <a:latin typeface="Microsoft JhengHei" charset="0"/>
+                        <a:ea typeface="Microsoft JhengHei" charset="0"/>
+                        <a:cs typeface="Microsoft JhengHei" charset="0"/>
+                      </a:endParaRPr>
+                    </a:p>
+                  </a:txBody>
+                  <a:tcPr marL="73152" marR="73152" marT="18288" marB="18288" anchor="ctr">
+                    <a:lnL w="6350" cap="flat" cmpd="sng" algn="ctr">
+                      <a:solidFill>
+                        <a:srgbClr val="DDE5DF"/>
+                      </a:solidFill>
+                      <a:prstDash val="solid"/>
+                      <a:round/>
+                      <a:headEnd type="none" w="med" len="med"/>
+                      <a:tailEnd type="none" w="med" len="med"/>
+                    </a:lnL>
+                    <a:lnR w="6350" cap="flat" cmpd="sng" algn="ctr">
+                      <a:solidFill>
+                        <a:srgbClr val="DDE5DF"/>
+                      </a:solidFill>
+                      <a:prstDash val="solid"/>
+                      <a:round/>
+                      <a:headEnd type="none" w="med" len="med"/>
+                      <a:tailEnd type="none" w="med" len="med"/>
+                    </a:lnR>
+                    <a:lnT w="6350" cap="flat" cmpd="sng" algn="ctr">
+                      <a:solidFill>
+                        <a:srgbClr val="DDE5DF"/>
+                      </a:solidFill>
+                      <a:prstDash val="solid"/>
+                      <a:round/>
+                      <a:headEnd type="none" w="med" len="med"/>
+                      <a:tailEnd type="none" w="med" len="med"/>
+                    </a:lnT>
+                    <a:lnB w="6350" cap="flat" cmpd="sng" algn="ctr">
+                      <a:solidFill>
+                        <a:srgbClr val="DDE5DF"/>
+                      </a:solidFill>
+                      <a:prstDash val="solid"/>
+                      <a:round/>
+                      <a:headEnd type="none" w="med" len="med"/>
+                      <a:tailEnd type="none" w="med" len="med"/>
+                    </a:lnB>
+                    <a:solidFill>
+                      <a:srgbClr val="FBE3D6"/>
+                    </a:solidFill>
+                  </a:tcPr>
+                </a:tc>
+                <a:tc>
+                  <a:txBody>
+                    <a:bodyPr/>
+                    <a:lstStyle/>
+                    <a:p>
+                      <a:pPr algn="l" indent="0" marL="0">
+                        <a:buNone/>
+                      </a:pPr>
+                      <a:r>
+                        <a:rPr lang="en-US" sz="1200" b="1" dirty="0">
+                          <a:solidFill>
+                            <a:srgbClr val="1E2B22"/>
+                          </a:solidFill>
+                          <a:latin typeface="Microsoft JhengHei" pitchFamily="34" charset="0"/>
+                          <a:ea typeface="Microsoft JhengHei" pitchFamily="34" charset="-122"/>
+                          <a:cs typeface="Microsoft JhengHei" pitchFamily="34" charset="-120"/>
+                        </a:rPr>
+                        <a:t>541.6</a:t>
+                      </a:r>
+                      <a:endParaRPr lang="en-US" sz="1200" dirty="0">
+                        <a:latin typeface="Microsoft JhengHei" charset="0"/>
+                        <a:ea typeface="Microsoft JhengHei" charset="0"/>
+                        <a:cs typeface="Microsoft JhengHei" charset="0"/>
+                      </a:endParaRPr>
+                    </a:p>
+                  </a:txBody>
+                  <a:tcPr marL="73152" marR="73152" marT="18288" marB="18288" anchor="ctr">
+                    <a:lnL w="6350" cap="flat" cmpd="sng" algn="ctr">
+                      <a:solidFill>
+                        <a:srgbClr val="DDE5DF"/>
+                      </a:solidFill>
+                      <a:prstDash val="solid"/>
+                      <a:round/>
+                      <a:headEnd type="none" w="med" len="med"/>
+                      <a:tailEnd type="none" w="med" len="med"/>
+                    </a:lnL>
+                    <a:lnR w="6350" cap="flat" cmpd="sng" algn="ctr">
+                      <a:solidFill>
+                        <a:srgbClr val="DDE5DF"/>
+                      </a:solidFill>
+                      <a:prstDash val="solid"/>
+                      <a:round/>
+                      <a:headEnd type="none" w="med" len="med"/>
+                      <a:tailEnd type="none" w="med" len="med"/>
+                    </a:lnR>
+                    <a:lnT w="6350" cap="flat" cmpd="sng" algn="ctr">
+                      <a:solidFill>
+                        <a:srgbClr val="DDE5DF"/>
+                      </a:solidFill>
+                      <a:prstDash val="solid"/>
+                      <a:round/>
+                      <a:headEnd type="none" w="med" len="med"/>
+                      <a:tailEnd type="none" w="med" len="med"/>
+                    </a:lnT>
+                    <a:lnB w="6350" cap="flat" cmpd="sng" algn="ctr">
+                      <a:solidFill>
+                        <a:srgbClr val="DDE5DF"/>
+                      </a:solidFill>
+                      <a:prstDash val="solid"/>
+                      <a:round/>
+                      <a:headEnd type="none" w="med" len="med"/>
+                      <a:tailEnd type="none" w="med" len="med"/>
+                    </a:lnB>
+                    <a:solidFill>
+                      <a:srgbClr val="FBE3D6"/>
+                    </a:solidFill>
+                  </a:tcPr>
+                </a:tc>
+                <a:tc>
+                  <a:txBody>
+                    <a:bodyPr/>
+                    <a:lstStyle/>
+                    <a:p>
+                      <a:pPr algn="l" indent="0" marL="0">
+                        <a:buNone/>
+                      </a:pPr>
+                      <a:r>
+                        <a:rPr lang="en-US" sz="1200" b="1" dirty="0">
+                          <a:solidFill>
+                            <a:srgbClr val="1E2B22"/>
+                          </a:solidFill>
+                          <a:latin typeface="Microsoft JhengHei" pitchFamily="34" charset="0"/>
+                          <a:ea typeface="Microsoft JhengHei" pitchFamily="34" charset="-122"/>
+                          <a:cs typeface="Microsoft JhengHei" pitchFamily="34" charset="-120"/>
+                        </a:rPr>
+                        <a:t>4,403</a:t>
+                      </a:r>
+                      <a:endParaRPr lang="en-US" sz="1200" dirty="0">
+                        <a:latin typeface="Microsoft JhengHei" charset="0"/>
+                        <a:ea typeface="Microsoft JhengHei" charset="0"/>
+                        <a:cs typeface="Microsoft JhengHei" charset="0"/>
+                      </a:endParaRPr>
+                    </a:p>
+                  </a:txBody>
+                  <a:tcPr marL="73152" marR="73152" marT="18288" marB="18288" anchor="ctr">
+                    <a:lnL w="6350" cap="flat" cmpd="sng" algn="ctr">
+                      <a:solidFill>
+                        <a:srgbClr val="DDE5DF"/>
+                      </a:solidFill>
+                      <a:prstDash val="solid"/>
+                      <a:round/>
+                      <a:headEnd type="none" w="med" len="med"/>
+                      <a:tailEnd type="none" w="med" len="med"/>
+                    </a:lnL>
+                    <a:lnR w="6350" cap="flat" cmpd="sng" algn="ctr">
+                      <a:solidFill>
+                        <a:srgbClr val="DDE5DF"/>
+                      </a:solidFill>
+                      <a:prstDash val="solid"/>
+                      <a:round/>
+                      <a:headEnd type="none" w="med" len="med"/>
+                      <a:tailEnd type="none" w="med" len="med"/>
+                    </a:lnR>
+                    <a:lnT w="6350" cap="flat" cmpd="sng" algn="ctr">
+                      <a:solidFill>
+                        <a:srgbClr val="DDE5DF"/>
+                      </a:solidFill>
+                      <a:prstDash val="solid"/>
+                      <a:round/>
+                      <a:headEnd type="none" w="med" len="med"/>
+                      <a:tailEnd type="none" w="med" len="med"/>
+                    </a:lnT>
+                    <a:lnB w="6350" cap="flat" cmpd="sng" algn="ctr">
+                      <a:solidFill>
+                        <a:srgbClr val="DDE5DF"/>
+                      </a:solidFill>
+                      <a:prstDash val="solid"/>
+                      <a:round/>
+                      <a:headEnd type="none" w="med" len="med"/>
+                      <a:tailEnd type="none" w="med" len="med"/>
+                    </a:lnB>
+                    <a:solidFill>
+                      <a:srgbClr val="FBE3D6"/>
+                    </a:solidFill>
+                  </a:tcPr>
+                </a:tc>
+                <a:tc>
+                  <a:txBody>
+                    <a:bodyPr/>
+                    <a:lstStyle/>
+                    <a:p>
+                      <a:pPr algn="l" indent="0" marL="0">
+                        <a:buNone/>
+                      </a:pPr>
+                      <a:r>
+                        <a:rPr lang="en-US" sz="1200" b="1" dirty="0">
+                          <a:solidFill>
+                            <a:srgbClr val="1E2B22"/>
+                          </a:solidFill>
+                          <a:latin typeface="Microsoft JhengHei" pitchFamily="34" charset="0"/>
+                          <a:ea typeface="Microsoft JhengHei" pitchFamily="34" charset="-122"/>
+                          <a:cs typeface="Microsoft JhengHei" pitchFamily="34" charset="-120"/>
+                        </a:rPr>
+                        <a:t>8.1%</a:t>
+                      </a:r>
+                      <a:endParaRPr lang="en-US" sz="1200" dirty="0">
+                        <a:latin typeface="Microsoft JhengHei" charset="0"/>
+                        <a:ea typeface="Microsoft JhengHei" charset="0"/>
+                        <a:cs typeface="Microsoft JhengHei" charset="0"/>
+                      </a:endParaRPr>
+                    </a:p>
+                  </a:txBody>
+                  <a:tcPr marL="73152" marR="73152" marT="18288" marB="18288" anchor="ctr">
+                    <a:lnL w="6350" cap="flat" cmpd="sng" algn="ctr">
+                      <a:solidFill>
+                        <a:srgbClr val="DDE5DF"/>
+                      </a:solidFill>
+                      <a:prstDash val="solid"/>
+                      <a:round/>
+                      <a:headEnd type="none" w="med" len="med"/>
+                      <a:tailEnd type="none" w="med" len="med"/>
+                    </a:lnL>
+                    <a:lnR w="6350" cap="flat" cmpd="sng" algn="ctr">
+                      <a:solidFill>
+                        <a:srgbClr val="DDE5DF"/>
+                      </a:solidFill>
+                      <a:prstDash val="solid"/>
+                      <a:round/>
+                      <a:headEnd type="none" w="med" len="med"/>
+                      <a:tailEnd type="none" w="med" len="med"/>
+                    </a:lnR>
+                    <a:lnT w="6350" cap="flat" cmpd="sng" algn="ctr">
+                      <a:solidFill>
+                        <a:srgbClr val="DDE5DF"/>
+                      </a:solidFill>
+                      <a:prstDash val="solid"/>
+                      <a:round/>
+                      <a:headEnd type="none" w="med" len="med"/>
+                      <a:tailEnd type="none" w="med" len="med"/>
+                    </a:lnT>
+                    <a:lnB w="6350" cap="flat" cmpd="sng" algn="ctr">
+                      <a:solidFill>
+                        <a:srgbClr val="DDE5DF"/>
+                      </a:solidFill>
+                      <a:prstDash val="solid"/>
+                      <a:round/>
+                      <a:headEnd type="none" w="med" len="med"/>
+                      <a:tailEnd type="none" w="med" len="med"/>
+                    </a:lnB>
+                    <a:solidFill>
+                      <a:srgbClr val="FBE3D6"/>
+                    </a:solidFill>
+                  </a:tcPr>
+                </a:tc>
+                <a:tc>
+                  <a:txBody>
+                    <a:bodyPr/>
+                    <a:lstStyle/>
+                    <a:p>
+                      <a:pPr algn="l" indent="0" marL="0">
+                        <a:buNone/>
+                      </a:pPr>
+                      <a:r>
+                        <a:rPr lang="en-US" sz="1200" b="1" dirty="0">
+                          <a:solidFill>
+                            <a:srgbClr val="1E2B22"/>
+                          </a:solidFill>
+                          <a:latin typeface="Microsoft JhengHei" pitchFamily="34" charset="0"/>
+                          <a:ea typeface="Microsoft JhengHei" pitchFamily="34" charset="-122"/>
+                          <a:cs typeface="Microsoft JhengHei" pitchFamily="34" charset="-120"/>
+                        </a:rPr>
+                        <a:t>1.53</a:t>
+                      </a:r>
+                      <a:endParaRPr lang="en-US" sz="1200" dirty="0">
+                        <a:latin typeface="Microsoft JhengHei" charset="0"/>
+                        <a:ea typeface="Microsoft JhengHei" charset="0"/>
+                        <a:cs typeface="Microsoft JhengHei" charset="0"/>
+                      </a:endParaRPr>
+                    </a:p>
+                  </a:txBody>
+                  <a:tcPr marL="73152" marR="73152" marT="18288" marB="18288" anchor="ctr">
+                    <a:lnL w="6350" cap="flat" cmpd="sng" algn="ctr">
+                      <a:solidFill>
+                        <a:srgbClr val="DDE5DF"/>
+                      </a:solidFill>
+                      <a:prstDash val="solid"/>
+                      <a:round/>
+                      <a:headEnd type="none" w="med" len="med"/>
+                      <a:tailEnd type="none" w="med" len="med"/>
+                    </a:lnL>
+                    <a:lnR w="6350" cap="flat" cmpd="sng" algn="ctr">
+                      <a:solidFill>
+                        <a:srgbClr val="DDE5DF"/>
+                      </a:solidFill>
+                      <a:prstDash val="solid"/>
+                      <a:round/>
+                      <a:headEnd type="none" w="med" len="med"/>
+                      <a:tailEnd type="none" w="med" len="med"/>
+                    </a:lnR>
+                    <a:lnT w="6350" cap="flat" cmpd="sng" algn="ctr">
+                      <a:solidFill>
+                        <a:srgbClr val="DDE5DF"/>
+                      </a:solidFill>
+                      <a:prstDash val="solid"/>
+                      <a:round/>
+                      <a:headEnd type="none" w="med" len="med"/>
+                      <a:tailEnd type="none" w="med" len="med"/>
+                    </a:lnT>
+                    <a:lnB w="6350" cap="flat" cmpd="sng" algn="ctr">
+                      <a:solidFill>
+                        <a:srgbClr val="DDE5DF"/>
+                      </a:solidFill>
+                      <a:prstDash val="solid"/>
+                      <a:round/>
+                      <a:headEnd type="none" w="med" len="med"/>
+                      <a:tailEnd type="none" w="med" len="med"/>
+                    </a:lnB>
+                    <a:solidFill>
+                      <a:srgbClr val="FBE3D6"/>
+                    </a:solidFill>
+                  </a:tcPr>
+                </a:tc>
+                <a:tc>
+                  <a:txBody>
+                    <a:bodyPr/>
+                    <a:lstStyle/>
+                    <a:p>
+                      <a:pPr algn="l" indent="0" marL="0">
+                        <a:buNone/>
+                      </a:pPr>
+                      <a:r>
+                        <a:rPr lang="en-US" sz="1200" b="1" dirty="0">
+                          <a:solidFill>
+                            <a:srgbClr val="1E2B22"/>
+                          </a:solidFill>
+                          <a:latin typeface="Microsoft JhengHei" pitchFamily="34" charset="0"/>
+                          <a:ea typeface="Microsoft JhengHei" pitchFamily="34" charset="-122"/>
+                          <a:cs typeface="Microsoft JhengHei" pitchFamily="34" charset="-120"/>
+                        </a:rPr>
+                        <a:t>1.7%（65/3,848）</a:t>
+                      </a:r>
+                      <a:endParaRPr lang="en-US" sz="1200" dirty="0">
+                        <a:latin typeface="Microsoft JhengHei" charset="0"/>
+                        <a:ea typeface="Microsoft JhengHei" charset="0"/>
+                        <a:cs typeface="Microsoft JhengHei" charset="0"/>
+                      </a:endParaRPr>
+                    </a:p>
+                  </a:txBody>
+                  <a:tcPr marL="73152" marR="73152" marT="18288" marB="18288" anchor="ctr">
+                    <a:lnL w="6350" cap="flat" cmpd="sng" algn="ctr">
+                      <a:solidFill>
+                        <a:srgbClr val="DDE5DF"/>
+                      </a:solidFill>
+                      <a:prstDash val="solid"/>
+                      <a:round/>
+                      <a:headEnd type="none" w="med" len="med"/>
+                      <a:tailEnd type="none" w="med" len="med"/>
+                    </a:lnL>
+                    <a:lnR w="6350" cap="flat" cmpd="sng" algn="ctr">
+                      <a:solidFill>
+                        <a:srgbClr val="DDE5DF"/>
+                      </a:solidFill>
+                      <a:prstDash val="solid"/>
+                      <a:round/>
+                      <a:headEnd type="none" w="med" len="med"/>
+                      <a:tailEnd type="none" w="med" len="med"/>
+                    </a:lnR>
+                    <a:lnT w="6350" cap="flat" cmpd="sng" algn="ctr">
+                      <a:solidFill>
+                        <a:srgbClr val="DDE5DF"/>
+                      </a:solidFill>
+                      <a:prstDash val="solid"/>
+                      <a:round/>
+                      <a:headEnd type="none" w="med" len="med"/>
+                      <a:tailEnd type="none" w="med" len="med"/>
+                    </a:lnT>
+                    <a:lnB w="6350" cap="flat" cmpd="sng" algn="ctr">
+                      <a:solidFill>
+                        <a:srgbClr val="DDE5DF"/>
+                      </a:solidFill>
+                      <a:prstDash val="solid"/>
+                      <a:round/>
+                      <a:headEnd type="none" w="med" len="med"/>
+                      <a:tailEnd type="none" w="med" len="med"/>
+                    </a:lnB>
+                    <a:solidFill>
+                      <a:srgbClr val="FBE3D6"/>
+                    </a:solidFill>
+                  </a:tcPr>
+                </a:tc>
+              </a:tr>
+              <a:tr h="329184">
+                <a:tc>
+                  <a:txBody>
+                    <a:bodyPr/>
+                    <a:lstStyle/>
+                    <a:p>
+                      <a:pPr algn="l" indent="0" marL="0">
+                        <a:buNone/>
+                      </a:pPr>
+                      <a:r>
+                        <a:rPr lang="en-US" sz="1200" dirty="0">
+                          <a:solidFill>
+                            <a:srgbClr val="1E2B22"/>
+                          </a:solidFill>
+                          <a:latin typeface="Microsoft JhengHei" pitchFamily="34" charset="0"/>
+                          <a:ea typeface="Microsoft JhengHei" pitchFamily="34" charset="-122"/>
+                          <a:cs typeface="Microsoft JhengHei" pitchFamily="34" charset="-120"/>
+                        </a:rPr>
+                        <a:t>廬山層（Ml）</a:t>
+                      </a:r>
+                      <a:endParaRPr lang="en-US" sz="1200" dirty="0">
+                        <a:latin typeface="Microsoft JhengHei" charset="0"/>
+                        <a:ea typeface="Microsoft JhengHei" charset="0"/>
+                        <a:cs typeface="Microsoft JhengHei" charset="0"/>
+                      </a:endParaRPr>
+                    </a:p>
+                  </a:txBody>
+                  <a:tcPr marL="73152" marR="73152" marT="18288" marB="18288" anchor="ctr">
+                    <a:lnL w="6350" cap="flat" cmpd="sng" algn="ctr">
+                      <a:solidFill>
+                        <a:srgbClr val="DDE5DF"/>
+                      </a:solidFill>
+                      <a:prstDash val="solid"/>
+                      <a:round/>
+                      <a:headEnd type="none" w="med" len="med"/>
+                      <a:tailEnd type="none" w="med" len="med"/>
+                    </a:lnL>
+                    <a:lnR w="6350" cap="flat" cmpd="sng" algn="ctr">
+                      <a:solidFill>
+                        <a:srgbClr val="DDE5DF"/>
+                      </a:solidFill>
+                      <a:prstDash val="solid"/>
+                      <a:round/>
+                      <a:headEnd type="none" w="med" len="med"/>
+                      <a:tailEnd type="none" w="med" len="med"/>
+                    </a:lnR>
+                    <a:lnT w="6350" cap="flat" cmpd="sng" algn="ctr">
+                      <a:solidFill>
+                        <a:srgbClr val="DDE5DF"/>
+                      </a:solidFill>
+                      <a:prstDash val="solid"/>
+                      <a:round/>
+                      <a:headEnd type="none" w="med" len="med"/>
+                      <a:tailEnd type="none" w="med" len="med"/>
+                    </a:lnT>
+                    <a:lnB w="6350" cap="flat" cmpd="sng" algn="ctr">
+                      <a:solidFill>
+                        <a:srgbClr val="DDE5DF"/>
+                      </a:solidFill>
+                      <a:prstDash val="solid"/>
+                      <a:round/>
+                      <a:headEnd type="none" w="med" len="med"/>
+                      <a:tailEnd type="none" w="med" len="med"/>
+                    </a:lnB>
+                    <a:solidFill>
+                      <a:srgbClr val="FFFFFF"/>
+                    </a:solidFill>
+                  </a:tcPr>
+                </a:tc>
+                <a:tc>
+                  <a:txBody>
+                    <a:bodyPr/>
+                    <a:lstStyle/>
+                    <a:p>
+                      <a:pPr algn="l" indent="0" marL="0">
+                        <a:buNone/>
+                      </a:pPr>
+                      <a:r>
+                        <a:rPr lang="en-US" sz="1200" dirty="0">
+                          <a:solidFill>
+                            <a:srgbClr val="1E2B22"/>
+                          </a:solidFill>
+                          <a:latin typeface="Microsoft JhengHei" pitchFamily="34" charset="0"/>
+                          <a:ea typeface="Microsoft JhengHei" pitchFamily="34" charset="-122"/>
+                          <a:cs typeface="Microsoft JhengHei" pitchFamily="34" charset="-120"/>
+                        </a:rPr>
+                        <a:t>中新世</a:t>
+                      </a:r>
+                      <a:endParaRPr lang="en-US" sz="1200" dirty="0">
+                        <a:latin typeface="Microsoft JhengHei" charset="0"/>
+                        <a:ea typeface="Microsoft JhengHei" charset="0"/>
+                        <a:cs typeface="Microsoft JhengHei" charset="0"/>
+                      </a:endParaRPr>
+                    </a:p>
+                  </a:txBody>
+                  <a:tcPr marL="73152" marR="73152" marT="18288" marB="18288" anchor="ctr">
+                    <a:lnL w="6350" cap="flat" cmpd="sng" algn="ctr">
+                      <a:solidFill>
+                        <a:srgbClr val="DDE5DF"/>
+                      </a:solidFill>
+                      <a:prstDash val="solid"/>
+                      <a:round/>
+                      <a:headEnd type="none" w="med" len="med"/>
+                      <a:tailEnd type="none" w="med" len="med"/>
+                    </a:lnL>
+                    <a:lnR w="6350" cap="flat" cmpd="sng" algn="ctr">
+                      <a:solidFill>
+                        <a:srgbClr val="DDE5DF"/>
+                      </a:solidFill>
+                      <a:prstDash val="solid"/>
+                      <a:round/>
+                      <a:headEnd type="none" w="med" len="med"/>
+                      <a:tailEnd type="none" w="med" len="med"/>
+                    </a:lnR>
+                    <a:lnT w="6350" cap="flat" cmpd="sng" algn="ctr">
+                      <a:solidFill>
+                        <a:srgbClr val="DDE5DF"/>
+                      </a:solidFill>
+                      <a:prstDash val="solid"/>
+                      <a:round/>
+                      <a:headEnd type="none" w="med" len="med"/>
+                      <a:tailEnd type="none" w="med" len="med"/>
+                    </a:lnT>
+                    <a:lnB w="6350" cap="flat" cmpd="sng" algn="ctr">
+                      <a:solidFill>
+                        <a:srgbClr val="DDE5DF"/>
+                      </a:solidFill>
+                      <a:prstDash val="solid"/>
+                      <a:round/>
+                      <a:headEnd type="none" w="med" len="med"/>
+                      <a:tailEnd type="none" w="med" len="med"/>
+                    </a:lnB>
+                    <a:solidFill>
+                      <a:srgbClr val="FFFFFF"/>
+                    </a:solidFill>
+                  </a:tcPr>
+                </a:tc>
+                <a:tc>
+                  <a:txBody>
+                    <a:bodyPr/>
+                    <a:lstStyle/>
+                    <a:p>
+                      <a:pPr algn="l" indent="0" marL="0">
+                        <a:buNone/>
+                      </a:pPr>
+                      <a:r>
+                        <a:rPr lang="en-US" sz="1200" dirty="0">
+                          <a:solidFill>
+                            <a:srgbClr val="1E2B22"/>
+                          </a:solidFill>
+                          <a:latin typeface="Microsoft JhengHei" pitchFamily="34" charset="0"/>
+                          <a:ea typeface="Microsoft JhengHei" pitchFamily="34" charset="-122"/>
+                          <a:cs typeface="Microsoft JhengHei" pitchFamily="34" charset="-120"/>
+                        </a:rPr>
+                        <a:t>408.5</a:t>
+                      </a:r>
+                      <a:endParaRPr lang="en-US" sz="1200" dirty="0">
+                        <a:latin typeface="Microsoft JhengHei" charset="0"/>
+                        <a:ea typeface="Microsoft JhengHei" charset="0"/>
+                        <a:cs typeface="Microsoft JhengHei" charset="0"/>
+                      </a:endParaRPr>
+                    </a:p>
+                  </a:txBody>
+                  <a:tcPr marL="73152" marR="73152" marT="18288" marB="18288" anchor="ctr">
+                    <a:lnL w="6350" cap="flat" cmpd="sng" algn="ctr">
+                      <a:solidFill>
+                        <a:srgbClr val="DDE5DF"/>
+                      </a:solidFill>
+                      <a:prstDash val="solid"/>
+                      <a:round/>
+                      <a:headEnd type="none" w="med" len="med"/>
+                      <a:tailEnd type="none" w="med" len="med"/>
+                    </a:lnL>
+                    <a:lnR w="6350" cap="flat" cmpd="sng" algn="ctr">
+                      <a:solidFill>
+                        <a:srgbClr val="DDE5DF"/>
+                      </a:solidFill>
+                      <a:prstDash val="solid"/>
+                      <a:round/>
+                      <a:headEnd type="none" w="med" len="med"/>
+                      <a:tailEnd type="none" w="med" len="med"/>
+                    </a:lnR>
+                    <a:lnT w="6350" cap="flat" cmpd="sng" algn="ctr">
+                      <a:solidFill>
+                        <a:srgbClr val="DDE5DF"/>
+                      </a:solidFill>
+                      <a:prstDash val="solid"/>
+                      <a:round/>
+                      <a:headEnd type="none" w="med" len="med"/>
+                      <a:tailEnd type="none" w="med" len="med"/>
+                    </a:lnT>
+                    <a:lnB w="6350" cap="flat" cmpd="sng" algn="ctr">
+                      <a:solidFill>
+                        <a:srgbClr val="DDE5DF"/>
+                      </a:solidFill>
+                      <a:prstDash val="solid"/>
+                      <a:round/>
+                      <a:headEnd type="none" w="med" len="med"/>
+                      <a:tailEnd type="none" w="med" len="med"/>
+                    </a:lnB>
+                    <a:solidFill>
+                      <a:srgbClr val="FFFFFF"/>
+                    </a:solidFill>
+                  </a:tcPr>
+                </a:tc>
+                <a:tc>
+                  <a:txBody>
+                    <a:bodyPr/>
+                    <a:lstStyle/>
+                    <a:p>
+                      <a:pPr algn="l" indent="0" marL="0">
+                        <a:buNone/>
+                      </a:pPr>
+                      <a:r>
+                        <a:rPr lang="en-US" sz="1200" dirty="0">
+                          <a:solidFill>
+                            <a:srgbClr val="1E2B22"/>
+                          </a:solidFill>
+                          <a:latin typeface="Microsoft JhengHei" pitchFamily="34" charset="0"/>
+                          <a:ea typeface="Microsoft JhengHei" pitchFamily="34" charset="-122"/>
+                          <a:cs typeface="Microsoft JhengHei" pitchFamily="34" charset="-120"/>
+                        </a:rPr>
+                        <a:t>2,357</a:t>
+                      </a:r>
+                      <a:endParaRPr lang="en-US" sz="1200" dirty="0">
+                        <a:latin typeface="Microsoft JhengHei" charset="0"/>
+                        <a:ea typeface="Microsoft JhengHei" charset="0"/>
+                        <a:cs typeface="Microsoft JhengHei" charset="0"/>
+                      </a:endParaRPr>
+                    </a:p>
+                  </a:txBody>
+                  <a:tcPr marL="73152" marR="73152" marT="18288" marB="18288" anchor="ctr">
+                    <a:lnL w="6350" cap="flat" cmpd="sng" algn="ctr">
+                      <a:solidFill>
+                        <a:srgbClr val="DDE5DF"/>
+                      </a:solidFill>
+                      <a:prstDash val="solid"/>
+                      <a:round/>
+                      <a:headEnd type="none" w="med" len="med"/>
+                      <a:tailEnd type="none" w="med" len="med"/>
+                    </a:lnL>
+                    <a:lnR w="6350" cap="flat" cmpd="sng" algn="ctr">
+                      <a:solidFill>
+                        <a:srgbClr val="DDE5DF"/>
+                      </a:solidFill>
+                      <a:prstDash val="solid"/>
+                      <a:round/>
+                      <a:headEnd type="none" w="med" len="med"/>
+                      <a:tailEnd type="none" w="med" len="med"/>
+                    </a:lnR>
+                    <a:lnT w="6350" cap="flat" cmpd="sng" algn="ctr">
+                      <a:solidFill>
+                        <a:srgbClr val="DDE5DF"/>
+                      </a:solidFill>
+                      <a:prstDash val="solid"/>
+                      <a:round/>
+                      <a:headEnd type="none" w="med" len="med"/>
+                      <a:tailEnd type="none" w="med" len="med"/>
+                    </a:lnT>
+                    <a:lnB w="6350" cap="flat" cmpd="sng" algn="ctr">
+                      <a:solidFill>
+                        <a:srgbClr val="DDE5DF"/>
+                      </a:solidFill>
+                      <a:prstDash val="solid"/>
+                      <a:round/>
+                      <a:headEnd type="none" w="med" len="med"/>
+                      <a:tailEnd type="none" w="med" len="med"/>
+                    </a:lnB>
+                    <a:solidFill>
+                      <a:srgbClr val="FFFFFF"/>
+                    </a:solidFill>
+                  </a:tcPr>
+                </a:tc>
+                <a:tc>
+                  <a:txBody>
+                    <a:bodyPr/>
+                    <a:lstStyle/>
+                    <a:p>
+                      <a:pPr algn="l" indent="0" marL="0">
+                        <a:buNone/>
+                      </a:pPr>
+                      <a:r>
+                        <a:rPr lang="en-US" sz="1200" dirty="0">
+                          <a:solidFill>
+                            <a:srgbClr val="1E2B22"/>
+                          </a:solidFill>
+                          <a:latin typeface="Microsoft JhengHei" pitchFamily="34" charset="0"/>
+                          <a:ea typeface="Microsoft JhengHei" pitchFamily="34" charset="-122"/>
+                          <a:cs typeface="Microsoft JhengHei" pitchFamily="34" charset="-120"/>
+                        </a:rPr>
+                        <a:t>5.8%</a:t>
+                      </a:r>
+                      <a:endParaRPr lang="en-US" sz="1200" dirty="0">
+                        <a:latin typeface="Microsoft JhengHei" charset="0"/>
+                        <a:ea typeface="Microsoft JhengHei" charset="0"/>
+                        <a:cs typeface="Microsoft JhengHei" charset="0"/>
+                      </a:endParaRPr>
+                    </a:p>
+                  </a:txBody>
+                  <a:tcPr marL="73152" marR="73152" marT="18288" marB="18288" anchor="ctr">
+                    <a:lnL w="6350" cap="flat" cmpd="sng" algn="ctr">
+                      <a:solidFill>
+                        <a:srgbClr val="DDE5DF"/>
+                      </a:solidFill>
+                      <a:prstDash val="solid"/>
+                      <a:round/>
+                      <a:headEnd type="none" w="med" len="med"/>
+                      <a:tailEnd type="none" w="med" len="med"/>
+                    </a:lnL>
+                    <a:lnR w="6350" cap="flat" cmpd="sng" algn="ctr">
+                      <a:solidFill>
+                        <a:srgbClr val="DDE5DF"/>
+                      </a:solidFill>
+                      <a:prstDash val="solid"/>
+                      <a:round/>
+                      <a:headEnd type="none" w="med" len="med"/>
+                      <a:tailEnd type="none" w="med" len="med"/>
+                    </a:lnR>
+                    <a:lnT w="6350" cap="flat" cmpd="sng" algn="ctr">
+                      <a:solidFill>
+                        <a:srgbClr val="DDE5DF"/>
+                      </a:solidFill>
+                      <a:prstDash val="solid"/>
+                      <a:round/>
+                      <a:headEnd type="none" w="med" len="med"/>
+                      <a:tailEnd type="none" w="med" len="med"/>
+                    </a:lnT>
+                    <a:lnB w="6350" cap="flat" cmpd="sng" algn="ctr">
+                      <a:solidFill>
+                        <a:srgbClr val="DDE5DF"/>
+                      </a:solidFill>
+                      <a:prstDash val="solid"/>
+                      <a:round/>
+                      <a:headEnd type="none" w="med" len="med"/>
+                      <a:tailEnd type="none" w="med" len="med"/>
+                    </a:lnB>
+                    <a:solidFill>
+                      <a:srgbClr val="FFFFFF"/>
+                    </a:solidFill>
+                  </a:tcPr>
+                </a:tc>
+                <a:tc>
+                  <a:txBody>
+                    <a:bodyPr/>
+                    <a:lstStyle/>
+                    <a:p>
+                      <a:pPr algn="l" indent="0" marL="0">
+                        <a:buNone/>
+                      </a:pPr>
+                      <a:r>
+                        <a:rPr lang="en-US" sz="1200" dirty="0">
+                          <a:solidFill>
+                            <a:srgbClr val="1E2B22"/>
+                          </a:solidFill>
+                          <a:latin typeface="Microsoft JhengHei" pitchFamily="34" charset="0"/>
+                          <a:ea typeface="Microsoft JhengHei" pitchFamily="34" charset="-122"/>
+                          <a:cs typeface="Microsoft JhengHei" pitchFamily="34" charset="-120"/>
+                        </a:rPr>
+                        <a:t>1.08</a:t>
+                      </a:r>
+                      <a:endParaRPr lang="en-US" sz="1200" dirty="0">
+                        <a:latin typeface="Microsoft JhengHei" charset="0"/>
+                        <a:ea typeface="Microsoft JhengHei" charset="0"/>
+                        <a:cs typeface="Microsoft JhengHei" charset="0"/>
+                      </a:endParaRPr>
+                    </a:p>
+                  </a:txBody>
+                  <a:tcPr marL="73152" marR="73152" marT="18288" marB="18288" anchor="ctr">
+                    <a:lnL w="6350" cap="flat" cmpd="sng" algn="ctr">
+                      <a:solidFill>
+                        <a:srgbClr val="DDE5DF"/>
+                      </a:solidFill>
+                      <a:prstDash val="solid"/>
+                      <a:round/>
+                      <a:headEnd type="none" w="med" len="med"/>
+                      <a:tailEnd type="none" w="med" len="med"/>
+                    </a:lnL>
+                    <a:lnR w="6350" cap="flat" cmpd="sng" algn="ctr">
+                      <a:solidFill>
+                        <a:srgbClr val="DDE5DF"/>
+                      </a:solidFill>
+                      <a:prstDash val="solid"/>
+                      <a:round/>
+                      <a:headEnd type="none" w="med" len="med"/>
+                      <a:tailEnd type="none" w="med" len="med"/>
+                    </a:lnR>
+                    <a:lnT w="6350" cap="flat" cmpd="sng" algn="ctr">
+                      <a:solidFill>
+                        <a:srgbClr val="DDE5DF"/>
+                      </a:solidFill>
+                      <a:prstDash val="solid"/>
+                      <a:round/>
+                      <a:headEnd type="none" w="med" len="med"/>
+                      <a:tailEnd type="none" w="med" len="med"/>
+                    </a:lnT>
+                    <a:lnB w="6350" cap="flat" cmpd="sng" algn="ctr">
+                      <a:solidFill>
+                        <a:srgbClr val="DDE5DF"/>
+                      </a:solidFill>
+                      <a:prstDash val="solid"/>
+                      <a:round/>
+                      <a:headEnd type="none" w="med" len="med"/>
+                      <a:tailEnd type="none" w="med" len="med"/>
+                    </a:lnB>
+                    <a:solidFill>
+                      <a:srgbClr val="FFFFFF"/>
+                    </a:solidFill>
+                  </a:tcPr>
+                </a:tc>
+                <a:tc>
+                  <a:txBody>
+                    <a:bodyPr/>
+                    <a:lstStyle/>
+                    <a:p>
+                      <a:pPr algn="l" indent="0" marL="0">
+                        <a:buNone/>
+                      </a:pPr>
+                      <a:r>
+                        <a:rPr lang="en-US" sz="1200" dirty="0">
+                          <a:solidFill>
+                            <a:srgbClr val="1E2B22"/>
+                          </a:solidFill>
+                          <a:latin typeface="Microsoft JhengHei" pitchFamily="34" charset="0"/>
+                          <a:ea typeface="Microsoft JhengHei" pitchFamily="34" charset="-122"/>
+                          <a:cs typeface="Microsoft JhengHei" pitchFamily="34" charset="-120"/>
+                        </a:rPr>
+                        <a:t>2.2%（65/2,908）</a:t>
+                      </a:r>
+                      <a:endParaRPr lang="en-US" sz="1200" dirty="0">
+                        <a:latin typeface="Microsoft JhengHei" charset="0"/>
+                        <a:ea typeface="Microsoft JhengHei" charset="0"/>
+                        <a:cs typeface="Microsoft JhengHei" charset="0"/>
+                      </a:endParaRPr>
+                    </a:p>
+                  </a:txBody>
+                  <a:tcPr marL="73152" marR="73152" marT="18288" marB="18288" anchor="ctr">
+                    <a:lnL w="6350" cap="flat" cmpd="sng" algn="ctr">
+                      <a:solidFill>
+                        <a:srgbClr val="DDE5DF"/>
+                      </a:solidFill>
+                      <a:prstDash val="solid"/>
+                      <a:round/>
+                      <a:headEnd type="none" w="med" len="med"/>
+                      <a:tailEnd type="none" w="med" len="med"/>
+                    </a:lnL>
+                    <a:lnR w="6350" cap="flat" cmpd="sng" algn="ctr">
+                      <a:solidFill>
+                        <a:srgbClr val="DDE5DF"/>
+                      </a:solidFill>
+                      <a:prstDash val="solid"/>
+                      <a:round/>
+                      <a:headEnd type="none" w="med" len="med"/>
+                      <a:tailEnd type="none" w="med" len="med"/>
+                    </a:lnR>
+                    <a:lnT w="6350" cap="flat" cmpd="sng" algn="ctr">
+                      <a:solidFill>
+                        <a:srgbClr val="DDE5DF"/>
+                      </a:solidFill>
+                      <a:prstDash val="solid"/>
+                      <a:round/>
+                      <a:headEnd type="none" w="med" len="med"/>
+                      <a:tailEnd type="none" w="med" len="med"/>
+                    </a:lnT>
+                    <a:lnB w="6350" cap="flat" cmpd="sng" algn="ctr">
+                      <a:solidFill>
+                        <a:srgbClr val="DDE5DF"/>
+                      </a:solidFill>
+                      <a:prstDash val="solid"/>
+                      <a:round/>
+                      <a:headEnd type="none" w="med" len="med"/>
+                      <a:tailEnd type="none" w="med" len="med"/>
+                    </a:lnB>
+                    <a:solidFill>
+                      <a:srgbClr val="FFFFFF"/>
+                    </a:solidFill>
+                  </a:tcPr>
+                </a:tc>
+              </a:tr>
+              <a:tr h="329184">
+                <a:tc>
+                  <a:txBody>
+                    <a:bodyPr/>
+                    <a:lstStyle/>
+                    <a:p>
+                      <a:pPr algn="l" indent="0" marL="0">
+                        <a:buNone/>
+                      </a:pPr>
+                      <a:r>
+                        <a:rPr lang="en-US" sz="1200" dirty="0">
+                          <a:solidFill>
+                            <a:srgbClr val="1E2B22"/>
+                          </a:solidFill>
+                          <a:latin typeface="Microsoft JhengHei" pitchFamily="34" charset="0"/>
+                          <a:ea typeface="Microsoft JhengHei" pitchFamily="34" charset="-122"/>
+                          <a:cs typeface="Microsoft JhengHei" pitchFamily="34" charset="-120"/>
+                        </a:rPr>
+                        <a:t>瑞芳群及其相當地層（Mj）</a:t>
+                      </a:r>
+                      <a:endParaRPr lang="en-US" sz="1200" dirty="0">
+                        <a:latin typeface="Microsoft JhengHei" charset="0"/>
+                        <a:ea typeface="Microsoft JhengHei" charset="0"/>
+                        <a:cs typeface="Microsoft JhengHei" charset="0"/>
+                      </a:endParaRPr>
+                    </a:p>
+                  </a:txBody>
+                  <a:tcPr marL="73152" marR="73152" marT="18288" marB="18288" anchor="ctr">
+                    <a:lnL w="6350" cap="flat" cmpd="sng" algn="ctr">
+                      <a:solidFill>
+                        <a:srgbClr val="DDE5DF"/>
+                      </a:solidFill>
+                      <a:prstDash val="solid"/>
+                      <a:round/>
+                      <a:headEnd type="none" w="med" len="med"/>
+                      <a:tailEnd type="none" w="med" len="med"/>
+                    </a:lnL>
+                    <a:lnR w="6350" cap="flat" cmpd="sng" algn="ctr">
+                      <a:solidFill>
+                        <a:srgbClr val="DDE5DF"/>
+                      </a:solidFill>
+                      <a:prstDash val="solid"/>
+                      <a:round/>
+                      <a:headEnd type="none" w="med" len="med"/>
+                      <a:tailEnd type="none" w="med" len="med"/>
+                    </a:lnR>
+                    <a:lnT w="6350" cap="flat" cmpd="sng" algn="ctr">
+                      <a:solidFill>
+                        <a:srgbClr val="DDE5DF"/>
+                      </a:solidFill>
+                      <a:prstDash val="solid"/>
+                      <a:round/>
+                      <a:headEnd type="none" w="med" len="med"/>
+                      <a:tailEnd type="none" w="med" len="med"/>
+                    </a:lnT>
+                    <a:lnB w="6350" cap="flat" cmpd="sng" algn="ctr">
+                      <a:solidFill>
+                        <a:srgbClr val="DDE5DF"/>
+                      </a:solidFill>
+                      <a:prstDash val="solid"/>
+                      <a:round/>
+                      <a:headEnd type="none" w="med" len="med"/>
+                      <a:tailEnd type="none" w="med" len="med"/>
+                    </a:lnB>
+                    <a:solidFill>
+                      <a:srgbClr val="FFFFFF"/>
+                    </a:solidFill>
+                  </a:tcPr>
+                </a:tc>
+                <a:tc>
+                  <a:txBody>
+                    <a:bodyPr/>
+                    <a:lstStyle/>
+                    <a:p>
+                      <a:pPr algn="l" indent="0" marL="0">
+                        <a:buNone/>
+                      </a:pPr>
+                      <a:r>
+                        <a:rPr lang="en-US" sz="1200" dirty="0">
+                          <a:solidFill>
+                            <a:srgbClr val="1E2B22"/>
+                          </a:solidFill>
+                          <a:latin typeface="Microsoft JhengHei" pitchFamily="34" charset="0"/>
+                          <a:ea typeface="Microsoft JhengHei" pitchFamily="34" charset="-122"/>
+                          <a:cs typeface="Microsoft JhengHei" pitchFamily="34" charset="-120"/>
+                        </a:rPr>
+                        <a:t>中新世中期</a:t>
+                      </a:r>
+                      <a:endParaRPr lang="en-US" sz="1200" dirty="0">
+                        <a:latin typeface="Microsoft JhengHei" charset="0"/>
+                        <a:ea typeface="Microsoft JhengHei" charset="0"/>
+                        <a:cs typeface="Microsoft JhengHei" charset="0"/>
+                      </a:endParaRPr>
+                    </a:p>
+                  </a:txBody>
+                  <a:tcPr marL="73152" marR="73152" marT="18288" marB="18288" anchor="ctr">
+                    <a:lnL w="6350" cap="flat" cmpd="sng" algn="ctr">
+                      <a:solidFill>
+                        <a:srgbClr val="DDE5DF"/>
+                      </a:solidFill>
+                      <a:prstDash val="solid"/>
+                      <a:round/>
+                      <a:headEnd type="none" w="med" len="med"/>
+                      <a:tailEnd type="none" w="med" len="med"/>
+                    </a:lnL>
+                    <a:lnR w="6350" cap="flat" cmpd="sng" algn="ctr">
+                      <a:solidFill>
+                        <a:srgbClr val="DDE5DF"/>
+                      </a:solidFill>
+                      <a:prstDash val="solid"/>
+                      <a:round/>
+                      <a:headEnd type="none" w="med" len="med"/>
+                      <a:tailEnd type="none" w="med" len="med"/>
+                    </a:lnR>
+                    <a:lnT w="6350" cap="flat" cmpd="sng" algn="ctr">
+                      <a:solidFill>
+                        <a:srgbClr val="DDE5DF"/>
+                      </a:solidFill>
+                      <a:prstDash val="solid"/>
+                      <a:round/>
+                      <a:headEnd type="none" w="med" len="med"/>
+                      <a:tailEnd type="none" w="med" len="med"/>
+                    </a:lnT>
+                    <a:lnB w="6350" cap="flat" cmpd="sng" algn="ctr">
+                      <a:solidFill>
+                        <a:srgbClr val="DDE5DF"/>
+                      </a:solidFill>
+                      <a:prstDash val="solid"/>
+                      <a:round/>
+                      <a:headEnd type="none" w="med" len="med"/>
+                      <a:tailEnd type="none" w="med" len="med"/>
+                    </a:lnB>
+                    <a:solidFill>
+                      <a:srgbClr val="FFFFFF"/>
+                    </a:solidFill>
+                  </a:tcPr>
+                </a:tc>
+                <a:tc>
+                  <a:txBody>
+                    <a:bodyPr/>
+                    <a:lstStyle/>
+                    <a:p>
+                      <a:pPr algn="l" indent="0" marL="0">
+                        <a:buNone/>
+                      </a:pPr>
+                      <a:r>
+                        <a:rPr lang="en-US" sz="1200" dirty="0">
+                          <a:solidFill>
+                            <a:srgbClr val="1E2B22"/>
+                          </a:solidFill>
+                          <a:latin typeface="Microsoft JhengHei" pitchFamily="34" charset="0"/>
+                          <a:ea typeface="Microsoft JhengHei" pitchFamily="34" charset="-122"/>
+                          <a:cs typeface="Microsoft JhengHei" pitchFamily="34" charset="-120"/>
+                        </a:rPr>
+                        <a:t>55.0</a:t>
+                      </a:r>
+                      <a:endParaRPr lang="en-US" sz="1200" dirty="0">
+                        <a:latin typeface="Microsoft JhengHei" charset="0"/>
+                        <a:ea typeface="Microsoft JhengHei" charset="0"/>
+                        <a:cs typeface="Microsoft JhengHei" charset="0"/>
+                      </a:endParaRPr>
+                    </a:p>
+                  </a:txBody>
+                  <a:tcPr marL="73152" marR="73152" marT="18288" marB="18288" anchor="ctr">
+                    <a:lnL w="6350" cap="flat" cmpd="sng" algn="ctr">
+                      <a:solidFill>
+                        <a:srgbClr val="DDE5DF"/>
+                      </a:solidFill>
+                      <a:prstDash val="solid"/>
+                      <a:round/>
+                      <a:headEnd type="none" w="med" len="med"/>
+                      <a:tailEnd type="none" w="med" len="med"/>
+                    </a:lnL>
+                    <a:lnR w="6350" cap="flat" cmpd="sng" algn="ctr">
+                      <a:solidFill>
+                        <a:srgbClr val="DDE5DF"/>
+                      </a:solidFill>
+                      <a:prstDash val="solid"/>
+                      <a:round/>
+                      <a:headEnd type="none" w="med" len="med"/>
+                      <a:tailEnd type="none" w="med" len="med"/>
+                    </a:lnR>
+                    <a:lnT w="6350" cap="flat" cmpd="sng" algn="ctr">
+                      <a:solidFill>
+                        <a:srgbClr val="DDE5DF"/>
+                      </a:solidFill>
+                      <a:prstDash val="solid"/>
+                      <a:round/>
+                      <a:headEnd type="none" w="med" len="med"/>
+                      <a:tailEnd type="none" w="med" len="med"/>
+                    </a:lnT>
+                    <a:lnB w="6350" cap="flat" cmpd="sng" algn="ctr">
+                      <a:solidFill>
+                        <a:srgbClr val="DDE5DF"/>
+                      </a:solidFill>
+                      <a:prstDash val="solid"/>
+                      <a:round/>
+                      <a:headEnd type="none" w="med" len="med"/>
+                      <a:tailEnd type="none" w="med" len="med"/>
+                    </a:lnB>
+                    <a:solidFill>
+                      <a:srgbClr val="FFFFFF"/>
+                    </a:solidFill>
+                  </a:tcPr>
+                </a:tc>
+                <a:tc>
+                  <a:txBody>
+                    <a:bodyPr/>
+                    <a:lstStyle/>
+                    <a:p>
+                      <a:pPr algn="l" indent="0" marL="0">
+                        <a:buNone/>
+                      </a:pPr>
+                      <a:r>
+                        <a:rPr lang="en-US" sz="1200" dirty="0">
+                          <a:solidFill>
+                            <a:srgbClr val="1E2B22"/>
+                          </a:solidFill>
+                          <a:latin typeface="Microsoft JhengHei" pitchFamily="34" charset="0"/>
+                          <a:ea typeface="Microsoft JhengHei" pitchFamily="34" charset="-122"/>
+                          <a:cs typeface="Microsoft JhengHei" pitchFamily="34" charset="-120"/>
+                        </a:rPr>
+                        <a:t>273</a:t>
+                      </a:r>
+                      <a:endParaRPr lang="en-US" sz="1200" dirty="0">
+                        <a:latin typeface="Microsoft JhengHei" charset="0"/>
+                        <a:ea typeface="Microsoft JhengHei" charset="0"/>
+                        <a:cs typeface="Microsoft JhengHei" charset="0"/>
+                      </a:endParaRPr>
+                    </a:p>
+                  </a:txBody>
+                  <a:tcPr marL="73152" marR="73152" marT="18288" marB="18288" anchor="ctr">
+                    <a:lnL w="6350" cap="flat" cmpd="sng" algn="ctr">
+                      <a:solidFill>
+                        <a:srgbClr val="DDE5DF"/>
+                      </a:solidFill>
+                      <a:prstDash val="solid"/>
+                      <a:round/>
+                      <a:headEnd type="none" w="med" len="med"/>
+                      <a:tailEnd type="none" w="med" len="med"/>
+                    </a:lnL>
+                    <a:lnR w="6350" cap="flat" cmpd="sng" algn="ctr">
+                      <a:solidFill>
+                        <a:srgbClr val="DDE5DF"/>
+                      </a:solidFill>
+                      <a:prstDash val="solid"/>
+                      <a:round/>
+                      <a:headEnd type="none" w="med" len="med"/>
+                      <a:tailEnd type="none" w="med" len="med"/>
+                    </a:lnR>
+                    <a:lnT w="6350" cap="flat" cmpd="sng" algn="ctr">
+                      <a:solidFill>
+                        <a:srgbClr val="DDE5DF"/>
+                      </a:solidFill>
+                      <a:prstDash val="solid"/>
+                      <a:round/>
+                      <a:headEnd type="none" w="med" len="med"/>
+                      <a:tailEnd type="none" w="med" len="med"/>
+                    </a:lnT>
+                    <a:lnB w="6350" cap="flat" cmpd="sng" algn="ctr">
+                      <a:solidFill>
+                        <a:srgbClr val="DDE5DF"/>
+                      </a:solidFill>
+                      <a:prstDash val="solid"/>
+                      <a:round/>
+                      <a:headEnd type="none" w="med" len="med"/>
+                      <a:tailEnd type="none" w="med" len="med"/>
+                    </a:lnB>
+                    <a:solidFill>
+                      <a:srgbClr val="FFFFFF"/>
+                    </a:solidFill>
+                  </a:tcPr>
+                </a:tc>
+                <a:tc>
+                  <a:txBody>
+                    <a:bodyPr/>
+                    <a:lstStyle/>
+                    <a:p>
+                      <a:pPr algn="l" indent="0" marL="0">
+                        <a:buNone/>
+                      </a:pPr>
+                      <a:r>
+                        <a:rPr lang="en-US" sz="1200" dirty="0">
+                          <a:solidFill>
+                            <a:srgbClr val="1E2B22"/>
+                          </a:solidFill>
+                          <a:latin typeface="Microsoft JhengHei" pitchFamily="34" charset="0"/>
+                          <a:ea typeface="Microsoft JhengHei" pitchFamily="34" charset="-122"/>
+                          <a:cs typeface="Microsoft JhengHei" pitchFamily="34" charset="-120"/>
+                        </a:rPr>
+                        <a:t>5.0%</a:t>
+                      </a:r>
+                      <a:endParaRPr lang="en-US" sz="1200" dirty="0">
+                        <a:latin typeface="Microsoft JhengHei" charset="0"/>
+                        <a:ea typeface="Microsoft JhengHei" charset="0"/>
+                        <a:cs typeface="Microsoft JhengHei" charset="0"/>
+                      </a:endParaRPr>
+                    </a:p>
+                  </a:txBody>
+                  <a:tcPr marL="73152" marR="73152" marT="18288" marB="18288" anchor="ctr">
+                    <a:lnL w="6350" cap="flat" cmpd="sng" algn="ctr">
+                      <a:solidFill>
+                        <a:srgbClr val="DDE5DF"/>
+                      </a:solidFill>
+                      <a:prstDash val="solid"/>
+                      <a:round/>
+                      <a:headEnd type="none" w="med" len="med"/>
+                      <a:tailEnd type="none" w="med" len="med"/>
+                    </a:lnL>
+                    <a:lnR w="6350" cap="flat" cmpd="sng" algn="ctr">
+                      <a:solidFill>
+                        <a:srgbClr val="DDE5DF"/>
+                      </a:solidFill>
+                      <a:prstDash val="solid"/>
+                      <a:round/>
+                      <a:headEnd type="none" w="med" len="med"/>
+                      <a:tailEnd type="none" w="med" len="med"/>
+                    </a:lnR>
+                    <a:lnT w="6350" cap="flat" cmpd="sng" algn="ctr">
+                      <a:solidFill>
+                        <a:srgbClr val="DDE5DF"/>
+                      </a:solidFill>
+                      <a:prstDash val="solid"/>
+                      <a:round/>
+                      <a:headEnd type="none" w="med" len="med"/>
+                      <a:tailEnd type="none" w="med" len="med"/>
+                    </a:lnT>
+                    <a:lnB w="6350" cap="flat" cmpd="sng" algn="ctr">
+                      <a:solidFill>
+                        <a:srgbClr val="DDE5DF"/>
+                      </a:solidFill>
+                      <a:prstDash val="solid"/>
+                      <a:round/>
+                      <a:headEnd type="none" w="med" len="med"/>
+                      <a:tailEnd type="none" w="med" len="med"/>
+                    </a:lnB>
+                    <a:solidFill>
+                      <a:srgbClr val="FFFFFF"/>
+                    </a:solidFill>
+                  </a:tcPr>
+                </a:tc>
+                <a:tc>
+                  <a:txBody>
+                    <a:bodyPr/>
+                    <a:lstStyle/>
+                    <a:p>
+                      <a:pPr algn="l" indent="0" marL="0">
+                        <a:buNone/>
+                      </a:pPr>
+                      <a:r>
+                        <a:rPr lang="en-US" sz="1200" dirty="0">
+                          <a:solidFill>
+                            <a:srgbClr val="1E2B22"/>
+                          </a:solidFill>
+                          <a:latin typeface="Microsoft JhengHei" pitchFamily="34" charset="0"/>
+                          <a:ea typeface="Microsoft JhengHei" pitchFamily="34" charset="-122"/>
+                          <a:cs typeface="Microsoft JhengHei" pitchFamily="34" charset="-120"/>
+                        </a:rPr>
+                        <a:t>0.93</a:t>
+                      </a:r>
+                      <a:endParaRPr lang="en-US" sz="1200" dirty="0">
+                        <a:latin typeface="Microsoft JhengHei" charset="0"/>
+                        <a:ea typeface="Microsoft JhengHei" charset="0"/>
+                        <a:cs typeface="Microsoft JhengHei" charset="0"/>
+                      </a:endParaRPr>
+                    </a:p>
+                  </a:txBody>
+                  <a:tcPr marL="73152" marR="73152" marT="18288" marB="18288" anchor="ctr">
+                    <a:lnL w="6350" cap="flat" cmpd="sng" algn="ctr">
+                      <a:solidFill>
+                        <a:srgbClr val="DDE5DF"/>
+                      </a:solidFill>
+                      <a:prstDash val="solid"/>
+                      <a:round/>
+                      <a:headEnd type="none" w="med" len="med"/>
+                      <a:tailEnd type="none" w="med" len="med"/>
+                    </a:lnL>
+                    <a:lnR w="6350" cap="flat" cmpd="sng" algn="ctr">
+                      <a:solidFill>
+                        <a:srgbClr val="DDE5DF"/>
+                      </a:solidFill>
+                      <a:prstDash val="solid"/>
+                      <a:round/>
+                      <a:headEnd type="none" w="med" len="med"/>
+                      <a:tailEnd type="none" w="med" len="med"/>
+                    </a:lnR>
+                    <a:lnT w="6350" cap="flat" cmpd="sng" algn="ctr">
+                      <a:solidFill>
+                        <a:srgbClr val="DDE5DF"/>
+                      </a:solidFill>
+                      <a:prstDash val="solid"/>
+                      <a:round/>
+                      <a:headEnd type="none" w="med" len="med"/>
+                      <a:tailEnd type="none" w="med" len="med"/>
+                    </a:lnT>
+                    <a:lnB w="6350" cap="flat" cmpd="sng" algn="ctr">
+                      <a:solidFill>
+                        <a:srgbClr val="DDE5DF"/>
+                      </a:solidFill>
+                      <a:prstDash val="solid"/>
+                      <a:round/>
+                      <a:headEnd type="none" w="med" len="med"/>
+                      <a:tailEnd type="none" w="med" len="med"/>
+                    </a:lnB>
+                    <a:solidFill>
+                      <a:srgbClr val="FFFFFF"/>
+                    </a:solidFill>
+                  </a:tcPr>
+                </a:tc>
+                <a:tc>
+                  <a:txBody>
+                    <a:bodyPr/>
+                    <a:lstStyle/>
+                    <a:p>
+                      <a:pPr algn="l" indent="0" marL="0">
+                        <a:buNone/>
+                      </a:pPr>
+                      <a:r>
+                        <a:rPr lang="en-US" sz="1200" dirty="0">
+                          <a:solidFill>
+                            <a:srgbClr val="1E2B22"/>
+                          </a:solidFill>
+                          <a:latin typeface="Microsoft JhengHei" pitchFamily="34" charset="0"/>
+                          <a:ea typeface="Microsoft JhengHei" pitchFamily="34" charset="-122"/>
+                          <a:cs typeface="Microsoft JhengHei" pitchFamily="34" charset="-120"/>
+                        </a:rPr>
+                        <a:t>2.0%（9/448）</a:t>
+                      </a:r>
+                      <a:endParaRPr lang="en-US" sz="1200" dirty="0">
+                        <a:latin typeface="Microsoft JhengHei" charset="0"/>
+                        <a:ea typeface="Microsoft JhengHei" charset="0"/>
+                        <a:cs typeface="Microsoft JhengHei" charset="0"/>
+                      </a:endParaRPr>
+                    </a:p>
+                  </a:txBody>
+                  <a:tcPr marL="73152" marR="73152" marT="18288" marB="18288" anchor="ctr">
+                    <a:lnL w="6350" cap="flat" cmpd="sng" algn="ctr">
+                      <a:solidFill>
+                        <a:srgbClr val="DDE5DF"/>
+                      </a:solidFill>
+                      <a:prstDash val="solid"/>
+                      <a:round/>
+                      <a:headEnd type="none" w="med" len="med"/>
+                      <a:tailEnd type="none" w="med" len="med"/>
+                    </a:lnL>
+                    <a:lnR w="6350" cap="flat" cmpd="sng" algn="ctr">
+                      <a:solidFill>
+                        <a:srgbClr val="DDE5DF"/>
+                      </a:solidFill>
+                      <a:prstDash val="solid"/>
+                      <a:round/>
+                      <a:headEnd type="none" w="med" len="med"/>
+                      <a:tailEnd type="none" w="med" len="med"/>
+                    </a:lnR>
+                    <a:lnT w="6350" cap="flat" cmpd="sng" algn="ctr">
+                      <a:solidFill>
+                        <a:srgbClr val="DDE5DF"/>
+                      </a:solidFill>
+                      <a:prstDash val="solid"/>
+                      <a:round/>
+                      <a:headEnd type="none" w="med" len="med"/>
+                      <a:tailEnd type="none" w="med" len="med"/>
+                    </a:lnT>
+                    <a:lnB w="6350" cap="flat" cmpd="sng" algn="ctr">
+                      <a:solidFill>
+                        <a:srgbClr val="DDE5DF"/>
+                      </a:solidFill>
+                      <a:prstDash val="solid"/>
+                      <a:round/>
+                      <a:headEnd type="none" w="med" len="med"/>
+                      <a:tailEnd type="none" w="med" len="med"/>
+                    </a:lnB>
+                    <a:solidFill>
+                      <a:srgbClr val="FFFFFF"/>
+                    </a:solidFill>
+                  </a:tcPr>
+                </a:tc>
+              </a:tr>
+              <a:tr h="329184">
+                <a:tc>
+                  <a:txBody>
+                    <a:bodyPr/>
+                    <a:lstStyle/>
+                    <a:p>
+                      <a:pPr algn="l" indent="0" marL="0">
+                        <a:buNone/>
+                      </a:pPr>
+                      <a:r>
+                        <a:rPr lang="en-US" sz="1200" dirty="0">
+                          <a:solidFill>
+                            <a:srgbClr val="1E2B22"/>
+                          </a:solidFill>
+                          <a:latin typeface="Microsoft JhengHei" pitchFamily="34" charset="0"/>
+                          <a:ea typeface="Microsoft JhengHei" pitchFamily="34" charset="-122"/>
+                          <a:cs typeface="Microsoft JhengHei" pitchFamily="34" charset="-120"/>
+                        </a:rPr>
+                        <a:t>錦水頁岩及其相當地層（P1）</a:t>
+                      </a:r>
+                      <a:endParaRPr lang="en-US" sz="1200" dirty="0">
+                        <a:latin typeface="Microsoft JhengHei" charset="0"/>
+                        <a:ea typeface="Microsoft JhengHei" charset="0"/>
+                        <a:cs typeface="Microsoft JhengHei" charset="0"/>
+                      </a:endParaRPr>
+                    </a:p>
+                  </a:txBody>
+                  <a:tcPr marL="73152" marR="73152" marT="18288" marB="18288" anchor="ctr">
+                    <a:lnL w="6350" cap="flat" cmpd="sng" algn="ctr">
+                      <a:solidFill>
+                        <a:srgbClr val="DDE5DF"/>
+                      </a:solidFill>
+                      <a:prstDash val="solid"/>
+                      <a:round/>
+                      <a:headEnd type="none" w="med" len="med"/>
+                      <a:tailEnd type="none" w="med" len="med"/>
+                    </a:lnL>
+                    <a:lnR w="6350" cap="flat" cmpd="sng" algn="ctr">
+                      <a:solidFill>
+                        <a:srgbClr val="DDE5DF"/>
+                      </a:solidFill>
+                      <a:prstDash val="solid"/>
+                      <a:round/>
+                      <a:headEnd type="none" w="med" len="med"/>
+                      <a:tailEnd type="none" w="med" len="med"/>
+                    </a:lnR>
+                    <a:lnT w="6350" cap="flat" cmpd="sng" algn="ctr">
+                      <a:solidFill>
+                        <a:srgbClr val="DDE5DF"/>
+                      </a:solidFill>
+                      <a:prstDash val="solid"/>
+                      <a:round/>
+                      <a:headEnd type="none" w="med" len="med"/>
+                      <a:tailEnd type="none" w="med" len="med"/>
+                    </a:lnT>
+                    <a:lnB w="6350" cap="flat" cmpd="sng" algn="ctr">
+                      <a:solidFill>
+                        <a:srgbClr val="DDE5DF"/>
+                      </a:solidFill>
+                      <a:prstDash val="solid"/>
+                      <a:round/>
+                      <a:headEnd type="none" w="med" len="med"/>
+                      <a:tailEnd type="none" w="med" len="med"/>
+                    </a:lnB>
+                    <a:solidFill>
+                      <a:srgbClr val="FFFFFF"/>
+                    </a:solidFill>
+                  </a:tcPr>
+                </a:tc>
+                <a:tc>
+                  <a:txBody>
+                    <a:bodyPr/>
+                    <a:lstStyle/>
+                    <a:p>
+                      <a:pPr algn="l" indent="0" marL="0">
+                        <a:buNone/>
+                      </a:pPr>
+                      <a:r>
+                        <a:rPr lang="en-US" sz="1200" dirty="0">
+                          <a:solidFill>
+                            <a:srgbClr val="1E2B22"/>
+                          </a:solidFill>
+                          <a:latin typeface="Microsoft JhengHei" pitchFamily="34" charset="0"/>
+                          <a:ea typeface="Microsoft JhengHei" pitchFamily="34" charset="-122"/>
+                          <a:cs typeface="Microsoft JhengHei" pitchFamily="34" charset="-120"/>
+                        </a:rPr>
+                        <a:t>上新世</a:t>
+                      </a:r>
+                      <a:endParaRPr lang="en-US" sz="1200" dirty="0">
+                        <a:latin typeface="Microsoft JhengHei" charset="0"/>
+                        <a:ea typeface="Microsoft JhengHei" charset="0"/>
+                        <a:cs typeface="Microsoft JhengHei" charset="0"/>
+                      </a:endParaRPr>
+                    </a:p>
+                  </a:txBody>
+                  <a:tcPr marL="73152" marR="73152" marT="18288" marB="18288" anchor="ctr">
+                    <a:lnL w="6350" cap="flat" cmpd="sng" algn="ctr">
+                      <a:solidFill>
+                        <a:srgbClr val="DDE5DF"/>
+                      </a:solidFill>
+                      <a:prstDash val="solid"/>
+                      <a:round/>
+                      <a:headEnd type="none" w="med" len="med"/>
+                      <a:tailEnd type="none" w="med" len="med"/>
+                    </a:lnL>
+                    <a:lnR w="6350" cap="flat" cmpd="sng" algn="ctr">
+                      <a:solidFill>
+                        <a:srgbClr val="DDE5DF"/>
+                      </a:solidFill>
+                      <a:prstDash val="solid"/>
+                      <a:round/>
+                      <a:headEnd type="none" w="med" len="med"/>
+                      <a:tailEnd type="none" w="med" len="med"/>
+                    </a:lnR>
+                    <a:lnT w="6350" cap="flat" cmpd="sng" algn="ctr">
+                      <a:solidFill>
+                        <a:srgbClr val="DDE5DF"/>
+                      </a:solidFill>
+                      <a:prstDash val="solid"/>
+                      <a:round/>
+                      <a:headEnd type="none" w="med" len="med"/>
+                      <a:tailEnd type="none" w="med" len="med"/>
+                    </a:lnT>
+                    <a:lnB w="6350" cap="flat" cmpd="sng" algn="ctr">
+                      <a:solidFill>
+                        <a:srgbClr val="DDE5DF"/>
+                      </a:solidFill>
+                      <a:prstDash val="solid"/>
+                      <a:round/>
+                      <a:headEnd type="none" w="med" len="med"/>
+                      <a:tailEnd type="none" w="med" len="med"/>
+                    </a:lnB>
+                    <a:solidFill>
+                      <a:srgbClr val="FFFFFF"/>
+                    </a:solidFill>
+                  </a:tcPr>
+                </a:tc>
+                <a:tc>
+                  <a:txBody>
+                    <a:bodyPr/>
+                    <a:lstStyle/>
+                    <a:p>
+                      <a:pPr algn="l" indent="0" marL="0">
+                        <a:buNone/>
+                      </a:pPr>
+                      <a:r>
+                        <a:rPr lang="en-US" sz="1200" dirty="0">
+                          <a:solidFill>
+                            <a:srgbClr val="1E2B22"/>
+                          </a:solidFill>
+                          <a:latin typeface="Microsoft JhengHei" pitchFamily="34" charset="0"/>
+                          <a:ea typeface="Microsoft JhengHei" pitchFamily="34" charset="-122"/>
+                          <a:cs typeface="Microsoft JhengHei" pitchFamily="34" charset="-120"/>
+                        </a:rPr>
+                        <a:t>50.6</a:t>
+                      </a:r>
+                      <a:endParaRPr lang="en-US" sz="1200" dirty="0">
+                        <a:latin typeface="Microsoft JhengHei" charset="0"/>
+                        <a:ea typeface="Microsoft JhengHei" charset="0"/>
+                        <a:cs typeface="Microsoft JhengHei" charset="0"/>
+                      </a:endParaRPr>
+                    </a:p>
+                  </a:txBody>
+                  <a:tcPr marL="73152" marR="73152" marT="18288" marB="18288" anchor="ctr">
+                    <a:lnL w="6350" cap="flat" cmpd="sng" algn="ctr">
+                      <a:solidFill>
+                        <a:srgbClr val="DDE5DF"/>
+                      </a:solidFill>
+                      <a:prstDash val="solid"/>
+                      <a:round/>
+                      <a:headEnd type="none" w="med" len="med"/>
+                      <a:tailEnd type="none" w="med" len="med"/>
+                    </a:lnL>
+                    <a:lnR w="6350" cap="flat" cmpd="sng" algn="ctr">
+                      <a:solidFill>
+                        <a:srgbClr val="DDE5DF"/>
+                      </a:solidFill>
+                      <a:prstDash val="solid"/>
+                      <a:round/>
+                      <a:headEnd type="none" w="med" len="med"/>
+                      <a:tailEnd type="none" w="med" len="med"/>
+                    </a:lnR>
+                    <a:lnT w="6350" cap="flat" cmpd="sng" algn="ctr">
+                      <a:solidFill>
+                        <a:srgbClr val="DDE5DF"/>
+                      </a:solidFill>
+                      <a:prstDash val="solid"/>
+                      <a:round/>
+                      <a:headEnd type="none" w="med" len="med"/>
+                      <a:tailEnd type="none" w="med" len="med"/>
+                    </a:lnT>
+                    <a:lnB w="6350" cap="flat" cmpd="sng" algn="ctr">
+                      <a:solidFill>
+                        <a:srgbClr val="DDE5DF"/>
+                      </a:solidFill>
+                      <a:prstDash val="solid"/>
+                      <a:round/>
+                      <a:headEnd type="none" w="med" len="med"/>
+                      <a:tailEnd type="none" w="med" len="med"/>
+                    </a:lnB>
+                    <a:solidFill>
+                      <a:srgbClr val="FFFFFF"/>
+                    </a:solidFill>
+                  </a:tcPr>
+                </a:tc>
+                <a:tc>
+                  <a:txBody>
+                    <a:bodyPr/>
+                    <a:lstStyle/>
+                    <a:p>
+                      <a:pPr algn="l" indent="0" marL="0">
+                        <a:buNone/>
+                      </a:pPr>
+                      <a:r>
+                        <a:rPr lang="en-US" sz="1200" dirty="0">
+                          <a:solidFill>
+                            <a:srgbClr val="1E2B22"/>
+                          </a:solidFill>
+                          <a:latin typeface="Microsoft JhengHei" pitchFamily="34" charset="0"/>
+                          <a:ea typeface="Microsoft JhengHei" pitchFamily="34" charset="-122"/>
+                          <a:cs typeface="Microsoft JhengHei" pitchFamily="34" charset="-120"/>
+                        </a:rPr>
+                        <a:t>87</a:t>
+                      </a:r>
+                      <a:endParaRPr lang="en-US" sz="1200" dirty="0">
+                        <a:latin typeface="Microsoft JhengHei" charset="0"/>
+                        <a:ea typeface="Microsoft JhengHei" charset="0"/>
+                        <a:cs typeface="Microsoft JhengHei" charset="0"/>
+                      </a:endParaRPr>
+                    </a:p>
+                  </a:txBody>
+                  <a:tcPr marL="73152" marR="73152" marT="18288" marB="18288" anchor="ctr">
+                    <a:lnL w="6350" cap="flat" cmpd="sng" algn="ctr">
+                      <a:solidFill>
+                        <a:srgbClr val="DDE5DF"/>
+                      </a:solidFill>
+                      <a:prstDash val="solid"/>
+                      <a:round/>
+                      <a:headEnd type="none" w="med" len="med"/>
+                      <a:tailEnd type="none" w="med" len="med"/>
+                    </a:lnL>
+                    <a:lnR w="6350" cap="flat" cmpd="sng" algn="ctr">
+                      <a:solidFill>
+                        <a:srgbClr val="DDE5DF"/>
+                      </a:solidFill>
+                      <a:prstDash val="solid"/>
+                      <a:round/>
+                      <a:headEnd type="none" w="med" len="med"/>
+                      <a:tailEnd type="none" w="med" len="med"/>
+                    </a:lnR>
+                    <a:lnT w="6350" cap="flat" cmpd="sng" algn="ctr">
+                      <a:solidFill>
+                        <a:srgbClr val="DDE5DF"/>
+                      </a:solidFill>
+                      <a:prstDash val="solid"/>
+                      <a:round/>
+                      <a:headEnd type="none" w="med" len="med"/>
+                      <a:tailEnd type="none" w="med" len="med"/>
+                    </a:lnT>
+                    <a:lnB w="6350" cap="flat" cmpd="sng" algn="ctr">
+                      <a:solidFill>
+                        <a:srgbClr val="DDE5DF"/>
+                      </a:solidFill>
+                      <a:prstDash val="solid"/>
+                      <a:round/>
+                      <a:headEnd type="none" w="med" len="med"/>
+                      <a:tailEnd type="none" w="med" len="med"/>
+                    </a:lnB>
+                    <a:solidFill>
+                      <a:srgbClr val="FFFFFF"/>
+                    </a:solidFill>
+                  </a:tcPr>
+                </a:tc>
+                <a:tc>
+                  <a:txBody>
+                    <a:bodyPr/>
+                    <a:lstStyle/>
+                    <a:p>
+                      <a:pPr algn="l" indent="0" marL="0">
+                        <a:buNone/>
+                      </a:pPr>
+                      <a:r>
+                        <a:rPr lang="en-US" sz="1200" dirty="0">
+                          <a:solidFill>
+                            <a:srgbClr val="1E2B22"/>
+                          </a:solidFill>
+                          <a:latin typeface="Microsoft JhengHei" pitchFamily="34" charset="0"/>
+                          <a:ea typeface="Microsoft JhengHei" pitchFamily="34" charset="-122"/>
+                          <a:cs typeface="Microsoft JhengHei" pitchFamily="34" charset="-120"/>
+                        </a:rPr>
+                        <a:t>1.7%</a:t>
+                      </a:r>
+                      <a:endParaRPr lang="en-US" sz="1200" dirty="0">
+                        <a:latin typeface="Microsoft JhengHei" charset="0"/>
+                        <a:ea typeface="Microsoft JhengHei" charset="0"/>
+                        <a:cs typeface="Microsoft JhengHei" charset="0"/>
+                      </a:endParaRPr>
+                    </a:p>
+                  </a:txBody>
+                  <a:tcPr marL="73152" marR="73152" marT="18288" marB="18288" anchor="ctr">
+                    <a:lnL w="6350" cap="flat" cmpd="sng" algn="ctr">
+                      <a:solidFill>
+                        <a:srgbClr val="DDE5DF"/>
+                      </a:solidFill>
+                      <a:prstDash val="solid"/>
+                      <a:round/>
+                      <a:headEnd type="none" w="med" len="med"/>
+                      <a:tailEnd type="none" w="med" len="med"/>
+                    </a:lnL>
+                    <a:lnR w="6350" cap="flat" cmpd="sng" algn="ctr">
+                      <a:solidFill>
+                        <a:srgbClr val="DDE5DF"/>
+                      </a:solidFill>
+                      <a:prstDash val="solid"/>
+                      <a:round/>
+                      <a:headEnd type="none" w="med" len="med"/>
+                      <a:tailEnd type="none" w="med" len="med"/>
+                    </a:lnR>
+                    <a:lnT w="6350" cap="flat" cmpd="sng" algn="ctr">
+                      <a:solidFill>
+                        <a:srgbClr val="DDE5DF"/>
+                      </a:solidFill>
+                      <a:prstDash val="solid"/>
+                      <a:round/>
+                      <a:headEnd type="none" w="med" len="med"/>
+                      <a:tailEnd type="none" w="med" len="med"/>
+                    </a:lnT>
+                    <a:lnB w="6350" cap="flat" cmpd="sng" algn="ctr">
+                      <a:solidFill>
+                        <a:srgbClr val="DDE5DF"/>
+                      </a:solidFill>
+                      <a:prstDash val="solid"/>
+                      <a:round/>
+                      <a:headEnd type="none" w="med" len="med"/>
+                      <a:tailEnd type="none" w="med" len="med"/>
+                    </a:lnB>
+                    <a:solidFill>
+                      <a:srgbClr val="FFFFFF"/>
+                    </a:solidFill>
+                  </a:tcPr>
+                </a:tc>
+                <a:tc>
+                  <a:txBody>
+                    <a:bodyPr/>
+                    <a:lstStyle/>
+                    <a:p>
+                      <a:pPr algn="l" indent="0" marL="0">
+                        <a:buNone/>
+                      </a:pPr>
+                      <a:r>
+                        <a:rPr lang="en-US" sz="1200" dirty="0">
+                          <a:solidFill>
+                            <a:srgbClr val="5E6B63"/>
+                          </a:solidFill>
+                          <a:latin typeface="Microsoft JhengHei" pitchFamily="34" charset="0"/>
+                          <a:ea typeface="Microsoft JhengHei" pitchFamily="34" charset="-122"/>
+                          <a:cs typeface="Microsoft JhengHei" pitchFamily="34" charset="-120"/>
+                        </a:rPr>
+                        <a:t>0.32</a:t>
+                      </a:r>
+                      <a:endParaRPr lang="en-US" sz="1200" dirty="0">
+                        <a:latin typeface="Microsoft JhengHei" charset="0"/>
+                        <a:ea typeface="Microsoft JhengHei" charset="0"/>
+                        <a:cs typeface="Microsoft JhengHei" charset="0"/>
+                      </a:endParaRPr>
+                    </a:p>
+                  </a:txBody>
+                  <a:tcPr marL="73152" marR="73152" marT="18288" marB="18288" anchor="ctr">
+                    <a:lnL w="6350" cap="flat" cmpd="sng" algn="ctr">
+                      <a:solidFill>
+                        <a:srgbClr val="DDE5DF"/>
+                      </a:solidFill>
+                      <a:prstDash val="solid"/>
+                      <a:round/>
+                      <a:headEnd type="none" w="med" len="med"/>
+                      <a:tailEnd type="none" w="med" len="med"/>
+                    </a:lnL>
+                    <a:lnR w="6350" cap="flat" cmpd="sng" algn="ctr">
+                      <a:solidFill>
+                        <a:srgbClr val="DDE5DF"/>
+                      </a:solidFill>
+                      <a:prstDash val="solid"/>
+                      <a:round/>
+                      <a:headEnd type="none" w="med" len="med"/>
+                      <a:tailEnd type="none" w="med" len="med"/>
+                    </a:lnR>
+                    <a:lnT w="6350" cap="flat" cmpd="sng" algn="ctr">
+                      <a:solidFill>
+                        <a:srgbClr val="DDE5DF"/>
+                      </a:solidFill>
+                      <a:prstDash val="solid"/>
+                      <a:round/>
+                      <a:headEnd type="none" w="med" len="med"/>
+                      <a:tailEnd type="none" w="med" len="med"/>
+                    </a:lnT>
+                    <a:lnB w="6350" cap="flat" cmpd="sng" algn="ctr">
+                      <a:solidFill>
+                        <a:srgbClr val="DDE5DF"/>
+                      </a:solidFill>
+                      <a:prstDash val="solid"/>
+                      <a:round/>
+                      <a:headEnd type="none" w="med" len="med"/>
+                      <a:tailEnd type="none" w="med" len="med"/>
+                    </a:lnB>
+                    <a:solidFill>
+                      <a:srgbClr val="FFFFFF"/>
+                    </a:solidFill>
+                  </a:tcPr>
+                </a:tc>
+                <a:tc>
+                  <a:txBody>
+                    <a:bodyPr/>
+                    <a:lstStyle/>
+                    <a:p>
+                      <a:pPr algn="l" indent="0" marL="0">
+                        <a:buNone/>
+                      </a:pPr>
+                      <a:r>
+                        <a:rPr lang="en-US" sz="1200" dirty="0">
+                          <a:solidFill>
+                            <a:srgbClr val="1E2B22"/>
+                          </a:solidFill>
+                          <a:latin typeface="Microsoft JhengHei" pitchFamily="34" charset="0"/>
+                          <a:ea typeface="Microsoft JhengHei" pitchFamily="34" charset="-122"/>
+                          <a:cs typeface="Microsoft JhengHei" pitchFamily="34" charset="-120"/>
+                        </a:rPr>
+                        <a:t>0.0%（0/465）</a:t>
+                      </a:r>
+                      <a:endParaRPr lang="en-US" sz="1200" dirty="0">
+                        <a:latin typeface="Microsoft JhengHei" charset="0"/>
+                        <a:ea typeface="Microsoft JhengHei" charset="0"/>
+                        <a:cs typeface="Microsoft JhengHei" charset="0"/>
+                      </a:endParaRPr>
+                    </a:p>
+                  </a:txBody>
+                  <a:tcPr marL="73152" marR="73152" marT="18288" marB="18288" anchor="ctr">
+                    <a:lnL w="6350" cap="flat" cmpd="sng" algn="ctr">
+                      <a:solidFill>
+                        <a:srgbClr val="DDE5DF"/>
+                      </a:solidFill>
+                      <a:prstDash val="solid"/>
+                      <a:round/>
+                      <a:headEnd type="none" w="med" len="med"/>
+                      <a:tailEnd type="none" w="med" len="med"/>
+                    </a:lnL>
+                    <a:lnR w="6350" cap="flat" cmpd="sng" algn="ctr">
+                      <a:solidFill>
+                        <a:srgbClr val="DDE5DF"/>
+                      </a:solidFill>
+                      <a:prstDash val="solid"/>
+                      <a:round/>
+                      <a:headEnd type="none" w="med" len="med"/>
+                      <a:tailEnd type="none" w="med" len="med"/>
+                    </a:lnR>
+                    <a:lnT w="6350" cap="flat" cmpd="sng" algn="ctr">
+                      <a:solidFill>
+                        <a:srgbClr val="DDE5DF"/>
+                      </a:solidFill>
+                      <a:prstDash val="solid"/>
+                      <a:round/>
+                      <a:headEnd type="none" w="med" len="med"/>
+                      <a:tailEnd type="none" w="med" len="med"/>
+                    </a:lnT>
+                    <a:lnB w="6350" cap="flat" cmpd="sng" algn="ctr">
+                      <a:solidFill>
+                        <a:srgbClr val="DDE5DF"/>
+                      </a:solidFill>
+                      <a:prstDash val="solid"/>
+                      <a:round/>
+                      <a:headEnd type="none" w="med" len="med"/>
+                      <a:tailEnd type="none" w="med" len="med"/>
+                    </a:lnB>
+                    <a:solidFill>
+                      <a:srgbClr val="FFFFFF"/>
+                    </a:solidFill>
+                  </a:tcPr>
+                </a:tc>
+              </a:tr>
+              <a:tr h="329184">
+                <a:tc>
+                  <a:txBody>
+                    <a:bodyPr/>
+                    <a:lstStyle/>
+                    <a:p>
+                      <a:pPr algn="l" indent="0" marL="0">
+                        <a:buNone/>
+                      </a:pPr>
+                      <a:r>
+                        <a:rPr lang="en-US" sz="1200" dirty="0">
+                          <a:solidFill>
+                            <a:srgbClr val="1E2B22"/>
+                          </a:solidFill>
+                          <a:latin typeface="Microsoft JhengHei" pitchFamily="34" charset="0"/>
+                          <a:ea typeface="Microsoft JhengHei" pitchFamily="34" charset="-122"/>
+                          <a:cs typeface="Microsoft JhengHei" pitchFamily="34" charset="-120"/>
+                        </a:rPr>
+                        <a:t>臺地堆積（Q4）</a:t>
+                      </a:r>
+                      <a:endParaRPr lang="en-US" sz="1200" dirty="0">
+                        <a:latin typeface="Microsoft JhengHei" charset="0"/>
+                        <a:ea typeface="Microsoft JhengHei" charset="0"/>
+                        <a:cs typeface="Microsoft JhengHei" charset="0"/>
+                      </a:endParaRPr>
+                    </a:p>
+                  </a:txBody>
+                  <a:tcPr marL="73152" marR="73152" marT="18288" marB="18288" anchor="ctr">
+                    <a:lnL w="6350" cap="flat" cmpd="sng" algn="ctr">
+                      <a:solidFill>
+                        <a:srgbClr val="DDE5DF"/>
+                      </a:solidFill>
+                      <a:prstDash val="solid"/>
+                      <a:round/>
+                      <a:headEnd type="none" w="med" len="med"/>
+                      <a:tailEnd type="none" w="med" len="med"/>
+                    </a:lnL>
+                    <a:lnR w="6350" cap="flat" cmpd="sng" algn="ctr">
+                      <a:solidFill>
+                        <a:srgbClr val="DDE5DF"/>
+                      </a:solidFill>
+                      <a:prstDash val="solid"/>
+                      <a:round/>
+                      <a:headEnd type="none" w="med" len="med"/>
+                      <a:tailEnd type="none" w="med" len="med"/>
+                    </a:lnR>
+                    <a:lnT w="6350" cap="flat" cmpd="sng" algn="ctr">
+                      <a:solidFill>
+                        <a:srgbClr val="DDE5DF"/>
+                      </a:solidFill>
+                      <a:prstDash val="solid"/>
+                      <a:round/>
+                      <a:headEnd type="none" w="med" len="med"/>
+                      <a:tailEnd type="none" w="med" len="med"/>
+                    </a:lnT>
+                    <a:lnB w="6350" cap="flat" cmpd="sng" algn="ctr">
+                      <a:solidFill>
+                        <a:srgbClr val="DDE5DF"/>
+                      </a:solidFill>
+                      <a:prstDash val="solid"/>
+                      <a:round/>
+                      <a:headEnd type="none" w="med" len="med"/>
+                      <a:tailEnd type="none" w="med" len="med"/>
+                    </a:lnB>
+                    <a:solidFill>
+                      <a:srgbClr val="FFFFFF"/>
+                    </a:solidFill>
+                  </a:tcPr>
+                </a:tc>
+                <a:tc>
+                  <a:txBody>
+                    <a:bodyPr/>
+                    <a:lstStyle/>
+                    <a:p>
+                      <a:pPr algn="l" indent="0" marL="0">
+                        <a:buNone/>
+                      </a:pPr>
+                      <a:r>
+                        <a:rPr lang="en-US" sz="1200" dirty="0">
+                          <a:solidFill>
+                            <a:srgbClr val="1E2B22"/>
+                          </a:solidFill>
+                          <a:latin typeface="Microsoft JhengHei" pitchFamily="34" charset="0"/>
+                          <a:ea typeface="Microsoft JhengHei" pitchFamily="34" charset="-122"/>
+                          <a:cs typeface="Microsoft JhengHei" pitchFamily="34" charset="-120"/>
+                        </a:rPr>
+                        <a:t>更新世</a:t>
+                      </a:r>
+                      <a:endParaRPr lang="en-US" sz="1200" dirty="0">
+                        <a:latin typeface="Microsoft JhengHei" charset="0"/>
+                        <a:ea typeface="Microsoft JhengHei" charset="0"/>
+                        <a:cs typeface="Microsoft JhengHei" charset="0"/>
+                      </a:endParaRPr>
+                    </a:p>
+                  </a:txBody>
+                  <a:tcPr marL="73152" marR="73152" marT="18288" marB="18288" anchor="ctr">
+                    <a:lnL w="6350" cap="flat" cmpd="sng" algn="ctr">
+                      <a:solidFill>
+                        <a:srgbClr val="DDE5DF"/>
+                      </a:solidFill>
+                      <a:prstDash val="solid"/>
+                      <a:round/>
+                      <a:headEnd type="none" w="med" len="med"/>
+                      <a:tailEnd type="none" w="med" len="med"/>
+                    </a:lnL>
+                    <a:lnR w="6350" cap="flat" cmpd="sng" algn="ctr">
+                      <a:solidFill>
+                        <a:srgbClr val="DDE5DF"/>
+                      </a:solidFill>
+                      <a:prstDash val="solid"/>
+                      <a:round/>
+                      <a:headEnd type="none" w="med" len="med"/>
+                      <a:tailEnd type="none" w="med" len="med"/>
+                    </a:lnR>
+                    <a:lnT w="6350" cap="flat" cmpd="sng" algn="ctr">
+                      <a:solidFill>
+                        <a:srgbClr val="DDE5DF"/>
+                      </a:solidFill>
+                      <a:prstDash val="solid"/>
+                      <a:round/>
+                      <a:headEnd type="none" w="med" len="med"/>
+                      <a:tailEnd type="none" w="med" len="med"/>
+                    </a:lnT>
+                    <a:lnB w="6350" cap="flat" cmpd="sng" algn="ctr">
+                      <a:solidFill>
+                        <a:srgbClr val="DDE5DF"/>
+                      </a:solidFill>
+                      <a:prstDash val="solid"/>
+                      <a:round/>
+                      <a:headEnd type="none" w="med" len="med"/>
+                      <a:tailEnd type="none" w="med" len="med"/>
+                    </a:lnB>
+                    <a:solidFill>
+                      <a:srgbClr val="FFFFFF"/>
+                    </a:solidFill>
+                  </a:tcPr>
+                </a:tc>
+                <a:tc>
+                  <a:txBody>
+                    <a:bodyPr/>
+                    <a:lstStyle/>
+                    <a:p>
+                      <a:pPr algn="l" indent="0" marL="0">
+                        <a:buNone/>
+                      </a:pPr>
+                      <a:r>
+                        <a:rPr lang="en-US" sz="1200" dirty="0">
+                          <a:solidFill>
+                            <a:srgbClr val="1E2B22"/>
+                          </a:solidFill>
+                          <a:latin typeface="Microsoft JhengHei" pitchFamily="34" charset="0"/>
+                          <a:ea typeface="Microsoft JhengHei" pitchFamily="34" charset="-122"/>
+                          <a:cs typeface="Microsoft JhengHei" pitchFamily="34" charset="-120"/>
+                        </a:rPr>
+                        <a:t>9.7</a:t>
+                      </a:r>
+                      <a:endParaRPr lang="en-US" sz="1200" dirty="0">
+                        <a:latin typeface="Microsoft JhengHei" charset="0"/>
+                        <a:ea typeface="Microsoft JhengHei" charset="0"/>
+                        <a:cs typeface="Microsoft JhengHei" charset="0"/>
+                      </a:endParaRPr>
+                    </a:p>
+                  </a:txBody>
+                  <a:tcPr marL="73152" marR="73152" marT="18288" marB="18288" anchor="ctr">
+                    <a:lnL w="6350" cap="flat" cmpd="sng" algn="ctr">
+                      <a:solidFill>
+                        <a:srgbClr val="DDE5DF"/>
+                      </a:solidFill>
+                      <a:prstDash val="solid"/>
+                      <a:round/>
+                      <a:headEnd type="none" w="med" len="med"/>
+                      <a:tailEnd type="none" w="med" len="med"/>
+                    </a:lnL>
+                    <a:lnR w="6350" cap="flat" cmpd="sng" algn="ctr">
+                      <a:solidFill>
+                        <a:srgbClr val="DDE5DF"/>
+                      </a:solidFill>
+                      <a:prstDash val="solid"/>
+                      <a:round/>
+                      <a:headEnd type="none" w="med" len="med"/>
+                      <a:tailEnd type="none" w="med" len="med"/>
+                    </a:lnR>
+                    <a:lnT w="6350" cap="flat" cmpd="sng" algn="ctr">
+                      <a:solidFill>
+                        <a:srgbClr val="DDE5DF"/>
+                      </a:solidFill>
+                      <a:prstDash val="solid"/>
+                      <a:round/>
+                      <a:headEnd type="none" w="med" len="med"/>
+                      <a:tailEnd type="none" w="med" len="med"/>
+                    </a:lnT>
+                    <a:lnB w="6350" cap="flat" cmpd="sng" algn="ctr">
+                      <a:solidFill>
+                        <a:srgbClr val="DDE5DF"/>
+                      </a:solidFill>
+                      <a:prstDash val="solid"/>
+                      <a:round/>
+                      <a:headEnd type="none" w="med" len="med"/>
+                      <a:tailEnd type="none" w="med" len="med"/>
+                    </a:lnB>
+                    <a:solidFill>
+                      <a:srgbClr val="FFFFFF"/>
+                    </a:solidFill>
+                  </a:tcPr>
+                </a:tc>
+                <a:tc>
+                  <a:txBody>
+                    <a:bodyPr/>
+                    <a:lstStyle/>
+                    <a:p>
+                      <a:pPr algn="l" indent="0" marL="0">
+                        <a:buNone/>
+                      </a:pPr>
+                      <a:r>
+                        <a:rPr lang="en-US" sz="1200" dirty="0">
+                          <a:solidFill>
+                            <a:srgbClr val="1E2B22"/>
+                          </a:solidFill>
+                          <a:latin typeface="Microsoft JhengHei" pitchFamily="34" charset="0"/>
+                          <a:ea typeface="Microsoft JhengHei" pitchFamily="34" charset="-122"/>
+                          <a:cs typeface="Microsoft JhengHei" pitchFamily="34" charset="-120"/>
+                        </a:rPr>
+                        <a:t>32</a:t>
+                      </a:r>
+                      <a:endParaRPr lang="en-US" sz="1200" dirty="0">
+                        <a:latin typeface="Microsoft JhengHei" charset="0"/>
+                        <a:ea typeface="Microsoft JhengHei" charset="0"/>
+                        <a:cs typeface="Microsoft JhengHei" charset="0"/>
+                      </a:endParaRPr>
+                    </a:p>
+                  </a:txBody>
+                  <a:tcPr marL="73152" marR="73152" marT="18288" marB="18288" anchor="ctr">
+                    <a:lnL w="6350" cap="flat" cmpd="sng" algn="ctr">
+                      <a:solidFill>
+                        <a:srgbClr val="DDE5DF"/>
+                      </a:solidFill>
+                      <a:prstDash val="solid"/>
+                      <a:round/>
+                      <a:headEnd type="none" w="med" len="med"/>
+                      <a:tailEnd type="none" w="med" len="med"/>
+                    </a:lnL>
+                    <a:lnR w="6350" cap="flat" cmpd="sng" algn="ctr">
+                      <a:solidFill>
+                        <a:srgbClr val="DDE5DF"/>
+                      </a:solidFill>
+                      <a:prstDash val="solid"/>
+                      <a:round/>
+                      <a:headEnd type="none" w="med" len="med"/>
+                      <a:tailEnd type="none" w="med" len="med"/>
+                    </a:lnR>
+                    <a:lnT w="6350" cap="flat" cmpd="sng" algn="ctr">
+                      <a:solidFill>
+                        <a:srgbClr val="DDE5DF"/>
+                      </a:solidFill>
+                      <a:prstDash val="solid"/>
+                      <a:round/>
+                      <a:headEnd type="none" w="med" len="med"/>
+                      <a:tailEnd type="none" w="med" len="med"/>
+                    </a:lnT>
+                    <a:lnB w="6350" cap="flat" cmpd="sng" algn="ctr">
+                      <a:solidFill>
+                        <a:srgbClr val="DDE5DF"/>
+                      </a:solidFill>
+                      <a:prstDash val="solid"/>
+                      <a:round/>
+                      <a:headEnd type="none" w="med" len="med"/>
+                      <a:tailEnd type="none" w="med" len="med"/>
+                    </a:lnB>
+                    <a:solidFill>
+                      <a:srgbClr val="FFFFFF"/>
+                    </a:solidFill>
+                  </a:tcPr>
+                </a:tc>
+                <a:tc>
+                  <a:txBody>
+                    <a:bodyPr/>
+                    <a:lstStyle/>
+                    <a:p>
+                      <a:pPr algn="l" indent="0" marL="0">
+                        <a:buNone/>
+                      </a:pPr>
+                      <a:r>
+                        <a:rPr lang="en-US" sz="1200" dirty="0">
+                          <a:solidFill>
+                            <a:srgbClr val="1E2B22"/>
+                          </a:solidFill>
+                          <a:latin typeface="Microsoft JhengHei" pitchFamily="34" charset="0"/>
+                          <a:ea typeface="Microsoft JhengHei" pitchFamily="34" charset="-122"/>
+                          <a:cs typeface="Microsoft JhengHei" pitchFamily="34" charset="-120"/>
+                        </a:rPr>
+                        <a:t>3.3%</a:t>
+                      </a:r>
+                      <a:endParaRPr lang="en-US" sz="1200" dirty="0">
+                        <a:latin typeface="Microsoft JhengHei" charset="0"/>
+                        <a:ea typeface="Microsoft JhengHei" charset="0"/>
+                        <a:cs typeface="Microsoft JhengHei" charset="0"/>
+                      </a:endParaRPr>
+                    </a:p>
+                  </a:txBody>
+                  <a:tcPr marL="73152" marR="73152" marT="18288" marB="18288" anchor="ctr">
+                    <a:lnL w="6350" cap="flat" cmpd="sng" algn="ctr">
+                      <a:solidFill>
+                        <a:srgbClr val="DDE5DF"/>
+                      </a:solidFill>
+                      <a:prstDash val="solid"/>
+                      <a:round/>
+                      <a:headEnd type="none" w="med" len="med"/>
+                      <a:tailEnd type="none" w="med" len="med"/>
+                    </a:lnL>
+                    <a:lnR w="6350" cap="flat" cmpd="sng" algn="ctr">
+                      <a:solidFill>
+                        <a:srgbClr val="DDE5DF"/>
+                      </a:solidFill>
+                      <a:prstDash val="solid"/>
+                      <a:round/>
+                      <a:headEnd type="none" w="med" len="med"/>
+                      <a:tailEnd type="none" w="med" len="med"/>
+                    </a:lnR>
+                    <a:lnT w="6350" cap="flat" cmpd="sng" algn="ctr">
+                      <a:solidFill>
+                        <a:srgbClr val="DDE5DF"/>
+                      </a:solidFill>
+                      <a:prstDash val="solid"/>
+                      <a:round/>
+                      <a:headEnd type="none" w="med" len="med"/>
+                      <a:tailEnd type="none" w="med" len="med"/>
+                    </a:lnT>
+                    <a:lnB w="6350" cap="flat" cmpd="sng" algn="ctr">
+                      <a:solidFill>
+                        <a:srgbClr val="DDE5DF"/>
+                      </a:solidFill>
+                      <a:prstDash val="solid"/>
+                      <a:round/>
+                      <a:headEnd type="none" w="med" len="med"/>
+                      <a:tailEnd type="none" w="med" len="med"/>
+                    </a:lnB>
+                    <a:solidFill>
+                      <a:srgbClr val="FFFFFF"/>
+                    </a:solidFill>
+                  </a:tcPr>
+                </a:tc>
+                <a:tc>
+                  <a:txBody>
+                    <a:bodyPr/>
+                    <a:lstStyle/>
+                    <a:p>
+                      <a:pPr algn="l" indent="0" marL="0">
+                        <a:buNone/>
+                      </a:pPr>
+                      <a:r>
+                        <a:rPr lang="en-US" sz="1200" dirty="0">
+                          <a:solidFill>
+                            <a:srgbClr val="1E2B22"/>
+                          </a:solidFill>
+                          <a:latin typeface="Microsoft JhengHei" pitchFamily="34" charset="0"/>
+                          <a:ea typeface="Microsoft JhengHei" pitchFamily="34" charset="-122"/>
+                          <a:cs typeface="Microsoft JhengHei" pitchFamily="34" charset="-120"/>
+                        </a:rPr>
+                        <a:t>0.62</a:t>
+                      </a:r>
+                      <a:endParaRPr lang="en-US" sz="1200" dirty="0">
+                        <a:latin typeface="Microsoft JhengHei" charset="0"/>
+                        <a:ea typeface="Microsoft JhengHei" charset="0"/>
+                        <a:cs typeface="Microsoft JhengHei" charset="0"/>
+                      </a:endParaRPr>
+                    </a:p>
+                  </a:txBody>
+                  <a:tcPr marL="73152" marR="73152" marT="18288" marB="18288" anchor="ctr">
+                    <a:lnL w="6350" cap="flat" cmpd="sng" algn="ctr">
+                      <a:solidFill>
+                        <a:srgbClr val="DDE5DF"/>
+                      </a:solidFill>
+                      <a:prstDash val="solid"/>
+                      <a:round/>
+                      <a:headEnd type="none" w="med" len="med"/>
+                      <a:tailEnd type="none" w="med" len="med"/>
+                    </a:lnL>
+                    <a:lnR w="6350" cap="flat" cmpd="sng" algn="ctr">
+                      <a:solidFill>
+                        <a:srgbClr val="DDE5DF"/>
+                      </a:solidFill>
+                      <a:prstDash val="solid"/>
+                      <a:round/>
+                      <a:headEnd type="none" w="med" len="med"/>
+                      <a:tailEnd type="none" w="med" len="med"/>
+                    </a:lnR>
+                    <a:lnT w="6350" cap="flat" cmpd="sng" algn="ctr">
+                      <a:solidFill>
+                        <a:srgbClr val="DDE5DF"/>
+                      </a:solidFill>
+                      <a:prstDash val="solid"/>
+                      <a:round/>
+                      <a:headEnd type="none" w="med" len="med"/>
+                      <a:tailEnd type="none" w="med" len="med"/>
+                    </a:lnT>
+                    <a:lnB w="6350" cap="flat" cmpd="sng" algn="ctr">
+                      <a:solidFill>
+                        <a:srgbClr val="DDE5DF"/>
+                      </a:solidFill>
+                      <a:prstDash val="solid"/>
+                      <a:round/>
+                      <a:headEnd type="none" w="med" len="med"/>
+                      <a:tailEnd type="none" w="med" len="med"/>
+                    </a:lnB>
+                    <a:solidFill>
+                      <a:srgbClr val="FFFFFF"/>
+                    </a:solidFill>
+                  </a:tcPr>
+                </a:tc>
+                <a:tc>
+                  <a:txBody>
+                    <a:bodyPr/>
+                    <a:lstStyle/>
+                    <a:p>
+                      <a:pPr algn="l" indent="0" marL="0">
+                        <a:buNone/>
+                      </a:pPr>
+                      <a:r>
+                        <a:rPr lang="en-US" sz="1200" dirty="0">
+                          <a:solidFill>
+                            <a:srgbClr val="1E2B22"/>
+                          </a:solidFill>
+                          <a:latin typeface="Microsoft JhengHei" pitchFamily="34" charset="0"/>
+                          <a:ea typeface="Microsoft JhengHei" pitchFamily="34" charset="-122"/>
+                          <a:cs typeface="Microsoft JhengHei" pitchFamily="34" charset="-120"/>
+                        </a:rPr>
+                        <a:t>3.9%（5/129）</a:t>
+                      </a:r>
+                      <a:endParaRPr lang="en-US" sz="1200" dirty="0">
+                        <a:latin typeface="Microsoft JhengHei" charset="0"/>
+                        <a:ea typeface="Microsoft JhengHei" charset="0"/>
+                        <a:cs typeface="Microsoft JhengHei" charset="0"/>
+                      </a:endParaRPr>
+                    </a:p>
+                  </a:txBody>
+                  <a:tcPr marL="73152" marR="73152" marT="18288" marB="18288" anchor="ctr">
+                    <a:lnL w="6350" cap="flat" cmpd="sng" algn="ctr">
+                      <a:solidFill>
+                        <a:srgbClr val="DDE5DF"/>
+                      </a:solidFill>
+                      <a:prstDash val="solid"/>
+                      <a:round/>
+                      <a:headEnd type="none" w="med" len="med"/>
+                      <a:tailEnd type="none" w="med" len="med"/>
+                    </a:lnL>
+                    <a:lnR w="6350" cap="flat" cmpd="sng" algn="ctr">
+                      <a:solidFill>
+                        <a:srgbClr val="DDE5DF"/>
+                      </a:solidFill>
+                      <a:prstDash val="solid"/>
+                      <a:round/>
+                      <a:headEnd type="none" w="med" len="med"/>
+                      <a:tailEnd type="none" w="med" len="med"/>
+                    </a:lnR>
+                    <a:lnT w="6350" cap="flat" cmpd="sng" algn="ctr">
+                      <a:solidFill>
+                        <a:srgbClr val="DDE5DF"/>
+                      </a:solidFill>
+                      <a:prstDash val="solid"/>
+                      <a:round/>
+                      <a:headEnd type="none" w="med" len="med"/>
+                      <a:tailEnd type="none" w="med" len="med"/>
+                    </a:lnT>
+                    <a:lnB w="6350" cap="flat" cmpd="sng" algn="ctr">
+                      <a:solidFill>
+                        <a:srgbClr val="DDE5DF"/>
+                      </a:solidFill>
+                      <a:prstDash val="solid"/>
+                      <a:round/>
+                      <a:headEnd type="none" w="med" len="med"/>
+                      <a:tailEnd type="none" w="med" len="med"/>
+                    </a:lnB>
+                    <a:solidFill>
+                      <a:srgbClr val="FFFFFF"/>
+                    </a:solidFill>
+                  </a:tcPr>
+                </a:tc>
+              </a:tr>
+              <a:tr h="329184">
+                <a:tc>
+                  <a:txBody>
+                    <a:bodyPr/>
+                    <a:lstStyle/>
+                    <a:p>
+                      <a:pPr algn="l" indent="0" marL="0">
+                        <a:buNone/>
+                      </a:pPr>
+                      <a:r>
+                        <a:rPr lang="en-US" sz="1200" dirty="0">
+                          <a:solidFill>
+                            <a:srgbClr val="1E2B22"/>
+                          </a:solidFill>
+                          <a:latin typeface="Microsoft JhengHei" pitchFamily="34" charset="0"/>
+                          <a:ea typeface="Microsoft JhengHei" pitchFamily="34" charset="-122"/>
+                          <a:cs typeface="Microsoft JhengHei" pitchFamily="34" charset="-120"/>
+                        </a:rPr>
+                        <a:t>頭嵙山層及其相當地層（PQc）</a:t>
+                      </a:r>
+                      <a:endParaRPr lang="en-US" sz="1200" dirty="0">
+                        <a:latin typeface="Microsoft JhengHei" charset="0"/>
+                        <a:ea typeface="Microsoft JhengHei" charset="0"/>
+                        <a:cs typeface="Microsoft JhengHei" charset="0"/>
+                      </a:endParaRPr>
+                    </a:p>
+                  </a:txBody>
+                  <a:tcPr marL="73152" marR="73152" marT="18288" marB="18288" anchor="ctr">
+                    <a:lnL w="6350" cap="flat" cmpd="sng" algn="ctr">
+                      <a:solidFill>
+                        <a:srgbClr val="DDE5DF"/>
+                      </a:solidFill>
+                      <a:prstDash val="solid"/>
+                      <a:round/>
+                      <a:headEnd type="none" w="med" len="med"/>
+                      <a:tailEnd type="none" w="med" len="med"/>
+                    </a:lnL>
+                    <a:lnR w="6350" cap="flat" cmpd="sng" algn="ctr">
+                      <a:solidFill>
+                        <a:srgbClr val="DDE5DF"/>
+                      </a:solidFill>
+                      <a:prstDash val="solid"/>
+                      <a:round/>
+                      <a:headEnd type="none" w="med" len="med"/>
+                      <a:tailEnd type="none" w="med" len="med"/>
+                    </a:lnR>
+                    <a:lnT w="6350" cap="flat" cmpd="sng" algn="ctr">
+                      <a:solidFill>
+                        <a:srgbClr val="DDE5DF"/>
+                      </a:solidFill>
+                      <a:prstDash val="solid"/>
+                      <a:round/>
+                      <a:headEnd type="none" w="med" len="med"/>
+                      <a:tailEnd type="none" w="med" len="med"/>
+                    </a:lnT>
+                    <a:lnB w="6350" cap="flat" cmpd="sng" algn="ctr">
+                      <a:solidFill>
+                        <a:srgbClr val="DDE5DF"/>
+                      </a:solidFill>
+                      <a:prstDash val="solid"/>
+                      <a:round/>
+                      <a:headEnd type="none" w="med" len="med"/>
+                      <a:tailEnd type="none" w="med" len="med"/>
+                    </a:lnB>
+                    <a:solidFill>
+                      <a:srgbClr val="FFFFFF"/>
+                    </a:solidFill>
+                  </a:tcPr>
+                </a:tc>
+                <a:tc>
+                  <a:txBody>
+                    <a:bodyPr/>
+                    <a:lstStyle/>
+                    <a:p>
+                      <a:pPr algn="l" indent="0" marL="0">
+                        <a:buNone/>
+                      </a:pPr>
+                      <a:r>
+                        <a:rPr lang="en-US" sz="1200" dirty="0">
+                          <a:solidFill>
+                            <a:srgbClr val="1E2B22"/>
+                          </a:solidFill>
+                          <a:latin typeface="Microsoft JhengHei" pitchFamily="34" charset="0"/>
+                          <a:ea typeface="Microsoft JhengHei" pitchFamily="34" charset="-122"/>
+                          <a:cs typeface="Microsoft JhengHei" pitchFamily="34" charset="-120"/>
+                        </a:rPr>
+                        <a:t>上新世－更新世</a:t>
+                      </a:r>
+                      <a:endParaRPr lang="en-US" sz="1200" dirty="0">
+                        <a:latin typeface="Microsoft JhengHei" charset="0"/>
+                        <a:ea typeface="Microsoft JhengHei" charset="0"/>
+                        <a:cs typeface="Microsoft JhengHei" charset="0"/>
+                      </a:endParaRPr>
+                    </a:p>
+                  </a:txBody>
+                  <a:tcPr marL="73152" marR="73152" marT="18288" marB="18288" anchor="ctr">
+                    <a:lnL w="6350" cap="flat" cmpd="sng" algn="ctr">
+                      <a:solidFill>
+                        <a:srgbClr val="DDE5DF"/>
+                      </a:solidFill>
+                      <a:prstDash val="solid"/>
+                      <a:round/>
+                      <a:headEnd type="none" w="med" len="med"/>
+                      <a:tailEnd type="none" w="med" len="med"/>
+                    </a:lnL>
+                    <a:lnR w="6350" cap="flat" cmpd="sng" algn="ctr">
+                      <a:solidFill>
+                        <a:srgbClr val="DDE5DF"/>
+                      </a:solidFill>
+                      <a:prstDash val="solid"/>
+                      <a:round/>
+                      <a:headEnd type="none" w="med" len="med"/>
+                      <a:tailEnd type="none" w="med" len="med"/>
+                    </a:lnR>
+                    <a:lnT w="6350" cap="flat" cmpd="sng" algn="ctr">
+                      <a:solidFill>
+                        <a:srgbClr val="DDE5DF"/>
+                      </a:solidFill>
+                      <a:prstDash val="solid"/>
+                      <a:round/>
+                      <a:headEnd type="none" w="med" len="med"/>
+                      <a:tailEnd type="none" w="med" len="med"/>
+                    </a:lnT>
+                    <a:lnB w="6350" cap="flat" cmpd="sng" algn="ctr">
+                      <a:solidFill>
+                        <a:srgbClr val="DDE5DF"/>
+                      </a:solidFill>
+                      <a:prstDash val="solid"/>
+                      <a:round/>
+                      <a:headEnd type="none" w="med" len="med"/>
+                      <a:tailEnd type="none" w="med" len="med"/>
+                    </a:lnB>
+                    <a:solidFill>
+                      <a:srgbClr val="FFFFFF"/>
+                    </a:solidFill>
+                  </a:tcPr>
+                </a:tc>
+                <a:tc>
+                  <a:txBody>
+                    <a:bodyPr/>
+                    <a:lstStyle/>
+                    <a:p>
+                      <a:pPr algn="l" indent="0" marL="0">
+                        <a:buNone/>
+                      </a:pPr>
+                      <a:r>
+                        <a:rPr lang="en-US" sz="1200" dirty="0">
+                          <a:solidFill>
+                            <a:srgbClr val="1E2B22"/>
+                          </a:solidFill>
+                          <a:latin typeface="Microsoft JhengHei" pitchFamily="34" charset="0"/>
+                          <a:ea typeface="Microsoft JhengHei" pitchFamily="34" charset="-122"/>
+                          <a:cs typeface="Microsoft JhengHei" pitchFamily="34" charset="-120"/>
+                        </a:rPr>
+                        <a:t>4.0</a:t>
+                      </a:r>
+                      <a:endParaRPr lang="en-US" sz="1200" dirty="0">
+                        <a:latin typeface="Microsoft JhengHei" charset="0"/>
+                        <a:ea typeface="Microsoft JhengHei" charset="0"/>
+                        <a:cs typeface="Microsoft JhengHei" charset="0"/>
+                      </a:endParaRPr>
+                    </a:p>
+                  </a:txBody>
+                  <a:tcPr marL="73152" marR="73152" marT="18288" marB="18288" anchor="ctr">
+                    <a:lnL w="6350" cap="flat" cmpd="sng" algn="ctr">
+                      <a:solidFill>
+                        <a:srgbClr val="DDE5DF"/>
+                      </a:solidFill>
+                      <a:prstDash val="solid"/>
+                      <a:round/>
+                      <a:headEnd type="none" w="med" len="med"/>
+                      <a:tailEnd type="none" w="med" len="med"/>
+                    </a:lnL>
+                    <a:lnR w="6350" cap="flat" cmpd="sng" algn="ctr">
+                      <a:solidFill>
+                        <a:srgbClr val="DDE5DF"/>
+                      </a:solidFill>
+                      <a:prstDash val="solid"/>
+                      <a:round/>
+                      <a:headEnd type="none" w="med" len="med"/>
+                      <a:tailEnd type="none" w="med" len="med"/>
+                    </a:lnR>
+                    <a:lnT w="6350" cap="flat" cmpd="sng" algn="ctr">
+                      <a:solidFill>
+                        <a:srgbClr val="DDE5DF"/>
+                      </a:solidFill>
+                      <a:prstDash val="solid"/>
+                      <a:round/>
+                      <a:headEnd type="none" w="med" len="med"/>
+                      <a:tailEnd type="none" w="med" len="med"/>
+                    </a:lnT>
+                    <a:lnB w="6350" cap="flat" cmpd="sng" algn="ctr">
+                      <a:solidFill>
+                        <a:srgbClr val="DDE5DF"/>
+                      </a:solidFill>
+                      <a:prstDash val="solid"/>
+                      <a:round/>
+                      <a:headEnd type="none" w="med" len="med"/>
+                      <a:tailEnd type="none" w="med" len="med"/>
+                    </a:lnB>
+                    <a:solidFill>
+                      <a:srgbClr val="FFFFFF"/>
+                    </a:solidFill>
+                  </a:tcPr>
+                </a:tc>
+                <a:tc>
+                  <a:txBody>
+                    <a:bodyPr/>
+                    <a:lstStyle/>
+                    <a:p>
+                      <a:pPr algn="l" indent="0" marL="0">
+                        <a:buNone/>
+                      </a:pPr>
+                      <a:r>
+                        <a:rPr lang="en-US" sz="1200" dirty="0">
+                          <a:solidFill>
+                            <a:srgbClr val="1E2B22"/>
+                          </a:solidFill>
+                          <a:latin typeface="Microsoft JhengHei" pitchFamily="34" charset="0"/>
+                          <a:ea typeface="Microsoft JhengHei" pitchFamily="34" charset="-122"/>
+                          <a:cs typeface="Microsoft JhengHei" pitchFamily="34" charset="-120"/>
+                        </a:rPr>
+                        <a:t>0</a:t>
+                      </a:r>
+                      <a:endParaRPr lang="en-US" sz="1200" dirty="0">
+                        <a:latin typeface="Microsoft JhengHei" charset="0"/>
+                        <a:ea typeface="Microsoft JhengHei" charset="0"/>
+                        <a:cs typeface="Microsoft JhengHei" charset="0"/>
+                      </a:endParaRPr>
+                    </a:p>
+                  </a:txBody>
+                  <a:tcPr marL="73152" marR="73152" marT="18288" marB="18288" anchor="ctr">
+                    <a:lnL w="6350" cap="flat" cmpd="sng" algn="ctr">
+                      <a:solidFill>
+                        <a:srgbClr val="DDE5DF"/>
+                      </a:solidFill>
+                      <a:prstDash val="solid"/>
+                      <a:round/>
+                      <a:headEnd type="none" w="med" len="med"/>
+                      <a:tailEnd type="none" w="med" len="med"/>
+                    </a:lnL>
+                    <a:lnR w="6350" cap="flat" cmpd="sng" algn="ctr">
+                      <a:solidFill>
+                        <a:srgbClr val="DDE5DF"/>
+                      </a:solidFill>
+                      <a:prstDash val="solid"/>
+                      <a:round/>
+                      <a:headEnd type="none" w="med" len="med"/>
+                      <a:tailEnd type="none" w="med" len="med"/>
+                    </a:lnR>
+                    <a:lnT w="6350" cap="flat" cmpd="sng" algn="ctr">
+                      <a:solidFill>
+                        <a:srgbClr val="DDE5DF"/>
+                      </a:solidFill>
+                      <a:prstDash val="solid"/>
+                      <a:round/>
+                      <a:headEnd type="none" w="med" len="med"/>
+                      <a:tailEnd type="none" w="med" len="med"/>
+                    </a:lnT>
+                    <a:lnB w="6350" cap="flat" cmpd="sng" algn="ctr">
+                      <a:solidFill>
+                        <a:srgbClr val="DDE5DF"/>
+                      </a:solidFill>
+                      <a:prstDash val="solid"/>
+                      <a:round/>
+                      <a:headEnd type="none" w="med" len="med"/>
+                      <a:tailEnd type="none" w="med" len="med"/>
+                    </a:lnB>
+                    <a:solidFill>
+                      <a:srgbClr val="FFFFFF"/>
+                    </a:solidFill>
+                  </a:tcPr>
+                </a:tc>
+                <a:tc>
+                  <a:txBody>
+                    <a:bodyPr/>
+                    <a:lstStyle/>
+                    <a:p>
+                      <a:pPr algn="l" indent="0" marL="0">
+                        <a:buNone/>
+                      </a:pPr>
+                      <a:r>
+                        <a:rPr lang="en-US" sz="1200" dirty="0">
+                          <a:solidFill>
+                            <a:srgbClr val="1E2B22"/>
+                          </a:solidFill>
+                          <a:latin typeface="Microsoft JhengHei" pitchFamily="34" charset="0"/>
+                          <a:ea typeface="Microsoft JhengHei" pitchFamily="34" charset="-122"/>
+                          <a:cs typeface="Microsoft JhengHei" pitchFamily="34" charset="-120"/>
+                        </a:rPr>
+                        <a:t>0.1%</a:t>
+                      </a:r>
+                      <a:endParaRPr lang="en-US" sz="1200" dirty="0">
+                        <a:latin typeface="Microsoft JhengHei" charset="0"/>
+                        <a:ea typeface="Microsoft JhengHei" charset="0"/>
+                        <a:cs typeface="Microsoft JhengHei" charset="0"/>
+                      </a:endParaRPr>
+                    </a:p>
+                  </a:txBody>
+                  <a:tcPr marL="73152" marR="73152" marT="18288" marB="18288" anchor="ctr">
+                    <a:lnL w="6350" cap="flat" cmpd="sng" algn="ctr">
+                      <a:solidFill>
+                        <a:srgbClr val="DDE5DF"/>
+                      </a:solidFill>
+                      <a:prstDash val="solid"/>
+                      <a:round/>
+                      <a:headEnd type="none" w="med" len="med"/>
+                      <a:tailEnd type="none" w="med" len="med"/>
+                    </a:lnL>
+                    <a:lnR w="6350" cap="flat" cmpd="sng" algn="ctr">
+                      <a:solidFill>
+                        <a:srgbClr val="DDE5DF"/>
+                      </a:solidFill>
+                      <a:prstDash val="solid"/>
+                      <a:round/>
+                      <a:headEnd type="none" w="med" len="med"/>
+                      <a:tailEnd type="none" w="med" len="med"/>
+                    </a:lnR>
+                    <a:lnT w="6350" cap="flat" cmpd="sng" algn="ctr">
+                      <a:solidFill>
+                        <a:srgbClr val="DDE5DF"/>
+                      </a:solidFill>
+                      <a:prstDash val="solid"/>
+                      <a:round/>
+                      <a:headEnd type="none" w="med" len="med"/>
+                      <a:tailEnd type="none" w="med" len="med"/>
+                    </a:lnT>
+                    <a:lnB w="6350" cap="flat" cmpd="sng" algn="ctr">
+                      <a:solidFill>
+                        <a:srgbClr val="DDE5DF"/>
+                      </a:solidFill>
+                      <a:prstDash val="solid"/>
+                      <a:round/>
+                      <a:headEnd type="none" w="med" len="med"/>
+                      <a:tailEnd type="none" w="med" len="med"/>
+                    </a:lnB>
+                    <a:solidFill>
+                      <a:srgbClr val="FFFFFF"/>
+                    </a:solidFill>
+                  </a:tcPr>
+                </a:tc>
+                <a:tc>
+                  <a:txBody>
+                    <a:bodyPr/>
+                    <a:lstStyle/>
+                    <a:p>
+                      <a:pPr algn="l" indent="0" marL="0">
+                        <a:buNone/>
+                      </a:pPr>
+                      <a:r>
+                        <a:rPr lang="en-US" sz="1200" dirty="0">
+                          <a:solidFill>
+                            <a:srgbClr val="5E6B63"/>
+                          </a:solidFill>
+                          <a:latin typeface="Microsoft JhengHei" pitchFamily="34" charset="0"/>
+                          <a:ea typeface="Microsoft JhengHei" pitchFamily="34" charset="-122"/>
+                          <a:cs typeface="Microsoft JhengHei" pitchFamily="34" charset="-120"/>
+                        </a:rPr>
+                        <a:t>0.01</a:t>
+                      </a:r>
+                      <a:endParaRPr lang="en-US" sz="1200" dirty="0">
+                        <a:latin typeface="Microsoft JhengHei" charset="0"/>
+                        <a:ea typeface="Microsoft JhengHei" charset="0"/>
+                        <a:cs typeface="Microsoft JhengHei" charset="0"/>
+                      </a:endParaRPr>
+                    </a:p>
+                  </a:txBody>
+                  <a:tcPr marL="73152" marR="73152" marT="18288" marB="18288" anchor="ctr">
+                    <a:lnL w="6350" cap="flat" cmpd="sng" algn="ctr">
+                      <a:solidFill>
+                        <a:srgbClr val="DDE5DF"/>
+                      </a:solidFill>
+                      <a:prstDash val="solid"/>
+                      <a:round/>
+                      <a:headEnd type="none" w="med" len="med"/>
+                      <a:tailEnd type="none" w="med" len="med"/>
+                    </a:lnL>
+                    <a:lnR w="6350" cap="flat" cmpd="sng" algn="ctr">
+                      <a:solidFill>
+                        <a:srgbClr val="DDE5DF"/>
+                      </a:solidFill>
+                      <a:prstDash val="solid"/>
+                      <a:round/>
+                      <a:headEnd type="none" w="med" len="med"/>
+                      <a:tailEnd type="none" w="med" len="med"/>
+                    </a:lnR>
+                    <a:lnT w="6350" cap="flat" cmpd="sng" algn="ctr">
+                      <a:solidFill>
+                        <a:srgbClr val="DDE5DF"/>
+                      </a:solidFill>
+                      <a:prstDash val="solid"/>
+                      <a:round/>
+                      <a:headEnd type="none" w="med" len="med"/>
+                      <a:tailEnd type="none" w="med" len="med"/>
+                    </a:lnT>
+                    <a:lnB w="6350" cap="flat" cmpd="sng" algn="ctr">
+                      <a:solidFill>
+                        <a:srgbClr val="DDE5DF"/>
+                      </a:solidFill>
+                      <a:prstDash val="solid"/>
+                      <a:round/>
+                      <a:headEnd type="none" w="med" len="med"/>
+                      <a:tailEnd type="none" w="med" len="med"/>
+                    </a:lnB>
+                    <a:solidFill>
+                      <a:srgbClr val="FFFFFF"/>
+                    </a:solidFill>
+                  </a:tcPr>
+                </a:tc>
+                <a:tc>
+                  <a:txBody>
+                    <a:bodyPr/>
+                    <a:lstStyle/>
+                    <a:p>
+                      <a:pPr algn="l" indent="0" marL="0">
+                        <a:buNone/>
+                      </a:pPr>
+                      <a:r>
+                        <a:rPr lang="en-US" sz="1200" dirty="0">
+                          <a:solidFill>
+                            <a:srgbClr val="1E2B22"/>
+                          </a:solidFill>
+                          <a:latin typeface="Microsoft JhengHei" pitchFamily="34" charset="0"/>
+                          <a:ea typeface="Microsoft JhengHei" pitchFamily="34" charset="-122"/>
+                          <a:cs typeface="Microsoft JhengHei" pitchFamily="34" charset="-120"/>
+                        </a:rPr>
+                        <a:t>0.0%（0/37）</a:t>
+                      </a:r>
+                      <a:endParaRPr lang="en-US" sz="1200" dirty="0">
+                        <a:latin typeface="Microsoft JhengHei" charset="0"/>
+                        <a:ea typeface="Microsoft JhengHei" charset="0"/>
+                        <a:cs typeface="Microsoft JhengHei" charset="0"/>
+                      </a:endParaRPr>
+                    </a:p>
+                  </a:txBody>
+                  <a:tcPr marL="73152" marR="73152" marT="18288" marB="18288" anchor="ctr">
+                    <a:lnL w="6350" cap="flat" cmpd="sng" algn="ctr">
+                      <a:solidFill>
+                        <a:srgbClr val="DDE5DF"/>
+                      </a:solidFill>
+                      <a:prstDash val="solid"/>
+                      <a:round/>
+                      <a:headEnd type="none" w="med" len="med"/>
+                      <a:tailEnd type="none" w="med" len="med"/>
+                    </a:lnL>
+                    <a:lnR w="6350" cap="flat" cmpd="sng" algn="ctr">
+                      <a:solidFill>
+                        <a:srgbClr val="DDE5DF"/>
+                      </a:solidFill>
+                      <a:prstDash val="solid"/>
+                      <a:round/>
+                      <a:headEnd type="none" w="med" len="med"/>
+                      <a:tailEnd type="none" w="med" len="med"/>
+                    </a:lnR>
+                    <a:lnT w="6350" cap="flat" cmpd="sng" algn="ctr">
+                      <a:solidFill>
+                        <a:srgbClr val="DDE5DF"/>
+                      </a:solidFill>
+                      <a:prstDash val="solid"/>
+                      <a:round/>
+                      <a:headEnd type="none" w="med" len="med"/>
+                      <a:tailEnd type="none" w="med" len="med"/>
+                    </a:lnT>
+                    <a:lnB w="6350" cap="flat" cmpd="sng" algn="ctr">
+                      <a:solidFill>
+                        <a:srgbClr val="DDE5DF"/>
+                      </a:solidFill>
+                      <a:prstDash val="solid"/>
+                      <a:round/>
+                      <a:headEnd type="none" w="med" len="med"/>
+                      <a:tailEnd type="none" w="med" len="med"/>
+                    </a:lnB>
+                    <a:solidFill>
+                      <a:srgbClr val="FFFFFF"/>
+                    </a:solidFill>
+                  </a:tcPr>
+                </a:tc>
+              </a:tr>
+              <a:tr h="329184">
+                <a:tc>
+                  <a:txBody>
+                    <a:bodyPr/>
+                    <a:lstStyle/>
+                    <a:p>
+                      <a:pPr algn="l" indent="0" marL="0">
+                        <a:buNone/>
+                      </a:pPr>
+                      <a:r>
+                        <a:rPr lang="en-US" sz="1200" dirty="0">
+                          <a:solidFill>
+                            <a:srgbClr val="1E2B22"/>
+                          </a:solidFill>
+                          <a:latin typeface="Microsoft JhengHei" pitchFamily="34" charset="0"/>
+                          <a:ea typeface="Microsoft JhengHei" pitchFamily="34" charset="-122"/>
+                          <a:cs typeface="Microsoft JhengHei" pitchFamily="34" charset="-120"/>
+                        </a:rPr>
+                        <a:t>廬山層（v）</a:t>
+                      </a:r>
+                      <a:endParaRPr lang="en-US" sz="1200" dirty="0">
+                        <a:latin typeface="Microsoft JhengHei" charset="0"/>
+                        <a:ea typeface="Microsoft JhengHei" charset="0"/>
+                        <a:cs typeface="Microsoft JhengHei" charset="0"/>
+                      </a:endParaRPr>
+                    </a:p>
+                  </a:txBody>
+                  <a:tcPr marL="73152" marR="73152" marT="18288" marB="18288" anchor="ctr">
+                    <a:lnL w="6350" cap="flat" cmpd="sng" algn="ctr">
+                      <a:solidFill>
+                        <a:srgbClr val="DDE5DF"/>
+                      </a:solidFill>
+                      <a:prstDash val="solid"/>
+                      <a:round/>
+                      <a:headEnd type="none" w="med" len="med"/>
+                      <a:tailEnd type="none" w="med" len="med"/>
+                    </a:lnL>
+                    <a:lnR w="6350" cap="flat" cmpd="sng" algn="ctr">
+                      <a:solidFill>
+                        <a:srgbClr val="DDE5DF"/>
+                      </a:solidFill>
+                      <a:prstDash val="solid"/>
+                      <a:round/>
+                      <a:headEnd type="none" w="med" len="med"/>
+                      <a:tailEnd type="none" w="med" len="med"/>
+                    </a:lnR>
+                    <a:lnT w="6350" cap="flat" cmpd="sng" algn="ctr">
+                      <a:solidFill>
+                        <a:srgbClr val="DDE5DF"/>
+                      </a:solidFill>
+                      <a:prstDash val="solid"/>
+                      <a:round/>
+                      <a:headEnd type="none" w="med" len="med"/>
+                      <a:tailEnd type="none" w="med" len="med"/>
+                    </a:lnT>
+                    <a:lnB w="6350" cap="flat" cmpd="sng" algn="ctr">
+                      <a:solidFill>
+                        <a:srgbClr val="DDE5DF"/>
+                      </a:solidFill>
+                      <a:prstDash val="solid"/>
+                      <a:round/>
+                      <a:headEnd type="none" w="med" len="med"/>
+                      <a:tailEnd type="none" w="med" len="med"/>
+                    </a:lnB>
+                    <a:solidFill>
+                      <a:srgbClr val="FFFFFF"/>
+                    </a:solidFill>
+                  </a:tcPr>
+                </a:tc>
+                <a:tc>
+                  <a:txBody>
+                    <a:bodyPr/>
+                    <a:lstStyle/>
+                    <a:p>
+                      <a:pPr algn="l" indent="0" marL="0">
+                        <a:buNone/>
+                      </a:pPr>
+                      <a:r>
+                        <a:rPr lang="en-US" sz="1200" dirty="0">
+                          <a:solidFill>
+                            <a:srgbClr val="1E2B22"/>
+                          </a:solidFill>
+                          <a:latin typeface="Microsoft JhengHei" pitchFamily="34" charset="0"/>
+                          <a:ea typeface="Microsoft JhengHei" pitchFamily="34" charset="-122"/>
+                          <a:cs typeface="Microsoft JhengHei" pitchFamily="34" charset="-120"/>
+                        </a:rPr>
+                        <a:t>中新世</a:t>
+                      </a:r>
+                      <a:endParaRPr lang="en-US" sz="1200" dirty="0">
+                        <a:latin typeface="Microsoft JhengHei" charset="0"/>
+                        <a:ea typeface="Microsoft JhengHei" charset="0"/>
+                        <a:cs typeface="Microsoft JhengHei" charset="0"/>
+                      </a:endParaRPr>
+                    </a:p>
+                  </a:txBody>
+                  <a:tcPr marL="73152" marR="73152" marT="18288" marB="18288" anchor="ctr">
+                    <a:lnL w="6350" cap="flat" cmpd="sng" algn="ctr">
+                      <a:solidFill>
+                        <a:srgbClr val="DDE5DF"/>
+                      </a:solidFill>
+                      <a:prstDash val="solid"/>
+                      <a:round/>
+                      <a:headEnd type="none" w="med" len="med"/>
+                      <a:tailEnd type="none" w="med" len="med"/>
+                    </a:lnL>
+                    <a:lnR w="6350" cap="flat" cmpd="sng" algn="ctr">
+                      <a:solidFill>
+                        <a:srgbClr val="DDE5DF"/>
+                      </a:solidFill>
+                      <a:prstDash val="solid"/>
+                      <a:round/>
+                      <a:headEnd type="none" w="med" len="med"/>
+                      <a:tailEnd type="none" w="med" len="med"/>
+                    </a:lnR>
+                    <a:lnT w="6350" cap="flat" cmpd="sng" algn="ctr">
+                      <a:solidFill>
+                        <a:srgbClr val="DDE5DF"/>
+                      </a:solidFill>
+                      <a:prstDash val="solid"/>
+                      <a:round/>
+                      <a:headEnd type="none" w="med" len="med"/>
+                      <a:tailEnd type="none" w="med" len="med"/>
+                    </a:lnT>
+                    <a:lnB w="6350" cap="flat" cmpd="sng" algn="ctr">
+                      <a:solidFill>
+                        <a:srgbClr val="DDE5DF"/>
+                      </a:solidFill>
+                      <a:prstDash val="solid"/>
+                      <a:round/>
+                      <a:headEnd type="none" w="med" len="med"/>
+                      <a:tailEnd type="none" w="med" len="med"/>
+                    </a:lnB>
+                    <a:solidFill>
+                      <a:srgbClr val="FFFFFF"/>
+                    </a:solidFill>
+                  </a:tcPr>
+                </a:tc>
+                <a:tc>
+                  <a:txBody>
+                    <a:bodyPr/>
+                    <a:lstStyle/>
+                    <a:p>
+                      <a:pPr algn="l" indent="0" marL="0">
+                        <a:buNone/>
+                      </a:pPr>
+                      <a:r>
+                        <a:rPr lang="en-US" sz="1200" dirty="0">
+                          <a:solidFill>
+                            <a:srgbClr val="1E2B22"/>
+                          </a:solidFill>
+                          <a:latin typeface="Microsoft JhengHei" pitchFamily="34" charset="0"/>
+                          <a:ea typeface="Microsoft JhengHei" pitchFamily="34" charset="-122"/>
+                          <a:cs typeface="Microsoft JhengHei" pitchFamily="34" charset="-120"/>
+                        </a:rPr>
+                        <a:t>3.1</a:t>
+                      </a:r>
+                      <a:endParaRPr lang="en-US" sz="1200" dirty="0">
+                        <a:latin typeface="Microsoft JhengHei" charset="0"/>
+                        <a:ea typeface="Microsoft JhengHei" charset="0"/>
+                        <a:cs typeface="Microsoft JhengHei" charset="0"/>
+                      </a:endParaRPr>
+                    </a:p>
+                  </a:txBody>
+                  <a:tcPr marL="73152" marR="73152" marT="18288" marB="18288" anchor="ctr">
+                    <a:lnL w="6350" cap="flat" cmpd="sng" algn="ctr">
+                      <a:solidFill>
+                        <a:srgbClr val="DDE5DF"/>
+                      </a:solidFill>
+                      <a:prstDash val="solid"/>
+                      <a:round/>
+                      <a:headEnd type="none" w="med" len="med"/>
+                      <a:tailEnd type="none" w="med" len="med"/>
+                    </a:lnL>
+                    <a:lnR w="6350" cap="flat" cmpd="sng" algn="ctr">
+                      <a:solidFill>
+                        <a:srgbClr val="DDE5DF"/>
+                      </a:solidFill>
+                      <a:prstDash val="solid"/>
+                      <a:round/>
+                      <a:headEnd type="none" w="med" len="med"/>
+                      <a:tailEnd type="none" w="med" len="med"/>
+                    </a:lnR>
+                    <a:lnT w="6350" cap="flat" cmpd="sng" algn="ctr">
+                      <a:solidFill>
+                        <a:srgbClr val="DDE5DF"/>
+                      </a:solidFill>
+                      <a:prstDash val="solid"/>
+                      <a:round/>
+                      <a:headEnd type="none" w="med" len="med"/>
+                      <a:tailEnd type="none" w="med" len="med"/>
+                    </a:lnT>
+                    <a:lnB w="6350" cap="flat" cmpd="sng" algn="ctr">
+                      <a:solidFill>
+                        <a:srgbClr val="DDE5DF"/>
+                      </a:solidFill>
+                      <a:prstDash val="solid"/>
+                      <a:round/>
+                      <a:headEnd type="none" w="med" len="med"/>
+                      <a:tailEnd type="none" w="med" len="med"/>
+                    </a:lnB>
+                    <a:solidFill>
+                      <a:srgbClr val="FFFFFF"/>
+                    </a:solidFill>
+                  </a:tcPr>
+                </a:tc>
+                <a:tc>
+                  <a:txBody>
+                    <a:bodyPr/>
+                    <a:lstStyle/>
+                    <a:p>
+                      <a:pPr algn="l" indent="0" marL="0">
+                        <a:buNone/>
+                      </a:pPr>
+                      <a:r>
+                        <a:rPr lang="en-US" sz="1200" dirty="0">
+                          <a:solidFill>
+                            <a:srgbClr val="1E2B22"/>
+                          </a:solidFill>
+                          <a:latin typeface="Microsoft JhengHei" pitchFamily="34" charset="0"/>
+                          <a:ea typeface="Microsoft JhengHei" pitchFamily="34" charset="-122"/>
+                          <a:cs typeface="Microsoft JhengHei" pitchFamily="34" charset="-120"/>
+                        </a:rPr>
+                        <a:t>15</a:t>
+                      </a:r>
+                      <a:endParaRPr lang="en-US" sz="1200" dirty="0">
+                        <a:latin typeface="Microsoft JhengHei" charset="0"/>
+                        <a:ea typeface="Microsoft JhengHei" charset="0"/>
+                        <a:cs typeface="Microsoft JhengHei" charset="0"/>
+                      </a:endParaRPr>
+                    </a:p>
+                  </a:txBody>
+                  <a:tcPr marL="73152" marR="73152" marT="18288" marB="18288" anchor="ctr">
+                    <a:lnL w="6350" cap="flat" cmpd="sng" algn="ctr">
+                      <a:solidFill>
+                        <a:srgbClr val="DDE5DF"/>
+                      </a:solidFill>
+                      <a:prstDash val="solid"/>
+                      <a:round/>
+                      <a:headEnd type="none" w="med" len="med"/>
+                      <a:tailEnd type="none" w="med" len="med"/>
+                    </a:lnL>
+                    <a:lnR w="6350" cap="flat" cmpd="sng" algn="ctr">
+                      <a:solidFill>
+                        <a:srgbClr val="DDE5DF"/>
+                      </a:solidFill>
+                      <a:prstDash val="solid"/>
+                      <a:round/>
+                      <a:headEnd type="none" w="med" len="med"/>
+                      <a:tailEnd type="none" w="med" len="med"/>
+                    </a:lnR>
+                    <a:lnT w="6350" cap="flat" cmpd="sng" algn="ctr">
+                      <a:solidFill>
+                        <a:srgbClr val="DDE5DF"/>
+                      </a:solidFill>
+                      <a:prstDash val="solid"/>
+                      <a:round/>
+                      <a:headEnd type="none" w="med" len="med"/>
+                      <a:tailEnd type="none" w="med" len="med"/>
+                    </a:lnT>
+                    <a:lnB w="6350" cap="flat" cmpd="sng" algn="ctr">
+                      <a:solidFill>
+                        <a:srgbClr val="DDE5DF"/>
+                      </a:solidFill>
+                      <a:prstDash val="solid"/>
+                      <a:round/>
+                      <a:headEnd type="none" w="med" len="med"/>
+                      <a:tailEnd type="none" w="med" len="med"/>
+                    </a:lnB>
+                    <a:solidFill>
+                      <a:srgbClr val="FFFFFF"/>
+                    </a:solidFill>
+                  </a:tcPr>
+                </a:tc>
+                <a:tc>
+                  <a:txBody>
+                    <a:bodyPr/>
+                    <a:lstStyle/>
+                    <a:p>
+                      <a:pPr algn="l" indent="0" marL="0">
+                        <a:buNone/>
+                      </a:pPr>
+                      <a:r>
+                        <a:rPr lang="en-US" sz="1200" dirty="0">
+                          <a:solidFill>
+                            <a:srgbClr val="1E2B22"/>
+                          </a:solidFill>
+                          <a:latin typeface="Microsoft JhengHei" pitchFamily="34" charset="0"/>
+                          <a:ea typeface="Microsoft JhengHei" pitchFamily="34" charset="-122"/>
+                          <a:cs typeface="Microsoft JhengHei" pitchFamily="34" charset="-120"/>
+                        </a:rPr>
+                        <a:t>4.9%</a:t>
+                      </a:r>
+                      <a:endParaRPr lang="en-US" sz="1200" dirty="0">
+                        <a:latin typeface="Microsoft JhengHei" charset="0"/>
+                        <a:ea typeface="Microsoft JhengHei" charset="0"/>
+                        <a:cs typeface="Microsoft JhengHei" charset="0"/>
+                      </a:endParaRPr>
+                    </a:p>
+                  </a:txBody>
+                  <a:tcPr marL="73152" marR="73152" marT="18288" marB="18288" anchor="ctr">
+                    <a:lnL w="6350" cap="flat" cmpd="sng" algn="ctr">
+                      <a:solidFill>
+                        <a:srgbClr val="DDE5DF"/>
+                      </a:solidFill>
+                      <a:prstDash val="solid"/>
+                      <a:round/>
+                      <a:headEnd type="none" w="med" len="med"/>
+                      <a:tailEnd type="none" w="med" len="med"/>
+                    </a:lnL>
+                    <a:lnR w="6350" cap="flat" cmpd="sng" algn="ctr">
+                      <a:solidFill>
+                        <a:srgbClr val="DDE5DF"/>
+                      </a:solidFill>
+                      <a:prstDash val="solid"/>
+                      <a:round/>
+                      <a:headEnd type="none" w="med" len="med"/>
+                      <a:tailEnd type="none" w="med" len="med"/>
+                    </a:lnR>
+                    <a:lnT w="6350" cap="flat" cmpd="sng" algn="ctr">
+                      <a:solidFill>
+                        <a:srgbClr val="DDE5DF"/>
+                      </a:solidFill>
+                      <a:prstDash val="solid"/>
+                      <a:round/>
+                      <a:headEnd type="none" w="med" len="med"/>
+                      <a:tailEnd type="none" w="med" len="med"/>
+                    </a:lnT>
+                    <a:lnB w="6350" cap="flat" cmpd="sng" algn="ctr">
+                      <a:solidFill>
+                        <a:srgbClr val="DDE5DF"/>
+                      </a:solidFill>
+                      <a:prstDash val="solid"/>
+                      <a:round/>
+                      <a:headEnd type="none" w="med" len="med"/>
+                      <a:tailEnd type="none" w="med" len="med"/>
+                    </a:lnB>
+                    <a:solidFill>
+                      <a:srgbClr val="FFFFFF"/>
+                    </a:solidFill>
+                  </a:tcPr>
+                </a:tc>
+                <a:tc>
+                  <a:txBody>
+                    <a:bodyPr/>
+                    <a:lstStyle/>
+                    <a:p>
+                      <a:pPr algn="l" indent="0" marL="0">
+                        <a:buNone/>
+                      </a:pPr>
+                      <a:r>
+                        <a:rPr lang="en-US" sz="1200" dirty="0">
+                          <a:solidFill>
+                            <a:srgbClr val="1E2B22"/>
+                          </a:solidFill>
+                          <a:latin typeface="Microsoft JhengHei" pitchFamily="34" charset="0"/>
+                          <a:ea typeface="Microsoft JhengHei" pitchFamily="34" charset="-122"/>
+                          <a:cs typeface="Microsoft JhengHei" pitchFamily="34" charset="-120"/>
+                        </a:rPr>
+                        <a:t>0.92</a:t>
+                      </a:r>
+                      <a:endParaRPr lang="en-US" sz="1200" dirty="0">
+                        <a:latin typeface="Microsoft JhengHei" charset="0"/>
+                        <a:ea typeface="Microsoft JhengHei" charset="0"/>
+                        <a:cs typeface="Microsoft JhengHei" charset="0"/>
+                      </a:endParaRPr>
+                    </a:p>
+                  </a:txBody>
+                  <a:tcPr marL="73152" marR="73152" marT="18288" marB="18288" anchor="ctr">
+                    <a:lnL w="6350" cap="flat" cmpd="sng" algn="ctr">
+                      <a:solidFill>
+                        <a:srgbClr val="DDE5DF"/>
+                      </a:solidFill>
+                      <a:prstDash val="solid"/>
+                      <a:round/>
+                      <a:headEnd type="none" w="med" len="med"/>
+                      <a:tailEnd type="none" w="med" len="med"/>
+                    </a:lnL>
+                    <a:lnR w="6350" cap="flat" cmpd="sng" algn="ctr">
+                      <a:solidFill>
+                        <a:srgbClr val="DDE5DF"/>
+                      </a:solidFill>
+                      <a:prstDash val="solid"/>
+                      <a:round/>
+                      <a:headEnd type="none" w="med" len="med"/>
+                      <a:tailEnd type="none" w="med" len="med"/>
+                    </a:lnR>
+                    <a:lnT w="6350" cap="flat" cmpd="sng" algn="ctr">
+                      <a:solidFill>
+                        <a:srgbClr val="DDE5DF"/>
+                      </a:solidFill>
+                      <a:prstDash val="solid"/>
+                      <a:round/>
+                      <a:headEnd type="none" w="med" len="med"/>
+                      <a:tailEnd type="none" w="med" len="med"/>
+                    </a:lnT>
+                    <a:lnB w="6350" cap="flat" cmpd="sng" algn="ctr">
+                      <a:solidFill>
+                        <a:srgbClr val="DDE5DF"/>
+                      </a:solidFill>
+                      <a:prstDash val="solid"/>
+                      <a:round/>
+                      <a:headEnd type="none" w="med" len="med"/>
+                      <a:tailEnd type="none" w="med" len="med"/>
+                    </a:lnB>
+                    <a:solidFill>
+                      <a:srgbClr val="FFFFFF"/>
+                    </a:solidFill>
+                  </a:tcPr>
+                </a:tc>
+                <a:tc>
+                  <a:txBody>
+                    <a:bodyPr/>
+                    <a:lstStyle/>
+                    <a:p>
+                      <a:pPr algn="l" indent="0" marL="0">
+                        <a:buNone/>
+                      </a:pPr>
+                      <a:r>
+                        <a:rPr lang="en-US" sz="1200" dirty="0">
+                          <a:solidFill>
+                            <a:srgbClr val="1E2B22"/>
+                          </a:solidFill>
+                          <a:latin typeface="Microsoft JhengHei" pitchFamily="34" charset="0"/>
+                          <a:ea typeface="Microsoft JhengHei" pitchFamily="34" charset="-122"/>
+                          <a:cs typeface="Microsoft JhengHei" pitchFamily="34" charset="-120"/>
+                        </a:rPr>
+                        <a:t>0.0%（0/27）</a:t>
+                      </a:r>
+                      <a:endParaRPr lang="en-US" sz="1200" dirty="0">
+                        <a:latin typeface="Microsoft JhengHei" charset="0"/>
+                        <a:ea typeface="Microsoft JhengHei" charset="0"/>
+                        <a:cs typeface="Microsoft JhengHei" charset="0"/>
+                      </a:endParaRPr>
+                    </a:p>
+                  </a:txBody>
+                  <a:tcPr marL="73152" marR="73152" marT="18288" marB="18288" anchor="ctr">
+                    <a:lnL w="6350" cap="flat" cmpd="sng" algn="ctr">
+                      <a:solidFill>
+                        <a:srgbClr val="DDE5DF"/>
+                      </a:solidFill>
+                      <a:prstDash val="solid"/>
+                      <a:round/>
+                      <a:headEnd type="none" w="med" len="med"/>
+                      <a:tailEnd type="none" w="med" len="med"/>
+                    </a:lnL>
+                    <a:lnR w="6350" cap="flat" cmpd="sng" algn="ctr">
+                      <a:solidFill>
+                        <a:srgbClr val="DDE5DF"/>
+                      </a:solidFill>
+                      <a:prstDash val="solid"/>
+                      <a:round/>
+                      <a:headEnd type="none" w="med" len="med"/>
+                      <a:tailEnd type="none" w="med" len="med"/>
+                    </a:lnR>
+                    <a:lnT w="6350" cap="flat" cmpd="sng" algn="ctr">
+                      <a:solidFill>
+                        <a:srgbClr val="DDE5DF"/>
+                      </a:solidFill>
+                      <a:prstDash val="solid"/>
+                      <a:round/>
+                      <a:headEnd type="none" w="med" len="med"/>
+                      <a:tailEnd type="none" w="med" len="med"/>
+                    </a:lnT>
+                    <a:lnB w="6350" cap="flat" cmpd="sng" algn="ctr">
+                      <a:solidFill>
+                        <a:srgbClr val="DDE5DF"/>
+                      </a:solidFill>
+                      <a:prstDash val="solid"/>
+                      <a:round/>
+                      <a:headEnd type="none" w="med" len="med"/>
+                      <a:tailEnd type="none" w="med" len="med"/>
+                    </a:lnB>
+                    <a:solidFill>
+                      <a:srgbClr val="FFFFFF"/>
+                    </a:solidFill>
+                  </a:tcPr>
+                </a:tc>
+              </a:tr>
+              <a:tr h="329184">
+                <a:tc>
+                  <a:txBody>
+                    <a:bodyPr/>
+                    <a:lstStyle/>
+                    <a:p>
+                      <a:pPr algn="l" indent="0" marL="0">
+                        <a:buNone/>
+                      </a:pPr>
+                      <a:r>
+                        <a:rPr lang="en-US" sz="1200" dirty="0">
+                          <a:solidFill>
+                            <a:srgbClr val="1E2B22"/>
+                          </a:solidFill>
+                          <a:latin typeface="Microsoft JhengHei" pitchFamily="34" charset="0"/>
+                          <a:ea typeface="Microsoft JhengHei" pitchFamily="34" charset="-122"/>
+                          <a:cs typeface="Microsoft JhengHei" pitchFamily="34" charset="-120"/>
+                        </a:rPr>
+                        <a:t>沖積層（Q6）</a:t>
+                      </a:r>
+                      <a:endParaRPr lang="en-US" sz="1200" dirty="0">
+                        <a:latin typeface="Microsoft JhengHei" charset="0"/>
+                        <a:ea typeface="Microsoft JhengHei" charset="0"/>
+                        <a:cs typeface="Microsoft JhengHei" charset="0"/>
+                      </a:endParaRPr>
+                    </a:p>
+                  </a:txBody>
+                  <a:tcPr marL="73152" marR="73152" marT="18288" marB="18288" anchor="ctr">
+                    <a:lnL w="6350" cap="flat" cmpd="sng" algn="ctr">
+                      <a:solidFill>
+                        <a:srgbClr val="DDE5DF"/>
+                      </a:solidFill>
+                      <a:prstDash val="solid"/>
+                      <a:round/>
+                      <a:headEnd type="none" w="med" len="med"/>
+                      <a:tailEnd type="none" w="med" len="med"/>
+                    </a:lnL>
+                    <a:lnR w="6350" cap="flat" cmpd="sng" algn="ctr">
+                      <a:solidFill>
+                        <a:srgbClr val="DDE5DF"/>
+                      </a:solidFill>
+                      <a:prstDash val="solid"/>
+                      <a:round/>
+                      <a:headEnd type="none" w="med" len="med"/>
+                      <a:tailEnd type="none" w="med" len="med"/>
+                    </a:lnR>
+                    <a:lnT w="6350" cap="flat" cmpd="sng" algn="ctr">
+                      <a:solidFill>
+                        <a:srgbClr val="DDE5DF"/>
+                      </a:solidFill>
+                      <a:prstDash val="solid"/>
+                      <a:round/>
+                      <a:headEnd type="none" w="med" len="med"/>
+                      <a:tailEnd type="none" w="med" len="med"/>
+                    </a:lnT>
+                    <a:lnB w="6350" cap="flat" cmpd="sng" algn="ctr">
+                      <a:solidFill>
+                        <a:srgbClr val="DDE5DF"/>
+                      </a:solidFill>
+                      <a:prstDash val="solid"/>
+                      <a:round/>
+                      <a:headEnd type="none" w="med" len="med"/>
+                      <a:tailEnd type="none" w="med" len="med"/>
+                    </a:lnB>
+                    <a:solidFill>
+                      <a:srgbClr val="FFFFFF"/>
+                    </a:solidFill>
+                  </a:tcPr>
+                </a:tc>
+                <a:tc>
+                  <a:txBody>
+                    <a:bodyPr/>
+                    <a:lstStyle/>
+                    <a:p>
+                      <a:pPr algn="l" indent="0" marL="0">
+                        <a:buNone/>
+                      </a:pPr>
+                      <a:r>
+                        <a:rPr lang="en-US" sz="1200" dirty="0">
+                          <a:solidFill>
+                            <a:srgbClr val="1E2B22"/>
+                          </a:solidFill>
+                          <a:latin typeface="Microsoft JhengHei" pitchFamily="34" charset="0"/>
+                          <a:ea typeface="Microsoft JhengHei" pitchFamily="34" charset="-122"/>
+                          <a:cs typeface="Microsoft JhengHei" pitchFamily="34" charset="-120"/>
+                        </a:rPr>
+                        <a:t>現代</a:t>
+                      </a:r>
+                      <a:endParaRPr lang="en-US" sz="1200" dirty="0">
+                        <a:latin typeface="Microsoft JhengHei" charset="0"/>
+                        <a:ea typeface="Microsoft JhengHei" charset="0"/>
+                        <a:cs typeface="Microsoft JhengHei" charset="0"/>
+                      </a:endParaRPr>
+                    </a:p>
+                  </a:txBody>
+                  <a:tcPr marL="73152" marR="73152" marT="18288" marB="18288" anchor="ctr">
+                    <a:lnL w="6350" cap="flat" cmpd="sng" algn="ctr">
+                      <a:solidFill>
+                        <a:srgbClr val="DDE5DF"/>
+                      </a:solidFill>
+                      <a:prstDash val="solid"/>
+                      <a:round/>
+                      <a:headEnd type="none" w="med" len="med"/>
+                      <a:tailEnd type="none" w="med" len="med"/>
+                    </a:lnL>
+                    <a:lnR w="6350" cap="flat" cmpd="sng" algn="ctr">
+                      <a:solidFill>
+                        <a:srgbClr val="DDE5DF"/>
+                      </a:solidFill>
+                      <a:prstDash val="solid"/>
+                      <a:round/>
+                      <a:headEnd type="none" w="med" len="med"/>
+                      <a:tailEnd type="none" w="med" len="med"/>
+                    </a:lnR>
+                    <a:lnT w="6350" cap="flat" cmpd="sng" algn="ctr">
+                      <a:solidFill>
+                        <a:srgbClr val="DDE5DF"/>
+                      </a:solidFill>
+                      <a:prstDash val="solid"/>
+                      <a:round/>
+                      <a:headEnd type="none" w="med" len="med"/>
+                      <a:tailEnd type="none" w="med" len="med"/>
+                    </a:lnT>
+                    <a:lnB w="6350" cap="flat" cmpd="sng" algn="ctr">
+                      <a:solidFill>
+                        <a:srgbClr val="DDE5DF"/>
+                      </a:solidFill>
+                      <a:prstDash val="solid"/>
+                      <a:round/>
+                      <a:headEnd type="none" w="med" len="med"/>
+                      <a:tailEnd type="none" w="med" len="med"/>
+                    </a:lnB>
+                    <a:solidFill>
+                      <a:srgbClr val="FFFFFF"/>
+                    </a:solidFill>
+                  </a:tcPr>
+                </a:tc>
+                <a:tc>
+                  <a:txBody>
+                    <a:bodyPr/>
+                    <a:lstStyle/>
+                    <a:p>
+                      <a:pPr algn="l" indent="0" marL="0">
+                        <a:buNone/>
+                      </a:pPr>
+                      <a:r>
+                        <a:rPr lang="en-US" sz="1200" dirty="0">
+                          <a:solidFill>
+                            <a:srgbClr val="1E2B22"/>
+                          </a:solidFill>
+                          <a:latin typeface="Microsoft JhengHei" pitchFamily="34" charset="0"/>
+                          <a:ea typeface="Microsoft JhengHei" pitchFamily="34" charset="-122"/>
+                          <a:cs typeface="Microsoft JhengHei" pitchFamily="34" charset="-120"/>
+                        </a:rPr>
+                        <a:t>2.5</a:t>
+                      </a:r>
+                      <a:endParaRPr lang="en-US" sz="1200" dirty="0">
+                        <a:latin typeface="Microsoft JhengHei" charset="0"/>
+                        <a:ea typeface="Microsoft JhengHei" charset="0"/>
+                        <a:cs typeface="Microsoft JhengHei" charset="0"/>
+                      </a:endParaRPr>
+                    </a:p>
+                  </a:txBody>
+                  <a:tcPr marL="73152" marR="73152" marT="18288" marB="18288" anchor="ctr">
+                    <a:lnL w="6350" cap="flat" cmpd="sng" algn="ctr">
+                      <a:solidFill>
+                        <a:srgbClr val="DDE5DF"/>
+                      </a:solidFill>
+                      <a:prstDash val="solid"/>
+                      <a:round/>
+                      <a:headEnd type="none" w="med" len="med"/>
+                      <a:tailEnd type="none" w="med" len="med"/>
+                    </a:lnL>
+                    <a:lnR w="6350" cap="flat" cmpd="sng" algn="ctr">
+                      <a:solidFill>
+                        <a:srgbClr val="DDE5DF"/>
+                      </a:solidFill>
+                      <a:prstDash val="solid"/>
+                      <a:round/>
+                      <a:headEnd type="none" w="med" len="med"/>
+                      <a:tailEnd type="none" w="med" len="med"/>
+                    </a:lnR>
+                    <a:lnT w="6350" cap="flat" cmpd="sng" algn="ctr">
+                      <a:solidFill>
+                        <a:srgbClr val="DDE5DF"/>
+                      </a:solidFill>
+                      <a:prstDash val="solid"/>
+                      <a:round/>
+                      <a:headEnd type="none" w="med" len="med"/>
+                      <a:tailEnd type="none" w="med" len="med"/>
+                    </a:lnT>
+                    <a:lnB w="6350" cap="flat" cmpd="sng" algn="ctr">
+                      <a:solidFill>
+                        <a:srgbClr val="DDE5DF"/>
+                      </a:solidFill>
+                      <a:prstDash val="solid"/>
+                      <a:round/>
+                      <a:headEnd type="none" w="med" len="med"/>
+                      <a:tailEnd type="none" w="med" len="med"/>
+                    </a:lnB>
+                    <a:solidFill>
+                      <a:srgbClr val="FFFFFF"/>
+                    </a:solidFill>
+                  </a:tcPr>
+                </a:tc>
+                <a:tc>
+                  <a:txBody>
+                    <a:bodyPr/>
+                    <a:lstStyle/>
+                    <a:p>
+                      <a:pPr algn="l" indent="0" marL="0">
+                        <a:buNone/>
+                      </a:pPr>
+                      <a:r>
+                        <a:rPr lang="en-US" sz="1200" dirty="0">
+                          <a:solidFill>
+                            <a:srgbClr val="1E2B22"/>
+                          </a:solidFill>
+                          <a:latin typeface="Microsoft JhengHei" pitchFamily="34" charset="0"/>
+                          <a:ea typeface="Microsoft JhengHei" pitchFamily="34" charset="-122"/>
+                          <a:cs typeface="Microsoft JhengHei" pitchFamily="34" charset="-120"/>
+                        </a:rPr>
+                        <a:t>15</a:t>
+                      </a:r>
+                      <a:endParaRPr lang="en-US" sz="1200" dirty="0">
+                        <a:latin typeface="Microsoft JhengHei" charset="0"/>
+                        <a:ea typeface="Microsoft JhengHei" charset="0"/>
+                        <a:cs typeface="Microsoft JhengHei" charset="0"/>
+                      </a:endParaRPr>
+                    </a:p>
+                  </a:txBody>
+                  <a:tcPr marL="73152" marR="73152" marT="18288" marB="18288" anchor="ctr">
+                    <a:lnL w="6350" cap="flat" cmpd="sng" algn="ctr">
+                      <a:solidFill>
+                        <a:srgbClr val="DDE5DF"/>
+                      </a:solidFill>
+                      <a:prstDash val="solid"/>
+                      <a:round/>
+                      <a:headEnd type="none" w="med" len="med"/>
+                      <a:tailEnd type="none" w="med" len="med"/>
+                    </a:lnL>
+                    <a:lnR w="6350" cap="flat" cmpd="sng" algn="ctr">
+                      <a:solidFill>
+                        <a:srgbClr val="DDE5DF"/>
+                      </a:solidFill>
+                      <a:prstDash val="solid"/>
+                      <a:round/>
+                      <a:headEnd type="none" w="med" len="med"/>
+                      <a:tailEnd type="none" w="med" len="med"/>
+                    </a:lnR>
+                    <a:lnT w="6350" cap="flat" cmpd="sng" algn="ctr">
+                      <a:solidFill>
+                        <a:srgbClr val="DDE5DF"/>
+                      </a:solidFill>
+                      <a:prstDash val="solid"/>
+                      <a:round/>
+                      <a:headEnd type="none" w="med" len="med"/>
+                      <a:tailEnd type="none" w="med" len="med"/>
+                    </a:lnT>
+                    <a:lnB w="6350" cap="flat" cmpd="sng" algn="ctr">
+                      <a:solidFill>
+                        <a:srgbClr val="DDE5DF"/>
+                      </a:solidFill>
+                      <a:prstDash val="solid"/>
+                      <a:round/>
+                      <a:headEnd type="none" w="med" len="med"/>
+                      <a:tailEnd type="none" w="med" len="med"/>
+                    </a:lnB>
+                    <a:solidFill>
+                      <a:srgbClr val="FFFFFF"/>
+                    </a:solidFill>
+                  </a:tcPr>
+                </a:tc>
+                <a:tc>
+                  <a:txBody>
+                    <a:bodyPr/>
+                    <a:lstStyle/>
+                    <a:p>
+                      <a:pPr algn="l" indent="0" marL="0">
+                        <a:buNone/>
+                      </a:pPr>
+                      <a:r>
+                        <a:rPr lang="en-US" sz="1200" dirty="0">
+                          <a:solidFill>
+                            <a:srgbClr val="1E2B22"/>
+                          </a:solidFill>
+                          <a:latin typeface="Microsoft JhengHei" pitchFamily="34" charset="0"/>
+                          <a:ea typeface="Microsoft JhengHei" pitchFamily="34" charset="-122"/>
+                          <a:cs typeface="Microsoft JhengHei" pitchFamily="34" charset="-120"/>
+                        </a:rPr>
+                        <a:t>5.9%</a:t>
+                      </a:r>
+                      <a:endParaRPr lang="en-US" sz="1200" dirty="0">
+                        <a:latin typeface="Microsoft JhengHei" charset="0"/>
+                        <a:ea typeface="Microsoft JhengHei" charset="0"/>
+                        <a:cs typeface="Microsoft JhengHei" charset="0"/>
+                      </a:endParaRPr>
+                    </a:p>
+                  </a:txBody>
+                  <a:tcPr marL="73152" marR="73152" marT="18288" marB="18288" anchor="ctr">
+                    <a:lnL w="6350" cap="flat" cmpd="sng" algn="ctr">
+                      <a:solidFill>
+                        <a:srgbClr val="DDE5DF"/>
+                      </a:solidFill>
+                      <a:prstDash val="solid"/>
+                      <a:round/>
+                      <a:headEnd type="none" w="med" len="med"/>
+                      <a:tailEnd type="none" w="med" len="med"/>
+                    </a:lnL>
+                    <a:lnR w="6350" cap="flat" cmpd="sng" algn="ctr">
+                      <a:solidFill>
+                        <a:srgbClr val="DDE5DF"/>
+                      </a:solidFill>
+                      <a:prstDash val="solid"/>
+                      <a:round/>
+                      <a:headEnd type="none" w="med" len="med"/>
+                      <a:tailEnd type="none" w="med" len="med"/>
+                    </a:lnR>
+                    <a:lnT w="6350" cap="flat" cmpd="sng" algn="ctr">
+                      <a:solidFill>
+                        <a:srgbClr val="DDE5DF"/>
+                      </a:solidFill>
+                      <a:prstDash val="solid"/>
+                      <a:round/>
+                      <a:headEnd type="none" w="med" len="med"/>
+                      <a:tailEnd type="none" w="med" len="med"/>
+                    </a:lnT>
+                    <a:lnB w="6350" cap="flat" cmpd="sng" algn="ctr">
+                      <a:solidFill>
+                        <a:srgbClr val="DDE5DF"/>
+                      </a:solidFill>
+                      <a:prstDash val="solid"/>
+                      <a:round/>
+                      <a:headEnd type="none" w="med" len="med"/>
+                      <a:tailEnd type="none" w="med" len="med"/>
+                    </a:lnB>
+                    <a:solidFill>
+                      <a:srgbClr val="FFFFFF"/>
+                    </a:solidFill>
+                  </a:tcPr>
+                </a:tc>
+                <a:tc>
+                  <a:txBody>
+                    <a:bodyPr/>
+                    <a:lstStyle/>
+                    <a:p>
+                      <a:pPr algn="l" indent="0" marL="0">
+                        <a:buNone/>
+                      </a:pPr>
+                      <a:r>
+                        <a:rPr lang="en-US" sz="1200" dirty="0">
+                          <a:solidFill>
+                            <a:srgbClr val="1E2B22"/>
+                          </a:solidFill>
+                          <a:latin typeface="Microsoft JhengHei" pitchFamily="34" charset="0"/>
+                          <a:ea typeface="Microsoft JhengHei" pitchFamily="34" charset="-122"/>
+                          <a:cs typeface="Microsoft JhengHei" pitchFamily="34" charset="-120"/>
+                        </a:rPr>
+                        <a:t>1.10</a:t>
+                      </a:r>
+                      <a:endParaRPr lang="en-US" sz="1200" dirty="0">
+                        <a:latin typeface="Microsoft JhengHei" charset="0"/>
+                        <a:ea typeface="Microsoft JhengHei" charset="0"/>
+                        <a:cs typeface="Microsoft JhengHei" charset="0"/>
+                      </a:endParaRPr>
+                    </a:p>
+                  </a:txBody>
+                  <a:tcPr marL="73152" marR="73152" marT="18288" marB="18288" anchor="ctr">
+                    <a:lnL w="6350" cap="flat" cmpd="sng" algn="ctr">
+                      <a:solidFill>
+                        <a:srgbClr val="DDE5DF"/>
+                      </a:solidFill>
+                      <a:prstDash val="solid"/>
+                      <a:round/>
+                      <a:headEnd type="none" w="med" len="med"/>
+                      <a:tailEnd type="none" w="med" len="med"/>
+                    </a:lnL>
+                    <a:lnR w="6350" cap="flat" cmpd="sng" algn="ctr">
+                      <a:solidFill>
+                        <a:srgbClr val="DDE5DF"/>
+                      </a:solidFill>
+                      <a:prstDash val="solid"/>
+                      <a:round/>
+                      <a:headEnd type="none" w="med" len="med"/>
+                      <a:tailEnd type="none" w="med" len="med"/>
+                    </a:lnR>
+                    <a:lnT w="6350" cap="flat" cmpd="sng" algn="ctr">
+                      <a:solidFill>
+                        <a:srgbClr val="DDE5DF"/>
+                      </a:solidFill>
+                      <a:prstDash val="solid"/>
+                      <a:round/>
+                      <a:headEnd type="none" w="med" len="med"/>
+                      <a:tailEnd type="none" w="med" len="med"/>
+                    </a:lnT>
+                    <a:lnB w="6350" cap="flat" cmpd="sng" algn="ctr">
+                      <a:solidFill>
+                        <a:srgbClr val="DDE5DF"/>
+                      </a:solidFill>
+                      <a:prstDash val="solid"/>
+                      <a:round/>
+                      <a:headEnd type="none" w="med" len="med"/>
+                      <a:tailEnd type="none" w="med" len="med"/>
+                    </a:lnB>
+                    <a:solidFill>
+                      <a:srgbClr val="FFFFFF"/>
+                    </a:solidFill>
+                  </a:tcPr>
+                </a:tc>
+                <a:tc>
+                  <a:txBody>
+                    <a:bodyPr/>
+                    <a:lstStyle/>
+                    <a:p>
+                      <a:pPr algn="l" indent="0" marL="0">
+                        <a:buNone/>
+                      </a:pPr>
+                      <a:r>
+                        <a:rPr lang="en-US" sz="1200" dirty="0">
+                          <a:solidFill>
+                            <a:srgbClr val="1E2B22"/>
+                          </a:solidFill>
+                          <a:latin typeface="Microsoft JhengHei" pitchFamily="34" charset="0"/>
+                          <a:ea typeface="Microsoft JhengHei" pitchFamily="34" charset="-122"/>
+                          <a:cs typeface="Microsoft JhengHei" pitchFamily="34" charset="-120"/>
+                        </a:rPr>
+                        <a:t>9.5%（4/42）</a:t>
+                      </a:r>
+                      <a:endParaRPr lang="en-US" sz="1200" dirty="0">
+                        <a:latin typeface="Microsoft JhengHei" charset="0"/>
+                        <a:ea typeface="Microsoft JhengHei" charset="0"/>
+                        <a:cs typeface="Microsoft JhengHei" charset="0"/>
+                      </a:endParaRPr>
+                    </a:p>
+                  </a:txBody>
+                  <a:tcPr marL="73152" marR="73152" marT="18288" marB="18288" anchor="ctr">
+                    <a:lnL w="6350" cap="flat" cmpd="sng" algn="ctr">
+                      <a:solidFill>
+                        <a:srgbClr val="DDE5DF"/>
+                      </a:solidFill>
+                      <a:prstDash val="solid"/>
+                      <a:round/>
+                      <a:headEnd type="none" w="med" len="med"/>
+                      <a:tailEnd type="none" w="med" len="med"/>
+                    </a:lnL>
+                    <a:lnR w="6350" cap="flat" cmpd="sng" algn="ctr">
+                      <a:solidFill>
+                        <a:srgbClr val="DDE5DF"/>
+                      </a:solidFill>
+                      <a:prstDash val="solid"/>
+                      <a:round/>
+                      <a:headEnd type="none" w="med" len="med"/>
+                      <a:tailEnd type="none" w="med" len="med"/>
+                    </a:lnR>
+                    <a:lnT w="6350" cap="flat" cmpd="sng" algn="ctr">
+                      <a:solidFill>
+                        <a:srgbClr val="DDE5DF"/>
+                      </a:solidFill>
+                      <a:prstDash val="solid"/>
+                      <a:round/>
+                      <a:headEnd type="none" w="med" len="med"/>
+                      <a:tailEnd type="none" w="med" len="med"/>
+                    </a:lnT>
+                    <a:lnB w="6350" cap="flat" cmpd="sng" algn="ctr">
+                      <a:solidFill>
+                        <a:srgbClr val="DDE5DF"/>
+                      </a:solidFill>
+                      <a:prstDash val="solid"/>
+                      <a:round/>
+                      <a:headEnd type="none" w="med" len="med"/>
+                      <a:tailEnd type="none" w="med" len="med"/>
+                    </a:lnB>
+                    <a:solidFill>
+                      <a:srgbClr val="FFFFFF"/>
+                    </a:solidFill>
+                  </a:tcPr>
+                </a:tc>
+              </a:tr>
+              <a:tr h="329184">
+                <a:tc>
+                  <a:txBody>
+                    <a:bodyPr/>
+                    <a:lstStyle/>
+                    <a:p>
+                      <a:pPr algn="l" indent="0" marL="0">
+                        <a:buNone/>
+                      </a:pPr>
+                      <a:r>
+                        <a:rPr lang="en-US" sz="1200" b="1" dirty="0">
+                          <a:solidFill>
+                            <a:srgbClr val="1E2B22"/>
+                          </a:solidFill>
+                          <a:latin typeface="Microsoft JhengHei" pitchFamily="34" charset="0"/>
+                          <a:ea typeface="Microsoft JhengHei" pitchFamily="34" charset="-122"/>
+                          <a:cs typeface="Microsoft JhengHei" pitchFamily="34" charset="-120"/>
+                        </a:rPr>
+                        <a:t>全區</a:t>
+                      </a:r>
+                      <a:endParaRPr lang="en-US" sz="1200" dirty="0">
+                        <a:latin typeface="Microsoft JhengHei" charset="0"/>
+                        <a:ea typeface="Microsoft JhengHei" charset="0"/>
+                        <a:cs typeface="Microsoft JhengHei" charset="0"/>
+                      </a:endParaRPr>
+                    </a:p>
+                  </a:txBody>
+                  <a:tcPr marL="73152" marR="73152" marT="18288" marB="18288" anchor="ctr">
+                    <a:lnL w="6350" cap="flat" cmpd="sng" algn="ctr">
+                      <a:solidFill>
+                        <a:srgbClr val="DDE5DF"/>
+                      </a:solidFill>
+                      <a:prstDash val="solid"/>
+                      <a:round/>
+                      <a:headEnd type="none" w="med" len="med"/>
+                      <a:tailEnd type="none" w="med" len="med"/>
+                    </a:lnL>
+                    <a:lnR w="6350" cap="flat" cmpd="sng" algn="ctr">
+                      <a:solidFill>
+                        <a:srgbClr val="DDE5DF"/>
+                      </a:solidFill>
+                      <a:prstDash val="solid"/>
+                      <a:round/>
+                      <a:headEnd type="none" w="med" len="med"/>
+                      <a:tailEnd type="none" w="med" len="med"/>
+                    </a:lnR>
+                    <a:lnT w="6350" cap="flat" cmpd="sng" algn="ctr">
+                      <a:solidFill>
+                        <a:srgbClr val="DDE5DF"/>
+                      </a:solidFill>
+                      <a:prstDash val="solid"/>
+                      <a:round/>
+                      <a:headEnd type="none" w="med" len="med"/>
+                      <a:tailEnd type="none" w="med" len="med"/>
+                    </a:lnT>
+                    <a:lnB w="6350" cap="flat" cmpd="sng" algn="ctr">
+                      <a:solidFill>
+                        <a:srgbClr val="DDE5DF"/>
+                      </a:solidFill>
+                      <a:prstDash val="solid"/>
+                      <a:round/>
+                      <a:headEnd type="none" w="med" len="med"/>
+                      <a:tailEnd type="none" w="med" len="med"/>
+                    </a:lnB>
+                    <a:solidFill>
+                      <a:srgbClr val="EEF3EC"/>
+                    </a:solidFill>
+                  </a:tcPr>
+                </a:tc>
+                <a:tc>
+                  <a:txBody>
+                    <a:bodyPr/>
+                    <a:lstStyle/>
+                    <a:p>
+                      <a:pPr algn="l" indent="0" marL="0">
+                        <a:buNone/>
+                      </a:pPr>
+                      <a:endParaRPr lang="en-US" sz="1200" dirty="0">
+                        <a:latin typeface="Microsoft JhengHei" charset="0"/>
+                        <a:ea typeface="Microsoft JhengHei" charset="0"/>
+                        <a:cs typeface="Microsoft JhengHei" charset="0"/>
+                      </a:endParaRPr>
+                    </a:p>
+                  </a:txBody>
+                  <a:tcPr marL="73152" marR="73152" marT="18288" marB="18288" anchor="ctr">
+                    <a:lnL w="6350" cap="flat" cmpd="sng" algn="ctr">
+                      <a:solidFill>
+                        <a:srgbClr val="DDE5DF"/>
+                      </a:solidFill>
+                      <a:prstDash val="solid"/>
+                      <a:round/>
+                      <a:headEnd type="none" w="med" len="med"/>
+                      <a:tailEnd type="none" w="med" len="med"/>
+                    </a:lnL>
+                    <a:lnR w="6350" cap="flat" cmpd="sng" algn="ctr">
+                      <a:solidFill>
+                        <a:srgbClr val="DDE5DF"/>
+                      </a:solidFill>
+                      <a:prstDash val="solid"/>
+                      <a:round/>
+                      <a:headEnd type="none" w="med" len="med"/>
+                      <a:tailEnd type="none" w="med" len="med"/>
+                    </a:lnR>
+                    <a:lnT w="6350" cap="flat" cmpd="sng" algn="ctr">
+                      <a:solidFill>
+                        <a:srgbClr val="DDE5DF"/>
+                      </a:solidFill>
+                      <a:prstDash val="solid"/>
+                      <a:round/>
+                      <a:headEnd type="none" w="med" len="med"/>
+                      <a:tailEnd type="none" w="med" len="med"/>
+                    </a:lnT>
+                    <a:lnB w="6350" cap="flat" cmpd="sng" algn="ctr">
+                      <a:solidFill>
+                        <a:srgbClr val="DDE5DF"/>
+                      </a:solidFill>
+                      <a:prstDash val="solid"/>
+                      <a:round/>
+                      <a:headEnd type="none" w="med" len="med"/>
+                      <a:tailEnd type="none" w="med" len="med"/>
+                    </a:lnB>
+                    <a:solidFill>
+                      <a:srgbClr val="EEF3EC"/>
+                    </a:solidFill>
+                  </a:tcPr>
+                </a:tc>
+                <a:tc>
+                  <a:txBody>
+                    <a:bodyPr/>
+                    <a:lstStyle/>
+                    <a:p>
+                      <a:pPr algn="l" indent="0" marL="0">
+                        <a:buNone/>
+                      </a:pPr>
+                      <a:r>
+                        <a:rPr lang="en-US" sz="1200" b="1" dirty="0">
+                          <a:solidFill>
+                            <a:srgbClr val="1E2B22"/>
+                          </a:solidFill>
+                          <a:latin typeface="Microsoft JhengHei" pitchFamily="34" charset="0"/>
+                          <a:ea typeface="Microsoft JhengHei" pitchFamily="34" charset="-122"/>
+                          <a:cs typeface="Microsoft JhengHei" pitchFamily="34" charset="-120"/>
+                        </a:rPr>
+                        <a:t>1,718.4</a:t>
+                      </a:r>
+                      <a:endParaRPr lang="en-US" sz="1200" dirty="0">
+                        <a:latin typeface="Microsoft JhengHei" charset="0"/>
+                        <a:ea typeface="Microsoft JhengHei" charset="0"/>
+                        <a:cs typeface="Microsoft JhengHei" charset="0"/>
+                      </a:endParaRPr>
+                    </a:p>
+                  </a:txBody>
+                  <a:tcPr marL="73152" marR="73152" marT="18288" marB="18288" anchor="ctr">
+                    <a:lnL w="6350" cap="flat" cmpd="sng" algn="ctr">
+                      <a:solidFill>
+                        <a:srgbClr val="DDE5DF"/>
+                      </a:solidFill>
+                      <a:prstDash val="solid"/>
+                      <a:round/>
+                      <a:headEnd type="none" w="med" len="med"/>
+                      <a:tailEnd type="none" w="med" len="med"/>
+                    </a:lnL>
+                    <a:lnR w="6350" cap="flat" cmpd="sng" algn="ctr">
+                      <a:solidFill>
+                        <a:srgbClr val="DDE5DF"/>
+                      </a:solidFill>
+                      <a:prstDash val="solid"/>
+                      <a:round/>
+                      <a:headEnd type="none" w="med" len="med"/>
+                      <a:tailEnd type="none" w="med" len="med"/>
+                    </a:lnR>
+                    <a:lnT w="6350" cap="flat" cmpd="sng" algn="ctr">
+                      <a:solidFill>
+                        <a:srgbClr val="DDE5DF"/>
+                      </a:solidFill>
+                      <a:prstDash val="solid"/>
+                      <a:round/>
+                      <a:headEnd type="none" w="med" len="med"/>
+                      <a:tailEnd type="none" w="med" len="med"/>
+                    </a:lnT>
+                    <a:lnB w="6350" cap="flat" cmpd="sng" algn="ctr">
+                      <a:solidFill>
+                        <a:srgbClr val="DDE5DF"/>
+                      </a:solidFill>
+                      <a:prstDash val="solid"/>
+                      <a:round/>
+                      <a:headEnd type="none" w="med" len="med"/>
+                      <a:tailEnd type="none" w="med" len="med"/>
+                    </a:lnB>
+                    <a:solidFill>
+                      <a:srgbClr val="EEF3EC"/>
+                    </a:solidFill>
+                  </a:tcPr>
+                </a:tc>
+                <a:tc>
+                  <a:txBody>
+                    <a:bodyPr/>
+                    <a:lstStyle/>
+                    <a:p>
+                      <a:pPr algn="l" indent="0" marL="0">
+                        <a:buNone/>
+                      </a:pPr>
+                      <a:r>
+                        <a:rPr lang="en-US" sz="1200" b="1" dirty="0">
+                          <a:solidFill>
+                            <a:srgbClr val="1E2B22"/>
+                          </a:solidFill>
+                          <a:latin typeface="Microsoft JhengHei" pitchFamily="34" charset="0"/>
+                          <a:ea typeface="Microsoft JhengHei" pitchFamily="34" charset="-122"/>
+                          <a:cs typeface="Microsoft JhengHei" pitchFamily="34" charset="-120"/>
+                        </a:rPr>
+                        <a:t>9,147</a:t>
+                      </a:r>
+                      <a:endParaRPr lang="en-US" sz="1200" dirty="0">
+                        <a:latin typeface="Microsoft JhengHei" charset="0"/>
+                        <a:ea typeface="Microsoft JhengHei" charset="0"/>
+                        <a:cs typeface="Microsoft JhengHei" charset="0"/>
+                      </a:endParaRPr>
+                    </a:p>
+                  </a:txBody>
+                  <a:tcPr marL="73152" marR="73152" marT="18288" marB="18288" anchor="ctr">
+                    <a:lnL w="6350" cap="flat" cmpd="sng" algn="ctr">
+                      <a:solidFill>
+                        <a:srgbClr val="DDE5DF"/>
+                      </a:solidFill>
+                      <a:prstDash val="solid"/>
+                      <a:round/>
+                      <a:headEnd type="none" w="med" len="med"/>
+                      <a:tailEnd type="none" w="med" len="med"/>
+                    </a:lnL>
+                    <a:lnR w="6350" cap="flat" cmpd="sng" algn="ctr">
+                      <a:solidFill>
+                        <a:srgbClr val="DDE5DF"/>
+                      </a:solidFill>
+                      <a:prstDash val="solid"/>
+                      <a:round/>
+                      <a:headEnd type="none" w="med" len="med"/>
+                      <a:tailEnd type="none" w="med" len="med"/>
+                    </a:lnR>
+                    <a:lnT w="6350" cap="flat" cmpd="sng" algn="ctr">
+                      <a:solidFill>
+                        <a:srgbClr val="DDE5DF"/>
+                      </a:solidFill>
+                      <a:prstDash val="solid"/>
+                      <a:round/>
+                      <a:headEnd type="none" w="med" len="med"/>
+                      <a:tailEnd type="none" w="med" len="med"/>
+                    </a:lnT>
+                    <a:lnB w="6350" cap="flat" cmpd="sng" algn="ctr">
+                      <a:solidFill>
+                        <a:srgbClr val="DDE5DF"/>
+                      </a:solidFill>
+                      <a:prstDash val="solid"/>
+                      <a:round/>
+                      <a:headEnd type="none" w="med" len="med"/>
+                      <a:tailEnd type="none" w="med" len="med"/>
+                    </a:lnB>
+                    <a:solidFill>
+                      <a:srgbClr val="EEF3EC"/>
+                    </a:solidFill>
+                  </a:tcPr>
+                </a:tc>
+                <a:tc>
+                  <a:txBody>
+                    <a:bodyPr/>
+                    <a:lstStyle/>
+                    <a:p>
+                      <a:pPr algn="l" indent="0" marL="0">
+                        <a:buNone/>
+                      </a:pPr>
+                      <a:r>
+                        <a:rPr lang="en-US" sz="1200" b="1" dirty="0">
+                          <a:solidFill>
+                            <a:srgbClr val="1E2B22"/>
+                          </a:solidFill>
+                          <a:latin typeface="Microsoft JhengHei" pitchFamily="34" charset="0"/>
+                          <a:ea typeface="Microsoft JhengHei" pitchFamily="34" charset="-122"/>
+                          <a:cs typeface="Microsoft JhengHei" pitchFamily="34" charset="-120"/>
+                        </a:rPr>
+                        <a:t>5.3%</a:t>
+                      </a:r>
+                      <a:endParaRPr lang="en-US" sz="1200" dirty="0">
+                        <a:latin typeface="Microsoft JhengHei" charset="0"/>
+                        <a:ea typeface="Microsoft JhengHei" charset="0"/>
+                        <a:cs typeface="Microsoft JhengHei" charset="0"/>
+                      </a:endParaRPr>
+                    </a:p>
+                  </a:txBody>
+                  <a:tcPr marL="73152" marR="73152" marT="18288" marB="18288" anchor="ctr">
+                    <a:lnL w="6350" cap="flat" cmpd="sng" algn="ctr">
+                      <a:solidFill>
+                        <a:srgbClr val="DDE5DF"/>
+                      </a:solidFill>
+                      <a:prstDash val="solid"/>
+                      <a:round/>
+                      <a:headEnd type="none" w="med" len="med"/>
+                      <a:tailEnd type="none" w="med" len="med"/>
+                    </a:lnL>
+                    <a:lnR w="6350" cap="flat" cmpd="sng" algn="ctr">
+                      <a:solidFill>
+                        <a:srgbClr val="DDE5DF"/>
+                      </a:solidFill>
+                      <a:prstDash val="solid"/>
+                      <a:round/>
+                      <a:headEnd type="none" w="med" len="med"/>
+                      <a:tailEnd type="none" w="med" len="med"/>
+                    </a:lnR>
+                    <a:lnT w="6350" cap="flat" cmpd="sng" algn="ctr">
+                      <a:solidFill>
+                        <a:srgbClr val="DDE5DF"/>
+                      </a:solidFill>
+                      <a:prstDash val="solid"/>
+                      <a:round/>
+                      <a:headEnd type="none" w="med" len="med"/>
+                      <a:tailEnd type="none" w="med" len="med"/>
+                    </a:lnT>
+                    <a:lnB w="6350" cap="flat" cmpd="sng" algn="ctr">
+                      <a:solidFill>
+                        <a:srgbClr val="DDE5DF"/>
+                      </a:solidFill>
+                      <a:prstDash val="solid"/>
+                      <a:round/>
+                      <a:headEnd type="none" w="med" len="med"/>
+                      <a:tailEnd type="none" w="med" len="med"/>
+                    </a:lnB>
+                    <a:solidFill>
+                      <a:srgbClr val="EEF3EC"/>
+                    </a:solidFill>
+                  </a:tcPr>
+                </a:tc>
+                <a:tc>
+                  <a:txBody>
+                    <a:bodyPr/>
+                    <a:lstStyle/>
+                    <a:p>
+                      <a:pPr algn="l" indent="0" marL="0">
+                        <a:buNone/>
+                      </a:pPr>
+                      <a:r>
+                        <a:rPr lang="en-US" sz="1200" b="1" dirty="0">
+                          <a:solidFill>
+                            <a:srgbClr val="1E2B22"/>
+                          </a:solidFill>
+                          <a:latin typeface="Microsoft JhengHei" pitchFamily="34" charset="0"/>
+                          <a:ea typeface="Microsoft JhengHei" pitchFamily="34" charset="-122"/>
+                          <a:cs typeface="Microsoft JhengHei" pitchFamily="34" charset="-120"/>
+                        </a:rPr>
+                        <a:t>1.00</a:t>
+                      </a:r>
+                      <a:endParaRPr lang="en-US" sz="1200" dirty="0">
+                        <a:latin typeface="Microsoft JhengHei" charset="0"/>
+                        <a:ea typeface="Microsoft JhengHei" charset="0"/>
+                        <a:cs typeface="Microsoft JhengHei" charset="0"/>
+                      </a:endParaRPr>
+                    </a:p>
+                  </a:txBody>
+                  <a:tcPr marL="73152" marR="73152" marT="18288" marB="18288" anchor="ctr">
+                    <a:lnL w="6350" cap="flat" cmpd="sng" algn="ctr">
+                      <a:solidFill>
+                        <a:srgbClr val="DDE5DF"/>
+                      </a:solidFill>
+                      <a:prstDash val="solid"/>
+                      <a:round/>
+                      <a:headEnd type="none" w="med" len="med"/>
+                      <a:tailEnd type="none" w="med" len="med"/>
+                    </a:lnL>
+                    <a:lnR w="6350" cap="flat" cmpd="sng" algn="ctr">
+                      <a:solidFill>
+                        <a:srgbClr val="DDE5DF"/>
+                      </a:solidFill>
+                      <a:prstDash val="solid"/>
+                      <a:round/>
+                      <a:headEnd type="none" w="med" len="med"/>
+                      <a:tailEnd type="none" w="med" len="med"/>
+                    </a:lnR>
+                    <a:lnT w="6350" cap="flat" cmpd="sng" algn="ctr">
+                      <a:solidFill>
+                        <a:srgbClr val="DDE5DF"/>
+                      </a:solidFill>
+                      <a:prstDash val="solid"/>
+                      <a:round/>
+                      <a:headEnd type="none" w="med" len="med"/>
+                      <a:tailEnd type="none" w="med" len="med"/>
+                    </a:lnT>
+                    <a:lnB w="6350" cap="flat" cmpd="sng" algn="ctr">
+                      <a:solidFill>
+                        <a:srgbClr val="DDE5DF"/>
+                      </a:solidFill>
+                      <a:prstDash val="solid"/>
+                      <a:round/>
+                      <a:headEnd type="none" w="med" len="med"/>
+                      <a:tailEnd type="none" w="med" len="med"/>
+                    </a:lnB>
+                    <a:solidFill>
+                      <a:srgbClr val="EEF3EC"/>
+                    </a:solidFill>
+                  </a:tcPr>
+                </a:tc>
+                <a:tc>
+                  <a:txBody>
+                    <a:bodyPr/>
+                    <a:lstStyle/>
+                    <a:p>
+                      <a:pPr algn="l" indent="0" marL="0">
+                        <a:buNone/>
+                      </a:pPr>
+                      <a:r>
+                        <a:rPr lang="en-US" sz="1200" b="1" dirty="0">
+                          <a:solidFill>
+                            <a:srgbClr val="1E2B22"/>
+                          </a:solidFill>
+                          <a:latin typeface="Microsoft JhengHei" pitchFamily="34" charset="0"/>
+                          <a:ea typeface="Microsoft JhengHei" pitchFamily="34" charset="-122"/>
+                          <a:cs typeface="Microsoft JhengHei" pitchFamily="34" charset="-120"/>
+                        </a:rPr>
+                        <a:t>1.9%（243/12,776）</a:t>
+                      </a:r>
+                      <a:endParaRPr lang="en-US" sz="1200" dirty="0">
+                        <a:latin typeface="Microsoft JhengHei" charset="0"/>
+                        <a:ea typeface="Microsoft JhengHei" charset="0"/>
+                        <a:cs typeface="Microsoft JhengHei" charset="0"/>
+                      </a:endParaRPr>
+                    </a:p>
+                  </a:txBody>
+                  <a:tcPr marL="73152" marR="73152" marT="18288" marB="18288" anchor="ctr">
+                    <a:lnL w="6350" cap="flat" cmpd="sng" algn="ctr">
+                      <a:solidFill>
+                        <a:srgbClr val="DDE5DF"/>
+                      </a:solidFill>
+                      <a:prstDash val="solid"/>
+                      <a:round/>
+                      <a:headEnd type="none" w="med" len="med"/>
+                      <a:tailEnd type="none" w="med" len="med"/>
+                    </a:lnL>
+                    <a:lnR w="6350" cap="flat" cmpd="sng" algn="ctr">
+                      <a:solidFill>
+                        <a:srgbClr val="DDE5DF"/>
+                      </a:solidFill>
+                      <a:prstDash val="solid"/>
+                      <a:round/>
+                      <a:headEnd type="none" w="med" len="med"/>
+                      <a:tailEnd type="none" w="med" len="med"/>
+                    </a:lnR>
+                    <a:lnT w="6350" cap="flat" cmpd="sng" algn="ctr">
+                      <a:solidFill>
+                        <a:srgbClr val="DDE5DF"/>
+                      </a:solidFill>
+                      <a:prstDash val="solid"/>
+                      <a:round/>
+                      <a:headEnd type="none" w="med" len="med"/>
+                      <a:tailEnd type="none" w="med" len="med"/>
+                    </a:lnT>
+                    <a:lnB w="6350" cap="flat" cmpd="sng" algn="ctr">
+                      <a:solidFill>
+                        <a:srgbClr val="DDE5DF"/>
+                      </a:solidFill>
+                      <a:prstDash val="solid"/>
+                      <a:round/>
+                      <a:headEnd type="none" w="med" len="med"/>
+                      <a:tailEnd type="none" w="med" len="med"/>
+                    </a:lnB>
+                    <a:solidFill>
+                      <a:srgbClr val="EEF3EC"/>
+                    </a:solidFill>
+                  </a:tcPr>
+                </a:tc>
+              </a:tr>
+            </a:tbl>
+          </a:graphicData>
+        </a:graphic>
+      </p:graphicFrame>
+      <p:sp>
+        <p:nvSpPr>
+          <p:cNvPr id="4" name="geoN0"/>
+          <p:cNvSpPr/>
+          <p:nvPr/>
+        </p:nvSpPr>
+        <p:spPr>
+          <a:xfrm>
+            <a:off x="548640" y="5029200"/>
+            <a:ext cx="5440680" cy="1280160"/>
+          </a:xfrm>
+          <a:prstGeom prst="roundRect">
+            <a:avLst>
+              <a:gd name="adj" fmla="val 7143"/>
+            </a:avLst>
+          </a:prstGeom>
+          <a:solidFill>
+            <a:schemeClr val="bg2"/>
+          </a:solidFill>
+          <a:ln w="12700">
+            <a:solidFill>
+              <a:schemeClr val="bg2"/>
+            </a:solidFill>
+            <a:prstDash val="solid"/>
+          </a:ln>
+        </p:spPr>
+      </p:sp>
+      <p:sp>
+        <p:nvSpPr>
+          <p:cNvPr id="5" name="geoNT0"/>
+          <p:cNvSpPr txBox="1"/>
+          <p:nvPr/>
+        </p:nvSpPr>
+        <p:spPr>
+          <a:xfrm>
+            <a:off x="731520" y="5074920"/>
+            <a:ext cx="5074920" cy="1188720"/>
+          </a:xfrm>
+          <a:prstGeom prst="rect">
+            <a:avLst/>
+          </a:prstGeom>
+          <a:noFill/>
+          <a:ln/>
+        </p:spPr>
+        <p:txBody>
+          <a:bodyPr wrap="square" lIns="0" tIns="0" rIns="0" bIns="0" rtlCol="0" anchor="ctr"/>
+          <a:lstStyle/>
+          <a:p>
+            <a:pPr indent="0" marL="0">
+              <a:buNone/>
+            </a:pPr>
+            <a:r>
+              <a:rPr lang="en-US" sz="1200" b="1" dirty="0">
+                <a:solidFill>
+                  <a:schemeClr val="tx2"/>
+                </a:solidFill>
+              </a:rPr>
+              <a:t>讀法　</a:t>
+            </a:r>
+            <a:pPr indent="0" marL="0">
+              <a:buNone/>
+            </a:pPr>
+            <a:r>
+              <a:rPr lang="en-US" sz="1200" dirty="0">
+                <a:solidFill>
+                  <a:schemeClr val="tx1"/>
+                </a:solidFill>
+              </a:rPr>
+              <a:t>崩塌密度＝2021–2024 年度崩塌圖層聯集 ÷ ≥15° 有效坡面；頻率比 &gt;1 表示比全區平均容易崩。始新世西村層（板岩）1.53 最高，上新世錦水頁岩 0.32 最低。NDRE 下降比例在面積大的主要地層都約 2%，差異不大（小地層樣本太少）。</a:t>
+            </a:r>
+            <a:endParaRPr lang="en-US" sz="1200" dirty="0"/>
+          </a:p>
+        </p:txBody>
+      </p:sp>
+      <p:sp>
+        <p:nvSpPr>
+          <p:cNvPr id="6" name="geoN1"/>
+          <p:cNvSpPr/>
+          <p:nvPr/>
+        </p:nvSpPr>
+        <p:spPr>
+          <a:xfrm>
+            <a:off x="6172200" y="5029200"/>
+            <a:ext cx="5440680" cy="1280160"/>
+          </a:xfrm>
+          <a:prstGeom prst="roundRect">
+            <a:avLst>
+              <a:gd name="adj" fmla="val 7143"/>
+            </a:avLst>
+          </a:prstGeom>
+          <a:solidFill>
+            <a:schemeClr val="bg2"/>
+          </a:solidFill>
+          <a:ln w="12700">
+            <a:solidFill>
+              <a:schemeClr val="bg2"/>
+            </a:solidFill>
+            <a:prstDash val="solid"/>
+          </a:ln>
+        </p:spPr>
+      </p:sp>
+      <p:sp>
+        <p:nvSpPr>
+          <p:cNvPr id="7" name="geoNT1"/>
+          <p:cNvSpPr txBox="1"/>
+          <p:nvPr/>
+        </p:nvSpPr>
+        <p:spPr>
+          <a:xfrm>
+            <a:off x="6355080" y="5074920"/>
+            <a:ext cx="5074920" cy="1188720"/>
+          </a:xfrm>
+          <a:prstGeom prst="rect">
+            <a:avLst/>
+          </a:prstGeom>
+          <a:noFill/>
+          <a:ln/>
+        </p:spPr>
+        <p:txBody>
+          <a:bodyPr wrap="square" lIns="0" tIns="0" rIns="0" bIns="0" rtlCol="0" anchor="ctr"/>
+          <a:lstStyle/>
+          <a:p>
+            <a:pPr indent="0" marL="0">
+              <a:buNone/>
+            </a:pPr>
+            <a:r>
+              <a:rPr lang="en-US" sz="1200" b="1" dirty="0">
+                <a:solidFill>
+                  <a:schemeClr val="accent4"/>
+                </a:solidFill>
+              </a:rPr>
+              <a:t>限制　</a:t>
+            </a:r>
+            <a:pPr indent="0" marL="0">
+              <a:buNone/>
+            </a:pPr>
+            <a:r>
+              <a:rPr lang="en-US" sz="1200" dirty="0">
+                <a:solidFill>
+                  <a:schemeClr val="tx1"/>
+                </a:solidFill>
+              </a:rPr>
+              <a:t>公開的只有小比例尺地層面（POC 內一塊中位數約 160 ha），沒有斷層、位態、崩積區；這是描述性統計，不是敏感度模型。斷層距離與順向坡要五萬分之一向量。</a:t>
+            </a:r>
+            <a:endParaRPr lang="en-US" sz="1200" dirty="0"/>
+          </a:p>
+        </p:txBody>
+      </p:sp>
+      <p:sp>
+        <p:nvSpPr>
+          <p:cNvPr id="25" name="Slide Number Placeholder 0"/>
+          <p:cNvSpPr>
+            <a:spLocks noGrp="1"/>
+          </p:cNvSpPr>
+          <p:nvPr>
+            <p:ph type="sldNum" sz="quarter" idx="4294967295"/>
+          </p:nvPr>
+        </p:nvSpPr>
+        <p:spPr>
+          <a:xfrm>
+            <a:off x="11155680" y="6400800"/>
+            <a:ext cx="457200" cy="274320"/>
+          </a:xfrm>
+          <a:prstGeom prst="rect">
+            <a:avLst/>
+          </a:prstGeom>
+          <a:extLst>
+            <a:ext uri="{C572A759-6A51-4108-AA02-DFA0A04FC94B}">
+              <ma14:wrappingTextBoxFlag xmlns:ma14="http://schemas.microsoft.com/office/mac/drawingml/2011/main" val="0"/>
+            </a:ext>
+          </a:extLst>
+        </p:spPr>
+        <p:txBody>
+          <a:bodyPr/>
+          <a:lstStyle>
+            <a:lvl1pPr>
+              <a:defRPr sz="1000">
+                <a:solidFill>
+                  <a:schemeClr val="accent4"/>
+                </a:solidFill>
+              </a:defRPr>
+            </a:lvl1pPr>
+          </a:lstStyle>
+          <a:p>
+            <a:pPr algn="r"/>
+            <a:fld id="{F7021451-1387-4CA6-816F-3879F97B5CBC}" type="slidenum">
+              <a:rPr b="0" lang="en-US"/>
+              <a:t>8</a:t>
             </a:fld>
             <a:endParaRPr lang="en-US"/>
           </a:p>

--- a/presentation/TASTI_SatDashboard-決賽簡報.pptx
+++ b/presentation/TASTI_SatDashboard-決賽簡報.pptx
@@ -114,29 +114,29 @@
   <p:extLst>
     <p:ext uri="{521415D9-36F7-43E2-AB2F-B90AF26B5E84}">
       <p14:sectionLst xmlns:p14="http://schemas.microsoft.com/office/powerpoint/2010/main">
-        <p14:section name="開場" id="{3b007b5c-3dc5-8d03-bf21-32d7d37d0834}">
+        <p14:section name="開場" id="{d3ab1438-0ed6-f0dc-05e1-134f9eac79a9}">
           <p14:sldIdLst>
             <p14:sldId id="256"/>
           </p14:sldIdLst>
         </p14:section>
-        <p14:section name="問題與方法" id="{6a8ca646-5483-ddc6-1ebd-e0ca97124c67}">
+        <p14:section name="問題與方法" id="{1c92431d-8955-8ef7-9f58-4a20641f9c35}">
           <p14:sldIdLst>
             <p14:sldId id="257"/>
             <p14:sldId id="258"/>
           </p14:sldIdLst>
         </p14:section>
-        <p14:section name="成果與驗證" id="{16ed2de3-4792-cccb-29ff-5dbb7088d0fc}">
+        <p14:section name="成果與驗證" id="{ca2b576e-e524-c3bd-9719-5a649d21af4c}">
           <p14:sldIdLst>
             <p14:sldId id="259"/>
             <p14:sldId id="260"/>
           </p14:sldIdLst>
         </p14:section>
-        <p14:section name="落地" id="{65173dfe-13bf-67d3-8a1c-42b30702e95e}">
+        <p14:section name="落地" id="{e1707dac-232d-d61b-e989-cc35e71c0a95}">
           <p14:sldIdLst>
             <p14:sldId id="261"/>
           </p14:sldIdLst>
         </p14:section>
-        <p14:section name="備用" id="{a7aa1d1a-fa10-ee07-bebe-103f6fe6690a}">
+        <p14:section name="備用" id="{89eeb5e3-7a74-a3c4-b07b-bb437b600e2a}">
           <p14:sldIdLst>
             <p14:sldId id="262"/>
             <p14:sldId id="263"/>
@@ -2018,7 +2018,7 @@
           <a:p>
             <a:r>
               <a:rPr lang="en-US" dirty="0"/>
-              <a:t>（備用，評審問到系統藍圖或下一步時再翻。）專家提出的崩塌智慧防災平台有六個模組。我們目前做到的是平時篩查：坡地底圖、多源監測和 AI 輔助判釋都有一部分，其中道路與建物暴露是用 OpenStreetMap 疊合，回答坡面崩了會碰到什麼，但不改候選層級。地質目前只拿到影像圖磚，五萬分之一的斷層、位態、順向坡要取得向量後才能分析。降雨觸發、下游災害鏈和應變工作流還沒做，這是從平時篩查走向事件反應的下一步。</a:t>
+              <a:t>（備用，評審問到系統藍圖或下一步時再翻。）專家提出的崩塌智慧防災平台有六個模組。我們目前做到的是平時篩查：坡地底圖、多源監測和 AI 輔助判釋都有一部分，其中道路與建物暴露是用 OpenStreetMap 疊合，回答坡面崩了會碰到什麼，但不改候選層級。地質目前只拿到影像圖磚，五萬分之一的斷層、位態、順向坡要取得向量後才能分析。下游影響目前只列出坡面所在的土石流潛勢溪流集水區與影響範圍；降雨觸發、土砂與河道的動態串接和應變工作流還沒做，這是從平時篩查走向事件反應的下一步。</a:t>
             </a:r>
             <a:endParaRPr lang="en-US" dirty="0"/>
           </a:p>
@@ -7473,11 +7473,11 @@
             </a:avLst>
           </a:prstGeom>
           <a:solidFill>
-            <a:schemeClr val="accent4"/>
+            <a:schemeClr val="accent1"/>
           </a:solidFill>
           <a:ln w="12700">
             <a:solidFill>
-              <a:schemeClr val="accent4"/>
+              <a:schemeClr val="accent1"/>
             </a:solidFill>
             <a:prstDash val="solid"/>
           </a:ln>
@@ -7513,7 +7513,7 @@
                   <a:schemeClr val="bg1"/>
                 </a:solidFill>
               </a:rPr>
-              <a:t>未做</a:t>
+              <a:t>部分</a:t>
             </a:r>
             <a:endParaRPr lang="en-US" sz="1200" dirty="0"/>
           </a:p>
@@ -7566,7 +7566,7 @@
                   <a:schemeClr val="tx1"/>
                 </a:solidFill>
               </a:rPr>
-              <a:t>花蓮堰塞湖只做到崩塌偵測</a:t>
+              <a:t>坡面所在的土石流潛勢溪流集水區與影響範圍（水保署）</a:t>
             </a:r>
             <a:endParaRPr lang="en-US" sz="1400" dirty="0"/>
           </a:p>
@@ -7597,7 +7597,7 @@
                   <a:schemeClr val="accent4"/>
                 </a:solidFill>
               </a:rPr>
-              <a:t>崩塌 → 土砂 → 河道 → 堰塞 → 下游的串接</a:t>
+              <a:t>土砂量、河道、堰塞、下游的動態串接</a:t>
             </a:r>
             <a:endParaRPr lang="en-US" sz="1400" dirty="0"/>
           </a:p>
